--- a/docs/lecture_slides/Week 5/Week5_Lecture9_Slides_9_21_2026.pptx
+++ b/docs/lecture_slides/Week 5/Week5_Lecture9_Slides_9_21_2026.pptx
@@ -27,25 +27,26 @@
     <p:sldId id="289" r:id="rId21"/>
     <p:sldId id="290" r:id="rId22"/>
     <p:sldId id="291" r:id="rId23"/>
-    <p:sldId id="292" r:id="rId24"/>
-    <p:sldId id="310" r:id="rId25"/>
-    <p:sldId id="311" r:id="rId26"/>
-    <p:sldId id="293" r:id="rId27"/>
-    <p:sldId id="294" r:id="rId28"/>
-    <p:sldId id="295" r:id="rId29"/>
-    <p:sldId id="296" r:id="rId30"/>
-    <p:sldId id="297" r:id="rId31"/>
-    <p:sldId id="298" r:id="rId32"/>
-    <p:sldId id="299" r:id="rId33"/>
-    <p:sldId id="300" r:id="rId34"/>
-    <p:sldId id="301" r:id="rId35"/>
-    <p:sldId id="302" r:id="rId36"/>
-    <p:sldId id="303" r:id="rId37"/>
-    <p:sldId id="304" r:id="rId38"/>
-    <p:sldId id="305" r:id="rId39"/>
-    <p:sldId id="306" r:id="rId40"/>
-    <p:sldId id="307" r:id="rId41"/>
-    <p:sldId id="308" r:id="rId42"/>
+    <p:sldId id="314" r:id="rId24"/>
+    <p:sldId id="292" r:id="rId25"/>
+    <p:sldId id="310" r:id="rId26"/>
+    <p:sldId id="311" r:id="rId27"/>
+    <p:sldId id="293" r:id="rId28"/>
+    <p:sldId id="294" r:id="rId29"/>
+    <p:sldId id="295" r:id="rId30"/>
+    <p:sldId id="296" r:id="rId31"/>
+    <p:sldId id="297" r:id="rId32"/>
+    <p:sldId id="298" r:id="rId33"/>
+    <p:sldId id="299" r:id="rId34"/>
+    <p:sldId id="300" r:id="rId35"/>
+    <p:sldId id="301" r:id="rId36"/>
+    <p:sldId id="302" r:id="rId37"/>
+    <p:sldId id="303" r:id="rId38"/>
+    <p:sldId id="304" r:id="rId39"/>
+    <p:sldId id="305" r:id="rId40"/>
+    <p:sldId id="306" r:id="rId41"/>
+    <p:sldId id="307" r:id="rId42"/>
+    <p:sldId id="308" r:id="rId43"/>
   </p:sldIdLst>
   <p:sldSz cx="12192000" cy="6858000"/>
   <p:notesSz cx="6858000" cy="9144000"/>
@@ -10559,13 +10560,21 @@
                   <a:srgbClr val="C00000"/>
                 </a:solidFill>
               </a:rPr>
-              <a:t>1   </a:t>
-            </a:r>
-            <a:r>
-              <a:rPr lang="en-US" b="1"/>
-              <a:t>On the target picture, what is bias?</a:t>
-            </a:r>
-            <a:endParaRPr lang="en-US" b="1" dirty="0"/>
+              <a:t>1</a:t>
+            </a:r>
+            <a:r>
+              <a:rPr lang="en-US" b="1">
+                <a:solidFill>
+                  <a:srgbClr val="000000"/>
+                </a:solidFill>
+              </a:rPr>
+              <a:t>   What is bias?</a:t>
+            </a:r>
+            <a:endParaRPr lang="en-US" b="1" dirty="0">
+              <a:solidFill>
+                <a:srgbClr val="000000"/>
+              </a:solidFill>
+            </a:endParaRPr>
           </a:p>
         </p:txBody>
       </p:sp>
@@ -10600,7 +10609,7 @@
                   <a:srgbClr val="C00000"/>
                 </a:solidFill>
               </a:rPr>
-              <a:t>The shots are centered off the bullseye - the method misses the parameter the same way every time.</a:t>
+              <a:t>When a sampling method's estimates miss the parameter in the same direction every time - an accuracy problem.</a:t>
             </a:r>
             <a:endParaRPr lang="en-US" sz="1600" dirty="0">
               <a:solidFill>
@@ -10650,13 +10659,21 @@
                   <a:srgbClr val="C00000"/>
                 </a:solidFill>
               </a:rPr>
-              <a:t>2   </a:t>
-            </a:r>
-            <a:r>
-              <a:rPr lang="en-US" b="1"/>
-              <a:t>On the target picture, what is standard error?</a:t>
-            </a:r>
-            <a:endParaRPr lang="en-US" b="1" dirty="0"/>
+              <a:t>2</a:t>
+            </a:r>
+            <a:r>
+              <a:rPr lang="en-US" b="1">
+                <a:solidFill>
+                  <a:srgbClr val="000000"/>
+                </a:solidFill>
+              </a:rPr>
+              <a:t>   What is standard error?</a:t>
+            </a:r>
+            <a:endParaRPr lang="en-US" b="1" dirty="0">
+              <a:solidFill>
+                <a:srgbClr val="000000"/>
+              </a:solidFill>
+            </a:endParaRPr>
           </a:p>
         </p:txBody>
       </p:sp>
@@ -10691,7 +10708,7 @@
                   <a:srgbClr val="C00000"/>
                 </a:solidFill>
               </a:rPr>
-              <a:t>How spread out the shots are from one sample to the next - a measure of precision.</a:t>
+              <a:t>How much an estimate varies from one sample to the next - a precision problem.</a:t>
             </a:r>
             <a:endParaRPr lang="en-US" sz="1600" dirty="0">
               <a:solidFill>
@@ -10741,13 +10758,21 @@
                   <a:srgbClr val="C00000"/>
                 </a:solidFill>
               </a:rPr>
-              <a:t>3   </a:t>
-            </a:r>
-            <a:r>
-              <a:rPr lang="en-US" b="1"/>
-              <a:t>What does it mean to choose a sample at random?</a:t>
-            </a:r>
-            <a:endParaRPr lang="en-US" b="1" dirty="0"/>
+              <a:t>3</a:t>
+            </a:r>
+            <a:r>
+              <a:rPr lang="en-US" b="1">
+                <a:solidFill>
+                  <a:srgbClr val="000000"/>
+                </a:solidFill>
+              </a:rPr>
+              <a:t>   What is random sampling?</a:t>
+            </a:r>
+            <a:endParaRPr lang="en-US" b="1" dirty="0">
+              <a:solidFill>
+                <a:srgbClr val="000000"/>
+              </a:solidFill>
+            </a:endParaRPr>
           </a:p>
         </p:txBody>
       </p:sp>
@@ -10782,7 +10807,7 @@
                   <a:srgbClr val="C00000"/>
                 </a:solidFill>
               </a:rPr>
-              <a:t>Chance, not a person, decides which units get into the sample.</a:t>
+              <a:t>Using chance, not a person, to decide which units get into the sample.</a:t>
             </a:r>
             <a:endParaRPr lang="en-US" sz="1600" dirty="0">
               <a:solidFill>
@@ -10832,13 +10857,21 @@
                   <a:srgbClr val="C00000"/>
                 </a:solidFill>
               </a:rPr>
-              <a:t>4   </a:t>
-            </a:r>
-            <a:r>
-              <a:rPr lang="en-US" b="1"/>
-              <a:t>What makes a sample a simple random sample (SRS)?</a:t>
-            </a:r>
-            <a:endParaRPr lang="en-US" b="1" dirty="0"/>
+              <a:t>4</a:t>
+            </a:r>
+            <a:r>
+              <a:rPr lang="en-US" b="1">
+                <a:solidFill>
+                  <a:srgbClr val="000000"/>
+                </a:solidFill>
+              </a:rPr>
+              <a:t>   What is a simple random sample (SRS)?</a:t>
+            </a:r>
+            <a:endParaRPr lang="en-US" b="1" dirty="0">
+              <a:solidFill>
+                <a:srgbClr val="000000"/>
+              </a:solidFill>
+            </a:endParaRPr>
           </a:p>
         </p:txBody>
       </p:sp>
@@ -14284,7 +14317,7 @@
           <p:cNvPr id="2" name="Title 1">
             <a:extLst>
               <a:ext uri="{FF2B5EF4-FFF2-40B4-BE49-F238E27FC236}">
-                <a16:creationId xmlns:a16="http://schemas.microsoft.com/office/drawing/2014/main" id="{9A49C90A-874C-9408-C3AA-9D7B0825B480}"/>
+                <a16:creationId xmlns:a16="http://schemas.microsoft.com/office/drawing/2014/main" id="{08B9E750-8300-9D79-C9E6-2C0668028F1E}"/>
               </a:ext>
             </a:extLst>
           </p:cNvPr>
@@ -14308,96 +14341,7 @@
                   <a:srgbClr val="1F3864"/>
                 </a:solidFill>
               </a:rPr>
-              <a:t>Can we claim cause without an experiment?</a:t>
-            </a:r>
-          </a:p>
-        </p:txBody>
-      </p:sp>
-      <p:sp>
-        <p:nvSpPr>
-          <p:cNvPr id="3" name="Content Placeholder 2">
-            <a:extLst>
-              <a:ext uri="{FF2B5EF4-FFF2-40B4-BE49-F238E27FC236}">
-                <a16:creationId xmlns:a16="http://schemas.microsoft.com/office/drawing/2014/main" id="{B7680207-1BC0-55AF-A06B-5004730EF128}"/>
-              </a:ext>
-            </a:extLst>
-          </p:cNvPr>
-          <p:cNvSpPr>
-            <a:spLocks noGrp="1"/>
-          </p:cNvSpPr>
-          <p:nvPr>
-            <p:ph idx="1"/>
-          </p:nvPr>
-        </p:nvSpPr>
-        <p:spPr>
-          <a:xfrm>
-            <a:off x="762000" y="1905000"/>
-            <a:ext cx="10668000" cy="4064000"/>
-          </a:xfrm>
-        </p:spPr>
-        <p:txBody>
-          <a:bodyPr>
-            <a:noAutofit/>
-          </a:bodyPr>
-          <a:lstStyle/>
-          <a:p>
-            <a:r>
-              <a:rPr lang="en-US" sz="1600"/>
-              <a:t>Nobody can randomly assign people to smoke for thirty years - or randomly assign their birth order</a:t>
-            </a:r>
-          </a:p>
-          <a:p>
-            <a:r>
-              <a:rPr lang="en-US" sz="1600"/>
-              <a:t>Yet we are confident that smoking causes lung cancer. Decades of observational studies found:</a:t>
-            </a:r>
-          </a:p>
-          <a:p>
-            <a:pPr lvl="1"/>
-            <a:r>
-              <a:rPr lang="en-US" sz="1600"/>
-              <a:t>a strong association, found again and again in different populations</a:t>
-            </a:r>
-          </a:p>
-          <a:p>
-            <a:pPr lvl="1"/>
-            <a:r>
-              <a:rPr lang="en-US" sz="1600"/>
-              <a:t>a dose-response pattern: the more cigarettes, the higher the risk</a:t>
-            </a:r>
-          </a:p>
-          <a:p>
-            <a:pPr lvl="1"/>
-            <a:r>
-              <a:rPr lang="en-US" sz="1600"/>
-              <a:t>the right order in time: the smoking comes before the cancer</a:t>
-            </a:r>
-          </a:p>
-          <a:p>
-            <a:pPr lvl="1"/>
-            <a:r>
-              <a:rPr lang="en-US" sz="1600"/>
-              <a:t>a plausible biological explanation, backed by laboratory evidence</a:t>
-            </a:r>
-          </a:p>
-          <a:p>
-            <a:r>
-              <a:rPr lang="en-US" sz="1600"/>
-              <a:t>The 2014 Surgeon General's report: smoking causes at least 480,000 premature U.S. deaths a year, about 127,700 of them from lung cancer</a:t>
-            </a:r>
-          </a:p>
-          <a:p>
-            <a:r>
-              <a:rPr lang="en-US" sz="1600"/>
-              <a:t>Without an experiment, a causal claim needs this much evidence - </a:t>
-            </a:r>
-            <a:r>
-              <a:rPr lang="en-US" sz="1600" b="1">
-                <a:solidFill>
-                  <a:srgbClr val="C00000"/>
-                </a:solidFill>
-              </a:rPr>
-              <a:t>never one study</a:t>
+              <a:t>Coffee and the risk of death</a:t>
             </a:r>
           </a:p>
         </p:txBody>
@@ -14407,7 +14351,7 @@
           <p:cNvPr id="4" name="Slide Number Placeholder 3">
             <a:extLst>
               <a:ext uri="{FF2B5EF4-FFF2-40B4-BE49-F238E27FC236}">
-                <a16:creationId xmlns:a16="http://schemas.microsoft.com/office/drawing/2014/main" id="{DDD729E7-FFA2-29BB-2354-01F49A3A9414}"/>
+                <a16:creationId xmlns:a16="http://schemas.microsoft.com/office/drawing/2014/main" id="{EEE14074-70FD-4EAD-C2F1-B98283C2A693}"/>
               </a:ext>
             </a:extLst>
           </p:cNvPr>
@@ -14436,7 +14380,168 @@
           <p:cNvPr id="5" name="TextBox 4">
             <a:extLst>
               <a:ext uri="{FF2B5EF4-FFF2-40B4-BE49-F238E27FC236}">
-                <a16:creationId xmlns:a16="http://schemas.microsoft.com/office/drawing/2014/main" id="{92A0B40C-8745-6E52-D76C-46CA53ABD2E4}"/>
+                <a16:creationId xmlns:a16="http://schemas.microsoft.com/office/drawing/2014/main" id="{9BB82DF3-CBCF-F4EF-48A6-C0BAE1D72E7D}"/>
+              </a:ext>
+            </a:extLst>
+          </p:cNvPr>
+          <p:cNvSpPr txBox="1"/>
+          <p:nvPr/>
+        </p:nvSpPr>
+        <p:spPr>
+          <a:xfrm>
+            <a:off x="762000" y="1905000"/>
+            <a:ext cx="10668000" cy="1631216"/>
+          </a:xfrm>
+          <a:prstGeom prst="rect">
+            <a:avLst/>
+          </a:prstGeom>
+          <a:noFill/>
+        </p:spPr>
+        <p:txBody>
+          <a:bodyPr vert="horz" wrap="square" rtlCol="0">
+            <a:noAutofit/>
+          </a:bodyPr>
+          <a:lstStyle/>
+          <a:p>
+            <a:pPr>
+              <a:spcAft>
+                <a:spcPts val="800"/>
+              </a:spcAft>
+            </a:pPr>
+            <a:r>
+              <a:rPr lang="en-US" sz="1600">
+                <a:solidFill>
+                  <a:srgbClr val="000000"/>
+                </a:solidFill>
+              </a:rPr>
+              <a:t>The NIH-AARP study followed 402,260 adults aged 50 to 71 from 1995 to 2008. Before adjusting for anything but age, men who drank 6+ cups of coffee a day had a 60% HIGHER risk of death than men who drank none</a:t>
+            </a:r>
+          </a:p>
+          <a:p>
+            <a:pPr>
+              <a:spcAft>
+                <a:spcPts val="800"/>
+              </a:spcAft>
+            </a:pPr>
+            <a:r>
+              <a:rPr lang="en-US" sz="1600">
+                <a:solidFill>
+                  <a:srgbClr val="000000"/>
+                </a:solidFill>
+              </a:rPr>
+              <a:t>But 35% of those heavy coffee drinkers smoked, compared with 5% of the men who drank no coffee</a:t>
+            </a:r>
+          </a:p>
+          <a:p>
+            <a:pPr>
+              <a:spcAft>
+                <a:spcPts val="800"/>
+              </a:spcAft>
+            </a:pPr>
+            <a:r>
+              <a:rPr lang="en-US" sz="1600">
+                <a:solidFill>
+                  <a:srgbClr val="000000"/>
+                </a:solidFill>
+              </a:rPr>
+              <a:t>After adjusting for smoking and other factors, the same men had a 10% LOWER risk of death - and fewer deaths from heart disease</a:t>
+            </a:r>
+          </a:p>
+          <a:p>
+            <a:pPr>
+              <a:spcAft>
+                <a:spcPts val="800"/>
+              </a:spcAft>
+            </a:pPr>
+            <a:r>
+              <a:rPr lang="en-US" sz="1600" b="1">
+                <a:solidFill>
+                  <a:srgbClr val="1F3864"/>
+                </a:solidFill>
+              </a:rPr>
+              <a:t>Why did the coffee effect flip?</a:t>
+            </a:r>
+          </a:p>
+        </p:txBody>
+      </p:sp>
+      <p:sp>
+        <p:nvSpPr>
+          <p:cNvPr id="6" name="Rectangle: Rounded Corners 5">
+            <a:extLst>
+              <a:ext uri="{FF2B5EF4-FFF2-40B4-BE49-F238E27FC236}">
+                <a16:creationId xmlns:a16="http://schemas.microsoft.com/office/drawing/2014/main" id="{BBE0274B-59F9-AB74-8F9A-ACCE67441A4E}"/>
+              </a:ext>
+            </a:extLst>
+          </p:cNvPr>
+          <p:cNvSpPr/>
+          <p:nvPr/>
+        </p:nvSpPr>
+        <p:spPr>
+          <a:xfrm>
+            <a:off x="762000" y="4597400"/>
+            <a:ext cx="10668000" cy="1320800"/>
+          </a:xfrm>
+          <a:prstGeom prst="roundRect">
+            <a:avLst>
+              <a:gd name="adj" fmla="val 4000"/>
+            </a:avLst>
+          </a:prstGeom>
+          <a:solidFill>
+            <a:srgbClr val="F2F6FC"/>
+          </a:solidFill>
+          <a:ln w="15875">
+            <a:solidFill>
+              <a:srgbClr val="4472C4"/>
+            </a:solidFill>
+          </a:ln>
+        </p:spPr>
+        <p:style>
+          <a:lnRef idx="2">
+            <a:schemeClr val="accent1">
+              <a:shade val="15000"/>
+            </a:schemeClr>
+          </a:lnRef>
+          <a:fillRef idx="1">
+            <a:schemeClr val="accent1"/>
+          </a:fillRef>
+          <a:effectRef idx="0">
+            <a:schemeClr val="accent1"/>
+          </a:effectRef>
+          <a:fontRef idx="minor">
+            <a:schemeClr val="lt1"/>
+          </a:fontRef>
+        </p:style>
+        <p:txBody>
+          <a:bodyPr wrap="square" lIns="152400" tIns="76200" rIns="152400" bIns="76200" rtlCol="0" anchor="ctr"/>
+          <a:lstStyle/>
+          <a:p>
+            <a:r>
+              <a:rPr lang="en-US" sz="1600" b="1">
+                <a:solidFill>
+                  <a:srgbClr val="C00000"/>
+                </a:solidFill>
+              </a:rPr>
+              <a:t>Lurking variable: smoking.</a:t>
+            </a:r>
+          </a:p>
+          <a:p>
+            <a:r>
+              <a:rPr lang="en-US" sz="1600">
+                <a:solidFill>
+                  <a:srgbClr val="000000"/>
+                </a:solidFill>
+              </a:rPr>
+              <a:t>Heavy coffee drinkers smoked far more, and smoking - not coffee - raised their risk. Even after adjusting, the authors say they cannot tell whether coffee itself helps.</a:t>
+            </a:r>
+          </a:p>
+        </p:txBody>
+      </p:sp>
+      <p:sp>
+        <p:nvSpPr>
+          <p:cNvPr id="7" name="TextBox 6">
+            <a:extLst>
+              <a:ext uri="{FF2B5EF4-FFF2-40B4-BE49-F238E27FC236}">
+                <a16:creationId xmlns:a16="http://schemas.microsoft.com/office/drawing/2014/main" id="{69830291-3BFE-7470-EF0A-843217C4F363}"/>
               </a:ext>
             </a:extLst>
           </p:cNvPr>
@@ -14466,17 +14571,17 @@
                   <a:srgbClr val="595959"/>
                 </a:solidFill>
               </a:rPr>
-              <a:t>Source: U.S. Department of Health and Human Services (2014)</a:t>
-            </a:r>
-          </a:p>
-        </p:txBody>
-      </p:sp>
-      <p:sp>
-        <p:nvSpPr>
-          <p:cNvPr id="6" name="Title rule">
-            <a:extLst>
-              <a:ext uri="{FF2B5EF4-FFF2-40B4-BE49-F238E27FC236}">
-                <a16:creationId xmlns:a16="http://schemas.microsoft.com/office/drawing/2014/main" id="{1939F72A-BEBD-8766-65C6-B4203F49E6A9}"/>
+              <a:t>Source: Freedman et al. (2012), New England Journal of Medicine</a:t>
+            </a:r>
+          </a:p>
+        </p:txBody>
+      </p:sp>
+      <p:sp>
+        <p:nvSpPr>
+          <p:cNvPr id="3" name="Title rule">
+            <a:extLst>
+              <a:ext uri="{FF2B5EF4-FFF2-40B4-BE49-F238E27FC236}">
+                <a16:creationId xmlns:a16="http://schemas.microsoft.com/office/drawing/2014/main" id="{88B02BED-2AE5-639A-9FB5-0563AC06183F}"/>
               </a:ext>
             </a:extLst>
           </p:cNvPr>
@@ -14542,513 +14647,7 @@
     </p:spTree>
     <p:extLst>
       <p:ext uri="{BB962C8B-B14F-4D97-AF65-F5344CB8AC3E}">
-        <p14:creationId xmlns:p14="http://schemas.microsoft.com/office/powerpoint/2010/main" val="477607264"/>
-      </p:ext>
-    </p:extLst>
-  </p:cSld>
-  <p:clrMapOvr>
-    <a:masterClrMapping/>
-  </p:clrMapOvr>
-</p:sld>
-</file>
-
-<file path=ppt/slides/slide24.xml><?xml version="1.0" encoding="utf-8"?>
-<p:sld xmlns:a="http://schemas.openxmlformats.org/drawingml/2006/main" xmlns:r="http://schemas.openxmlformats.org/officeDocument/2006/relationships" xmlns:p="http://schemas.openxmlformats.org/presentationml/2006/main">
-  <p:cSld>
-    <p:spTree>
-      <p:nvGrpSpPr>
-        <p:cNvPr id="1" name=""/>
-        <p:cNvGrpSpPr/>
-        <p:nvPr/>
-      </p:nvGrpSpPr>
-      <p:grpSpPr>
-        <a:xfrm>
-          <a:off x="0" y="0"/>
-          <a:ext cx="0" cy="0"/>
-          <a:chOff x="0" y="0"/>
-          <a:chExt cx="0" cy="0"/>
-        </a:xfrm>
-      </p:grpSpPr>
-      <p:sp>
-        <p:nvSpPr>
-          <p:cNvPr id="2" name="Title 1">
-            <a:extLst>
-              <a:ext uri="{FF2B5EF4-FFF2-40B4-BE49-F238E27FC236}">
-                <a16:creationId xmlns:a16="http://schemas.microsoft.com/office/drawing/2014/main" id="{6A22AF1E-8589-CA56-2E20-310C69FEA1D3}"/>
-              </a:ext>
-            </a:extLst>
-          </p:cNvPr>
-          <p:cNvSpPr>
-            <a:spLocks noGrp="1"/>
-          </p:cNvSpPr>
-          <p:nvPr>
-            <p:ph type="title"/>
-          </p:nvPr>
-        </p:nvSpPr>
-        <p:spPr/>
-        <p:txBody>
-          <a:bodyPr>
-            <a:noAutofit/>
-          </a:bodyPr>
-          <a:lstStyle/>
-          <a:p>
-            <a:r>
-              <a:rPr lang="en-US">
-                <a:solidFill>
-                  <a:srgbClr val="1F3864"/>
-                </a:solidFill>
-              </a:rPr>
-              <a:t>Back to light at night and the heart</a:t>
-            </a:r>
-          </a:p>
-        </p:txBody>
-      </p:sp>
-      <p:sp>
-        <p:nvSpPr>
-          <p:cNvPr id="4" name="Slide Number Placeholder 3">
-            <a:extLst>
-              <a:ext uri="{FF2B5EF4-FFF2-40B4-BE49-F238E27FC236}">
-                <a16:creationId xmlns:a16="http://schemas.microsoft.com/office/drawing/2014/main" id="{73015A37-0A40-9416-1F1A-D02A04EF8047}"/>
-              </a:ext>
-            </a:extLst>
-          </p:cNvPr>
-          <p:cNvSpPr>
-            <a:spLocks noGrp="1"/>
-          </p:cNvSpPr>
-          <p:nvPr>
-            <p:ph type="sldNum" sz="quarter" idx="12"/>
-          </p:nvPr>
-        </p:nvSpPr>
-        <p:spPr/>
-        <p:txBody>
-          <a:bodyPr/>
-          <a:lstStyle/>
-          <a:p>
-            <a:fld id="{A80A81DD-F10A-4B1C-963A-0ABBB4865886}" type="slidenum">
-              <a:rPr lang="en-US" sz="1600" smtClean="0"/>
-              <a:t>24</a:t>
-            </a:fld>
-            <a:endParaRPr lang="en-US" sz="1600"/>
-          </a:p>
-        </p:txBody>
-      </p:sp>
-      <p:sp>
-        <p:nvSpPr>
-          <p:cNvPr id="5" name="TextBox 4">
-            <a:extLst>
-              <a:ext uri="{FF2B5EF4-FFF2-40B4-BE49-F238E27FC236}">
-                <a16:creationId xmlns:a16="http://schemas.microsoft.com/office/drawing/2014/main" id="{6D5A0F3E-BC1C-AB3C-7C49-4F27FBFE7DC9}"/>
-              </a:ext>
-            </a:extLst>
-          </p:cNvPr>
-          <p:cNvSpPr txBox="1"/>
-          <p:nvPr/>
-        </p:nvSpPr>
-        <p:spPr>
-          <a:xfrm>
-            <a:off x="762000" y="1841499"/>
-            <a:ext cx="10668000" cy="589280"/>
-          </a:xfrm>
-          <a:prstGeom prst="rect">
-            <a:avLst/>
-          </a:prstGeom>
-          <a:noFill/>
-        </p:spPr>
-        <p:txBody>
-          <a:bodyPr vert="horz" wrap="square" rtlCol="0">
-            <a:noAutofit/>
-          </a:bodyPr>
-          <a:lstStyle/>
-          <a:p>
-            <a:pPr>
-              <a:spcAft>
-                <a:spcPts val="400"/>
-              </a:spcAft>
-            </a:pPr>
-            <a:r>
-              <a:rPr lang="en-US" sz="1600">
-                <a:solidFill>
-                  <a:srgbClr val="000000"/>
-                </a:solidFill>
-              </a:rPr>
-              <a:t>Recall the UK Biobank study from slide 6: 11,071 adults wore a wrist light sensor for 7 days in 2013-2015, then had a heart MRI about 3 years later.</a:t>
-            </a:r>
-          </a:p>
-        </p:txBody>
-      </p:sp>
-      <p:sp>
-        <p:nvSpPr>
-          <p:cNvPr id="6" name="TextBox 5">
-            <a:extLst>
-              <a:ext uri="{FF2B5EF4-FFF2-40B4-BE49-F238E27FC236}">
-                <a16:creationId xmlns:a16="http://schemas.microsoft.com/office/drawing/2014/main" id="{457D82CE-DE26-541E-BE77-216218034116}"/>
-              </a:ext>
-            </a:extLst>
-          </p:cNvPr>
-          <p:cNvSpPr txBox="1"/>
-          <p:nvPr/>
-        </p:nvSpPr>
-        <p:spPr>
-          <a:xfrm>
-            <a:off x="762000" y="2557780"/>
-            <a:ext cx="10668000" cy="345440"/>
-          </a:xfrm>
-          <a:prstGeom prst="rect">
-            <a:avLst/>
-          </a:prstGeom>
-          <a:noFill/>
-        </p:spPr>
-        <p:txBody>
-          <a:bodyPr vert="horz" wrap="square" rtlCol="0">
-            <a:noAutofit/>
-          </a:bodyPr>
-          <a:lstStyle/>
-          <a:p>
-            <a:pPr marL="304800" indent="-304800"/>
-            <a:r>
-              <a:rPr lang="en-US" sz="1600" b="1">
-                <a:solidFill>
-                  <a:srgbClr val="C00000"/>
-                </a:solidFill>
-              </a:rPr>
-              <a:t>1.</a:t>
-            </a:r>
-            <a:r>
-              <a:rPr lang="en-US" sz="1600">
-                <a:solidFill>
-                  <a:srgbClr val="000000"/>
-                </a:solidFill>
-              </a:rPr>
-              <a:t>  Is this an observational study or an experiment?</a:t>
-            </a:r>
-          </a:p>
-        </p:txBody>
-      </p:sp>
-      <p:sp>
-        <p:nvSpPr>
-          <p:cNvPr id="7" name="TextBox 6">
-            <a:extLst>
-              <a:ext uri="{FF2B5EF4-FFF2-40B4-BE49-F238E27FC236}">
-                <a16:creationId xmlns:a16="http://schemas.microsoft.com/office/drawing/2014/main" id="{0FC8CA01-16A8-B0CA-E9BB-3617458ABCFE}"/>
-              </a:ext>
-            </a:extLst>
-          </p:cNvPr>
-          <p:cNvSpPr txBox="1"/>
-          <p:nvPr/>
-        </p:nvSpPr>
-        <p:spPr>
-          <a:xfrm>
-            <a:off x="1117600" y="2852420"/>
-            <a:ext cx="10312400" cy="345440"/>
-          </a:xfrm>
-          <a:prstGeom prst="rect">
-            <a:avLst/>
-          </a:prstGeom>
-          <a:noFill/>
-        </p:spPr>
-        <p:txBody>
-          <a:bodyPr vert="horz" wrap="square" rtlCol="0">
-            <a:noAutofit/>
-          </a:bodyPr>
-          <a:lstStyle/>
-          <a:p>
-            <a:r>
-              <a:rPr lang="en-US" sz="1600" b="1">
-                <a:solidFill>
-                  <a:srgbClr val="C00000"/>
-                </a:solidFill>
-              </a:rPr>
-              <a:t>Observational. Nobody was assigned a bright or a dark bedroom - the light people already had was measured.</a:t>
-            </a:r>
-          </a:p>
-        </p:txBody>
-      </p:sp>
-      <p:sp>
-        <p:nvSpPr>
-          <p:cNvPr id="8" name="TextBox 7">
-            <a:extLst>
-              <a:ext uri="{FF2B5EF4-FFF2-40B4-BE49-F238E27FC236}">
-                <a16:creationId xmlns:a16="http://schemas.microsoft.com/office/drawing/2014/main" id="{754BB752-313E-E3BB-C8C6-DE8F8D782176}"/>
-              </a:ext>
-            </a:extLst>
-          </p:cNvPr>
-          <p:cNvSpPr txBox="1"/>
-          <p:nvPr/>
-        </p:nvSpPr>
-        <p:spPr>
-          <a:xfrm>
-            <a:off x="762000" y="3350260"/>
-            <a:ext cx="10668000" cy="345440"/>
-          </a:xfrm>
-          <a:prstGeom prst="rect">
-            <a:avLst/>
-          </a:prstGeom>
-          <a:noFill/>
-        </p:spPr>
-        <p:txBody>
-          <a:bodyPr vert="horz" wrap="square" rtlCol="0">
-            <a:noAutofit/>
-          </a:bodyPr>
-          <a:lstStyle/>
-          <a:p>
-            <a:pPr marL="304800" indent="-304800"/>
-            <a:r>
-              <a:rPr lang="en-US" sz="1600" b="1">
-                <a:solidFill>
-                  <a:srgbClr val="C00000"/>
-                </a:solidFill>
-              </a:rPr>
-              <a:t>2.</a:t>
-            </a:r>
-            <a:r>
-              <a:rPr lang="en-US" sz="1600">
-                <a:solidFill>
-                  <a:srgbClr val="000000"/>
-                </a:solidFill>
-              </a:rPr>
-              <a:t>  People with the most light above 3 lux had 1.5% thicker heart walls than people with none. Did the light cause it?</a:t>
-            </a:r>
-          </a:p>
-        </p:txBody>
-      </p:sp>
-      <p:sp>
-        <p:nvSpPr>
-          <p:cNvPr id="9" name="TextBox 8">
-            <a:extLst>
-              <a:ext uri="{FF2B5EF4-FFF2-40B4-BE49-F238E27FC236}">
-                <a16:creationId xmlns:a16="http://schemas.microsoft.com/office/drawing/2014/main" id="{3BCF69E3-89A7-0A3C-BBC9-7A78B36DF97D}"/>
-              </a:ext>
-            </a:extLst>
-          </p:cNvPr>
-          <p:cNvSpPr txBox="1"/>
-          <p:nvPr/>
-        </p:nvSpPr>
-        <p:spPr>
-          <a:xfrm>
-            <a:off x="1117600" y="3644900"/>
-            <a:ext cx="10312400" cy="345440"/>
-          </a:xfrm>
-          <a:prstGeom prst="rect">
-            <a:avLst/>
-          </a:prstGeom>
-          <a:noFill/>
-        </p:spPr>
-        <p:txBody>
-          <a:bodyPr vert="horz" wrap="square" rtlCol="0">
-            <a:noAutofit/>
-          </a:bodyPr>
-          <a:lstStyle/>
-          <a:p>
-            <a:r>
-              <a:rPr lang="en-US" sz="1600" b="1">
-                <a:solidFill>
-                  <a:srgbClr val="C00000"/>
-                </a:solidFill>
-              </a:rPr>
-              <a:t>This study cannot tell us. It shows an association - the authors say their design cannot establish cause.</a:t>
-            </a:r>
-          </a:p>
-        </p:txBody>
-      </p:sp>
-      <p:sp>
-        <p:nvSpPr>
-          <p:cNvPr id="10" name="TextBox 9">
-            <a:extLst>
-              <a:ext uri="{FF2B5EF4-FFF2-40B4-BE49-F238E27FC236}">
-                <a16:creationId xmlns:a16="http://schemas.microsoft.com/office/drawing/2014/main" id="{16917509-9C7A-F531-8F14-27897C39BE49}"/>
-              </a:ext>
-            </a:extLst>
-          </p:cNvPr>
-          <p:cNvSpPr txBox="1"/>
-          <p:nvPr/>
-        </p:nvSpPr>
-        <p:spPr>
-          <a:xfrm>
-            <a:off x="762000" y="4142740"/>
-            <a:ext cx="10668000" cy="345440"/>
-          </a:xfrm>
-          <a:prstGeom prst="rect">
-            <a:avLst/>
-          </a:prstGeom>
-          <a:noFill/>
-        </p:spPr>
-        <p:txBody>
-          <a:bodyPr vert="horz" wrap="square" rtlCol="0">
-            <a:noAutofit/>
-          </a:bodyPr>
-          <a:lstStyle/>
-          <a:p>
-            <a:pPr marL="304800" indent="-304800"/>
-            <a:r>
-              <a:rPr lang="en-US" sz="1600" b="1">
-                <a:solidFill>
-                  <a:srgbClr val="C00000"/>
-                </a:solidFill>
-              </a:rPr>
-              <a:t>3.</a:t>
-            </a:r>
-            <a:r>
-              <a:rPr lang="en-US" sz="1600">
-                <a:solidFill>
-                  <a:srgbClr val="000000"/>
-                </a:solidFill>
-              </a:rPr>
-              <a:t>  The press release was titled “Too much light at night changes the shape and working of the heart.” Fair?</a:t>
-            </a:r>
-          </a:p>
-        </p:txBody>
-      </p:sp>
-      <p:sp>
-        <p:nvSpPr>
-          <p:cNvPr id="11" name="TextBox 10">
-            <a:extLst>
-              <a:ext uri="{FF2B5EF4-FFF2-40B4-BE49-F238E27FC236}">
-                <a16:creationId xmlns:a16="http://schemas.microsoft.com/office/drawing/2014/main" id="{1D9195F8-8C3F-F2C2-86AF-1FB585FE33AE}"/>
-              </a:ext>
-            </a:extLst>
-          </p:cNvPr>
-          <p:cNvSpPr txBox="1"/>
-          <p:nvPr/>
-        </p:nvSpPr>
-        <p:spPr>
-          <a:xfrm>
-            <a:off x="1117600" y="4437380"/>
-            <a:ext cx="10312400" cy="345440"/>
-          </a:xfrm>
-          <a:prstGeom prst="rect">
-            <a:avLst/>
-          </a:prstGeom>
-          <a:noFill/>
-        </p:spPr>
-        <p:txBody>
-          <a:bodyPr vert="horz" wrap="square" rtlCol="0">
-            <a:noAutofit/>
-          </a:bodyPr>
-          <a:lstStyle/>
-          <a:p>
-            <a:r>
-              <a:rPr lang="en-US" sz="1600" b="1">
-                <a:solidFill>
-                  <a:srgbClr val="C00000"/>
-                </a:solidFill>
-              </a:rPr>
-              <a:t>It goes too far. The paper says more night light was associated with these changes, not that it changed the heart.</a:t>
-            </a:r>
-          </a:p>
-        </p:txBody>
-      </p:sp>
-      <p:sp>
-        <p:nvSpPr>
-          <p:cNvPr id="12" name="TextBox 11">
-            <a:extLst>
-              <a:ext uri="{FF2B5EF4-FFF2-40B4-BE49-F238E27FC236}">
-                <a16:creationId xmlns:a16="http://schemas.microsoft.com/office/drawing/2014/main" id="{CD8609FA-BB60-2749-A121-ABA24D881BCD}"/>
-              </a:ext>
-            </a:extLst>
-          </p:cNvPr>
-          <p:cNvSpPr txBox="1"/>
-          <p:nvPr/>
-        </p:nvSpPr>
-        <p:spPr>
-          <a:xfrm>
-            <a:off x="762000" y="6045200"/>
-            <a:ext cx="10668000" cy="345440"/>
-          </a:xfrm>
-          <a:prstGeom prst="rect">
-            <a:avLst/>
-          </a:prstGeom>
-          <a:noFill/>
-        </p:spPr>
-        <p:txBody>
-          <a:bodyPr vert="horz" wrap="square" rtlCol="0">
-            <a:noAutofit/>
-          </a:bodyPr>
-          <a:lstStyle/>
-          <a:p>
-            <a:pPr algn="r"/>
-            <a:r>
-              <a:rPr lang="en-US" sz="1600" i="1">
-                <a:solidFill>
-                  <a:srgbClr val="595959"/>
-                </a:solidFill>
-              </a:rPr>
-              <a:t>Sources: Dai et al. (2026) and Münzel, Kuntic and Daiber (2026), European Heart Journal; ESC press release (2026)</a:t>
-            </a:r>
-          </a:p>
-        </p:txBody>
-      </p:sp>
-      <p:sp>
-        <p:nvSpPr>
-          <p:cNvPr id="3" name="Title rule">
-            <a:extLst>
-              <a:ext uri="{FF2B5EF4-FFF2-40B4-BE49-F238E27FC236}">
-                <a16:creationId xmlns:a16="http://schemas.microsoft.com/office/drawing/2014/main" id="{44D05FFE-5C77-3343-F6ED-D73A8174B663}"/>
-              </a:ext>
-            </a:extLst>
-          </p:cNvPr>
-          <p:cNvSpPr/>
-          <p:nvPr/>
-        </p:nvSpPr>
-        <p:spPr>
-          <a:xfrm>
-            <a:off x="838200" y="1600200"/>
-            <a:ext cx="10515600" cy="38100"/>
-          </a:xfrm>
-          <a:prstGeom prst="rect">
-            <a:avLst/>
-          </a:prstGeom>
-          <a:solidFill>
-            <a:srgbClr val="4472C4"/>
-          </a:solidFill>
-          <a:ln w="12700" cap="flat" cmpd="sng" algn="ctr">
-            <a:noFill/>
-            <a:prstDash val="solid"/>
-            <a:miter lim="800000"/>
-          </a:ln>
-          <a:effectLst/>
-          <a:extLst>
-            <a:ext uri="{91240B29-F687-4F45-9708-019B960494DF}">
-              <a14:hiddenLine xmlns:a14="http://schemas.microsoft.com/office/drawing/2010/main" w="12700" cap="flat" cmpd="sng" algn="ctr">
-                <a:solidFill>
-                  <a:schemeClr val="accent1">
-                    <a:shade val="15000"/>
-                  </a:schemeClr>
-                </a:solidFill>
-                <a:prstDash val="solid"/>
-                <a:miter lim="800000"/>
-              </a14:hiddenLine>
-            </a:ext>
-          </a:extLst>
-        </p:spPr>
-        <p:style>
-          <a:lnRef idx="2">
-            <a:schemeClr val="accent1">
-              <a:shade val="15000"/>
-            </a:schemeClr>
-          </a:lnRef>
-          <a:fillRef idx="1">
-            <a:schemeClr val="accent1"/>
-          </a:fillRef>
-          <a:effectRef idx="0">
-            <a:schemeClr val="accent1"/>
-          </a:effectRef>
-          <a:fontRef idx="minor">
-            <a:schemeClr val="lt1"/>
-          </a:fontRef>
-        </p:style>
-        <p:txBody>
-          <a:bodyPr rtlCol="0" anchor="ctr"/>
-          <a:lstStyle/>
-          <a:p>
-            <a:pPr algn="ctr"/>
-            <a:endParaRPr lang="en-US"/>
-          </a:p>
-        </p:txBody>
-      </p:sp>
-    </p:spTree>
-    <p:extLst>
-      <p:ext uri="{BB962C8B-B14F-4D97-AF65-F5344CB8AC3E}">
-        <p14:creationId xmlns:p14="http://schemas.microsoft.com/office/powerpoint/2010/main" val="1783935017"/>
+        <p14:creationId xmlns:p14="http://schemas.microsoft.com/office/powerpoint/2010/main" val="1651842634"/>
       </p:ext>
     </p:extLst>
   </p:cSld>
@@ -15089,7 +14688,7 @@
                                           </p:stCondLst>
                                         </p:cTn>
                                         <p:tgtEl>
-                                          <p:spTgt spid="7"/>
+                                          <p:spTgt spid="6"/>
                                         </p:tgtEl>
                                         <p:attrNameLst>
                                           <p:attrName>style.visibility</p:attrName>
@@ -15107,7 +14706,7 @@
                                           </p:stCondLst>
                                         </p:cTn>
                                         <p:tgtEl>
-                                          <p:spTgt spid="7"/>
+                                          <p:spTgt spid="6"/>
                                         </p:tgtEl>
                                         <p:attrNameLst>
                                           <p:attrName>ppt_x</p:attrName>
@@ -15122,7 +14721,7 @@
                                           </p:stCondLst>
                                         </p:cTn>
                                         <p:tgtEl>
-                                          <p:spTgt spid="7"/>
+                                          <p:spTgt spid="6"/>
                                         </p:tgtEl>
                                         <p:attrNameLst>
                                           <p:attrName>xshear</p:attrName>
@@ -15137,7 +14736,7 @@
                                           </p:stCondLst>
                                         </p:cTn>
                                         <p:tgtEl>
-                                          <p:spTgt spid="7"/>
+                                          <p:spTgt spid="6"/>
                                         </p:tgtEl>
                                       </p:cBhvr>
                                       <p:from x="100000" y="100000"/>
@@ -15151,215 +14750,7 @@
                                           </p:stCondLst>
                                         </p:cTn>
                                         <p:tgtEl>
-                                          <p:spTgt spid="7"/>
-                                        </p:tgtEl>
-                                        <p:attrNameLst>
-                                          <p:attrName>ppt_x</p:attrName>
-                                        </p:attrNameLst>
-                                      </p:cBhvr>
-                                    </p:anim>
-                                  </p:childTnLst>
-                                </p:cTn>
-                              </p:par>
-                            </p:childTnLst>
-                          </p:cTn>
-                        </p:par>
-                      </p:childTnLst>
-                    </p:cTn>
-                  </p:par>
-                  <p:par>
-                    <p:cTn id="11" fill="hold">
-                      <p:stCondLst>
-                        <p:cond delay="indefinite"/>
-                      </p:stCondLst>
-                      <p:childTnLst>
-                        <p:par>
-                          <p:cTn id="12" fill="hold">
-                            <p:stCondLst>
-                              <p:cond delay="0"/>
-                            </p:stCondLst>
-                            <p:childTnLst>
-                              <p:par>
-                                <p:cTn id="13" presetID="34" presetClass="entr" presetSubtype="0" fill="hold" grpId="0" nodeType="clickEffect">
-                                  <p:stCondLst>
-                                    <p:cond delay="0"/>
-                                  </p:stCondLst>
-                                  <p:childTnLst>
-                                    <p:set>
-                                      <p:cBhvr>
-                                        <p:cTn id="14" dur="1" fill="hold">
-                                          <p:stCondLst>
-                                            <p:cond delay="0"/>
-                                          </p:stCondLst>
-                                        </p:cTn>
-                                        <p:tgtEl>
-                                          <p:spTgt spid="9"/>
-                                        </p:tgtEl>
-                                        <p:attrNameLst>
-                                          <p:attrName>style.visibility</p:attrName>
-                                        </p:attrNameLst>
-                                      </p:cBhvr>
-                                      <p:to>
-                                        <p:strVal val="visible"/>
-                                      </p:to>
-                                    </p:set>
-                                    <p:anim from="(-#ppt_w/2)" to="(#ppt_x)" calcmode="lin" valueType="num">
-                                      <p:cBhvr>
-                                        <p:cTn id="15" dur="600" fill="hold">
-                                          <p:stCondLst>
-                                            <p:cond delay="0"/>
-                                          </p:stCondLst>
-                                        </p:cTn>
-                                        <p:tgtEl>
-                                          <p:spTgt spid="9"/>
-                                        </p:tgtEl>
-                                        <p:attrNameLst>
-                                          <p:attrName>ppt_x</p:attrName>
-                                        </p:attrNameLst>
-                                      </p:cBhvr>
-                                    </p:anim>
-                                    <p:anim from="0" to="-1.0" calcmode="lin" valueType="num">
-                                      <p:cBhvr>
-                                        <p:cTn id="16" dur="200" decel="50000" autoRev="1" fill="hold">
-                                          <p:stCondLst>
-                                            <p:cond delay="600"/>
-                                          </p:stCondLst>
-                                        </p:cTn>
-                                        <p:tgtEl>
-                                          <p:spTgt spid="9"/>
-                                        </p:tgtEl>
-                                        <p:attrNameLst>
-                                          <p:attrName>xshear</p:attrName>
-                                        </p:attrNameLst>
-                                      </p:cBhvr>
-                                    </p:anim>
-                                    <p:animScale>
-                                      <p:cBhvr>
-                                        <p:cTn id="17" dur="200" decel="100000" autoRev="1" fill="hold">
-                                          <p:stCondLst>
-                                            <p:cond delay="600"/>
-                                          </p:stCondLst>
-                                        </p:cTn>
-                                        <p:tgtEl>
-                                          <p:spTgt spid="9"/>
-                                        </p:tgtEl>
-                                      </p:cBhvr>
-                                      <p:from x="100000" y="100000"/>
-                                      <p:to x="80000" y="100000"/>
-                                    </p:animScale>
-                                    <p:anim by="(#ppt_h/3+#ppt_w*0.1)" calcmode="lin" valueType="num">
-                                      <p:cBhvr additive="sum">
-                                        <p:cTn id="18" dur="200" decel="100000" autoRev="1" fill="hold">
-                                          <p:stCondLst>
-                                            <p:cond delay="600"/>
-                                          </p:stCondLst>
-                                        </p:cTn>
-                                        <p:tgtEl>
-                                          <p:spTgt spid="9"/>
-                                        </p:tgtEl>
-                                        <p:attrNameLst>
-                                          <p:attrName>ppt_x</p:attrName>
-                                        </p:attrNameLst>
-                                      </p:cBhvr>
-                                    </p:anim>
-                                  </p:childTnLst>
-                                </p:cTn>
-                              </p:par>
-                            </p:childTnLst>
-                          </p:cTn>
-                        </p:par>
-                      </p:childTnLst>
-                    </p:cTn>
-                  </p:par>
-                  <p:par>
-                    <p:cTn id="19" fill="hold">
-                      <p:stCondLst>
-                        <p:cond delay="indefinite"/>
-                      </p:stCondLst>
-                      <p:childTnLst>
-                        <p:par>
-                          <p:cTn id="20" fill="hold">
-                            <p:stCondLst>
-                              <p:cond delay="0"/>
-                            </p:stCondLst>
-                            <p:childTnLst>
-                              <p:par>
-                                <p:cTn id="21" presetID="34" presetClass="entr" presetSubtype="0" fill="hold" grpId="0" nodeType="clickEffect">
-                                  <p:stCondLst>
-                                    <p:cond delay="0"/>
-                                  </p:stCondLst>
-                                  <p:childTnLst>
-                                    <p:set>
-                                      <p:cBhvr>
-                                        <p:cTn id="22" dur="1" fill="hold">
-                                          <p:stCondLst>
-                                            <p:cond delay="0"/>
-                                          </p:stCondLst>
-                                        </p:cTn>
-                                        <p:tgtEl>
-                                          <p:spTgt spid="11"/>
-                                        </p:tgtEl>
-                                        <p:attrNameLst>
-                                          <p:attrName>style.visibility</p:attrName>
-                                        </p:attrNameLst>
-                                      </p:cBhvr>
-                                      <p:to>
-                                        <p:strVal val="visible"/>
-                                      </p:to>
-                                    </p:set>
-                                    <p:anim from="(-#ppt_w/2)" to="(#ppt_x)" calcmode="lin" valueType="num">
-                                      <p:cBhvr>
-                                        <p:cTn id="23" dur="600" fill="hold">
-                                          <p:stCondLst>
-                                            <p:cond delay="0"/>
-                                          </p:stCondLst>
-                                        </p:cTn>
-                                        <p:tgtEl>
-                                          <p:spTgt spid="11"/>
-                                        </p:tgtEl>
-                                        <p:attrNameLst>
-                                          <p:attrName>ppt_x</p:attrName>
-                                        </p:attrNameLst>
-                                      </p:cBhvr>
-                                    </p:anim>
-                                    <p:anim from="0" to="-1.0" calcmode="lin" valueType="num">
-                                      <p:cBhvr>
-                                        <p:cTn id="24" dur="200" decel="50000" autoRev="1" fill="hold">
-                                          <p:stCondLst>
-                                            <p:cond delay="600"/>
-                                          </p:stCondLst>
-                                        </p:cTn>
-                                        <p:tgtEl>
-                                          <p:spTgt spid="11"/>
-                                        </p:tgtEl>
-                                        <p:attrNameLst>
-                                          <p:attrName>xshear</p:attrName>
-                                        </p:attrNameLst>
-                                      </p:cBhvr>
-                                    </p:anim>
-                                    <p:animScale>
-                                      <p:cBhvr>
-                                        <p:cTn id="25" dur="200" decel="100000" autoRev="1" fill="hold">
-                                          <p:stCondLst>
-                                            <p:cond delay="600"/>
-                                          </p:stCondLst>
-                                        </p:cTn>
-                                        <p:tgtEl>
-                                          <p:spTgt spid="11"/>
-                                        </p:tgtEl>
-                                      </p:cBhvr>
-                                      <p:from x="100000" y="100000"/>
-                                      <p:to x="80000" y="100000"/>
-                                    </p:animScale>
-                                    <p:anim by="(#ppt_h/3+#ppt_w*0.1)" calcmode="lin" valueType="num">
-                                      <p:cBhvr additive="sum">
-                                        <p:cTn id="26" dur="200" decel="100000" autoRev="1" fill="hold">
-                                          <p:stCondLst>
-                                            <p:cond delay="600"/>
-                                          </p:stCondLst>
-                                        </p:cTn>
-                                        <p:tgtEl>
-                                          <p:spTgt spid="11"/>
+                                          <p:spTgt spid="6"/>
                                         </p:tgtEl>
                                         <p:attrNameLst>
                                           <p:attrName>ppt_x</p:attrName>
@@ -15397,15 +14788,13 @@
       </p:par>
     </p:tnLst>
     <p:bldLst>
-      <p:bldP spid="7" grpId="0"/>
-      <p:bldP spid="9" grpId="0"/>
-      <p:bldP spid="11" grpId="0"/>
+      <p:bldP spid="6" grpId="0" animBg="1"/>
     </p:bldLst>
   </p:timing>
 </p:sld>
 </file>
 
-<file path=ppt/slides/slide25.xml><?xml version="1.0" encoding="utf-8"?>
+<file path=ppt/slides/slide24.xml><?xml version="1.0" encoding="utf-8"?>
 <p:sld xmlns:a="http://schemas.openxmlformats.org/drawingml/2006/main" xmlns:r="http://schemas.openxmlformats.org/officeDocument/2006/relationships" xmlns:p="http://schemas.openxmlformats.org/presentationml/2006/main">
   <p:cSld>
     <p:spTree>
@@ -15427,7 +14816,7 @@
           <p:cNvPr id="2" name="Title 1">
             <a:extLst>
               <a:ext uri="{FF2B5EF4-FFF2-40B4-BE49-F238E27FC236}">
-                <a16:creationId xmlns:a16="http://schemas.microsoft.com/office/drawing/2014/main" id="{5B41C2DC-B562-4055-A05F-8710B472DC0C}"/>
+                <a16:creationId xmlns:a16="http://schemas.microsoft.com/office/drawing/2014/main" id="{9A49C90A-874C-9408-C3AA-9D7B0825B480}"/>
               </a:ext>
             </a:extLst>
           </p:cNvPr>
@@ -15451,7 +14840,96 @@
                   <a:srgbClr val="1F3864"/>
                 </a:solidFill>
               </a:rPr>
-              <a:t>Light at night: how strong is the evidence?</a:t>
+              <a:t>Can we claim cause without an experiment?</a:t>
+            </a:r>
+          </a:p>
+        </p:txBody>
+      </p:sp>
+      <p:sp>
+        <p:nvSpPr>
+          <p:cNvPr id="3" name="Content Placeholder 2">
+            <a:extLst>
+              <a:ext uri="{FF2B5EF4-FFF2-40B4-BE49-F238E27FC236}">
+                <a16:creationId xmlns:a16="http://schemas.microsoft.com/office/drawing/2014/main" id="{B7680207-1BC0-55AF-A06B-5004730EF128}"/>
+              </a:ext>
+            </a:extLst>
+          </p:cNvPr>
+          <p:cNvSpPr>
+            <a:spLocks noGrp="1"/>
+          </p:cNvSpPr>
+          <p:nvPr>
+            <p:ph idx="1"/>
+          </p:nvPr>
+        </p:nvSpPr>
+        <p:spPr>
+          <a:xfrm>
+            <a:off x="762000" y="1905000"/>
+            <a:ext cx="10668000" cy="4064000"/>
+          </a:xfrm>
+        </p:spPr>
+        <p:txBody>
+          <a:bodyPr>
+            <a:noAutofit/>
+          </a:bodyPr>
+          <a:lstStyle/>
+          <a:p>
+            <a:r>
+              <a:rPr lang="en-US" sz="1600"/>
+              <a:t>Nobody can randomly assign people to smoke for thirty years - or randomly assign their birth order</a:t>
+            </a:r>
+          </a:p>
+          <a:p>
+            <a:r>
+              <a:rPr lang="en-US" sz="1600"/>
+              <a:t>Yet we are confident that smoking causes lung cancer. Decades of observational studies found:</a:t>
+            </a:r>
+          </a:p>
+          <a:p>
+            <a:pPr lvl="1"/>
+            <a:r>
+              <a:rPr lang="en-US" sz="1600"/>
+              <a:t>a strong association, found again and again in different populations</a:t>
+            </a:r>
+          </a:p>
+          <a:p>
+            <a:pPr lvl="1"/>
+            <a:r>
+              <a:rPr lang="en-US" sz="1600"/>
+              <a:t>a dose-response pattern: the more cigarettes, the higher the risk</a:t>
+            </a:r>
+          </a:p>
+          <a:p>
+            <a:pPr lvl="1"/>
+            <a:r>
+              <a:rPr lang="en-US" sz="1600"/>
+              <a:t>the right order in time: the smoking comes before the cancer</a:t>
+            </a:r>
+          </a:p>
+          <a:p>
+            <a:pPr lvl="1"/>
+            <a:r>
+              <a:rPr lang="en-US" sz="1600"/>
+              <a:t>a plausible biological explanation, backed by laboratory evidence</a:t>
+            </a:r>
+          </a:p>
+          <a:p>
+            <a:r>
+              <a:rPr lang="en-US" sz="1600"/>
+              <a:t>The 2014 Surgeon General's report: smoking causes at least 480,000 premature U.S. deaths a year, about 127,700 of them from lung cancer</a:t>
+            </a:r>
+          </a:p>
+          <a:p>
+            <a:r>
+              <a:rPr lang="en-US" sz="1600"/>
+              <a:t>Without an experiment, a causal claim needs this much evidence - </a:t>
+            </a:r>
+            <a:r>
+              <a:rPr lang="en-US" sz="1600" b="1">
+                <a:solidFill>
+                  <a:srgbClr val="C00000"/>
+                </a:solidFill>
+              </a:rPr>
+              <a:t>never one study</a:t>
             </a:r>
           </a:p>
         </p:txBody>
@@ -15461,7 +14939,7 @@
           <p:cNvPr id="4" name="Slide Number Placeholder 3">
             <a:extLst>
               <a:ext uri="{FF2B5EF4-FFF2-40B4-BE49-F238E27FC236}">
-                <a16:creationId xmlns:a16="http://schemas.microsoft.com/office/drawing/2014/main" id="{8DE2B145-B9E0-9EDE-7846-E574CD9CB5FA}"/>
+                <a16:creationId xmlns:a16="http://schemas.microsoft.com/office/drawing/2014/main" id="{DDD729E7-FFA2-29BB-2354-01F49A3A9414}"/>
               </a:ext>
             </a:extLst>
           </p:cNvPr>
@@ -15479,7 +14957,7 @@
           <a:p>
             <a:fld id="{A80A81DD-F10A-4B1C-963A-0ABBB4865886}" type="slidenum">
               <a:rPr lang="en-US" sz="1600" smtClean="0"/>
-              <a:t>25</a:t>
+              <a:t>24</a:t>
             </a:fld>
             <a:endParaRPr lang="en-US" sz="1600"/>
           </a:p>
@@ -15490,312 +14968,7 @@
           <p:cNvPr id="5" name="TextBox 4">
             <a:extLst>
               <a:ext uri="{FF2B5EF4-FFF2-40B4-BE49-F238E27FC236}">
-                <a16:creationId xmlns:a16="http://schemas.microsoft.com/office/drawing/2014/main" id="{264AEBD8-9C55-5C87-F654-606BB91A9C10}"/>
-              </a:ext>
-            </a:extLst>
-          </p:cNvPr>
-          <p:cNvSpPr txBox="1"/>
-          <p:nvPr/>
-        </p:nvSpPr>
-        <p:spPr>
-          <a:xfrm>
-            <a:off x="762000" y="1841499"/>
-            <a:ext cx="10668000" cy="589280"/>
-          </a:xfrm>
-          <a:prstGeom prst="rect">
-            <a:avLst/>
-          </a:prstGeom>
-          <a:noFill/>
-        </p:spPr>
-        <p:txBody>
-          <a:bodyPr vert="horz" wrap="square" rtlCol="0">
-            <a:noAutofit/>
-          </a:bodyPr>
-          <a:lstStyle/>
-          <a:p>
-            <a:pPr>
-              <a:spcAft>
-                <a:spcPts val="400"/>
-              </a:spcAft>
-            </a:pPr>
-            <a:r>
-              <a:rPr lang="en-US" sz="1600">
-                <a:solidFill>
-                  <a:srgbClr val="000000"/>
-                </a:solidFill>
-              </a:rPr>
-              <a:t>The authors adjusted for age, smoking, physical activity, BMI, air pollution, deprivation and more. The heart changes grew steadily as night light went up.</a:t>
-            </a:r>
-          </a:p>
-        </p:txBody>
-      </p:sp>
-      <p:sp>
-        <p:nvSpPr>
-          <p:cNvPr id="6" name="TextBox 5">
-            <a:extLst>
-              <a:ext uri="{FF2B5EF4-FFF2-40B4-BE49-F238E27FC236}">
-                <a16:creationId xmlns:a16="http://schemas.microsoft.com/office/drawing/2014/main" id="{83AA5382-396D-E973-8156-DC5F1BD9BB9E}"/>
-              </a:ext>
-            </a:extLst>
-          </p:cNvPr>
-          <p:cNvSpPr txBox="1"/>
-          <p:nvPr/>
-        </p:nvSpPr>
-        <p:spPr>
-          <a:xfrm>
-            <a:off x="762000" y="2557780"/>
-            <a:ext cx="10668000" cy="345440"/>
-          </a:xfrm>
-          <a:prstGeom prst="rect">
-            <a:avLst/>
-          </a:prstGeom>
-          <a:noFill/>
-        </p:spPr>
-        <p:txBody>
-          <a:bodyPr vert="horz" wrap="square" rtlCol="0">
-            <a:noAutofit/>
-          </a:bodyPr>
-          <a:lstStyle/>
-          <a:p>
-            <a:pPr marL="304800" indent="-304800"/>
-            <a:r>
-              <a:rPr lang="en-US" sz="1600" b="1">
-                <a:solidFill>
-                  <a:srgbClr val="C00000"/>
-                </a:solidFill>
-              </a:rPr>
-              <a:t>1.</a:t>
-            </a:r>
-            <a:r>
-              <a:rPr lang="en-US" sz="1600">
-                <a:solidFill>
-                  <a:srgbClr val="000000"/>
-                </a:solidFill>
-              </a:rPr>
-              <a:t>  They adjusted for many variables. Is that as good as random assignment?</a:t>
-            </a:r>
-          </a:p>
-        </p:txBody>
-      </p:sp>
-      <p:sp>
-        <p:nvSpPr>
-          <p:cNvPr id="7" name="TextBox 6">
-            <a:extLst>
-              <a:ext uri="{FF2B5EF4-FFF2-40B4-BE49-F238E27FC236}">
-                <a16:creationId xmlns:a16="http://schemas.microsoft.com/office/drawing/2014/main" id="{EDA6341D-833D-A973-E4BF-28891FD5C0E1}"/>
-              </a:ext>
-            </a:extLst>
-          </p:cNvPr>
-          <p:cNvSpPr txBox="1"/>
-          <p:nvPr/>
-        </p:nvSpPr>
-        <p:spPr>
-          <a:xfrm>
-            <a:off x="1117600" y="2852420"/>
-            <a:ext cx="10312400" cy="345440"/>
-          </a:xfrm>
-          <a:prstGeom prst="rect">
-            <a:avLst/>
-          </a:prstGeom>
-          <a:noFill/>
-        </p:spPr>
-        <p:txBody>
-          <a:bodyPr vert="horz" wrap="square" rtlCol="0">
-            <a:noAutofit/>
-          </a:bodyPr>
-          <a:lstStyle/>
-          <a:p>
-            <a:r>
-              <a:rPr lang="en-US" sz="1600" b="1">
-                <a:solidFill>
-                  <a:srgbClr val="C00000"/>
-                </a:solidFill>
-              </a:rPr>
-              <a:t>No. Adjusting only handles what was measured. Traffic noise was not, and the editorial says it could confound.</a:t>
-            </a:r>
-          </a:p>
-        </p:txBody>
-      </p:sp>
-      <p:sp>
-        <p:nvSpPr>
-          <p:cNvPr id="8" name="TextBox 7">
-            <a:extLst>
-              <a:ext uri="{FF2B5EF4-FFF2-40B4-BE49-F238E27FC236}">
-                <a16:creationId xmlns:a16="http://schemas.microsoft.com/office/drawing/2014/main" id="{58FA17D4-67C2-6627-E29A-DF60916A80D5}"/>
-              </a:ext>
-            </a:extLst>
-          </p:cNvPr>
-          <p:cNvSpPr txBox="1"/>
-          <p:nvPr/>
-        </p:nvSpPr>
-        <p:spPr>
-          <a:xfrm>
-            <a:off x="762000" y="3350260"/>
-            <a:ext cx="10668000" cy="345440"/>
-          </a:xfrm>
-          <a:prstGeom prst="rect">
-            <a:avLst/>
-          </a:prstGeom>
-          <a:noFill/>
-        </p:spPr>
-        <p:txBody>
-          <a:bodyPr vert="horz" wrap="square" rtlCol="0">
-            <a:noAutofit/>
-          </a:bodyPr>
-          <a:lstStyle/>
-          <a:p>
-            <a:pPr marL="304800" indent="-304800"/>
-            <a:r>
-              <a:rPr lang="en-US" sz="1600" b="1">
-                <a:solidFill>
-                  <a:srgbClr val="C00000"/>
-                </a:solidFill>
-              </a:rPr>
-              <a:t>2.</a:t>
-            </a:r>
-            <a:r>
-              <a:rPr lang="en-US" sz="1600">
-                <a:solidFill>
-                  <a:srgbClr val="000000"/>
-                </a:solidFill>
-              </a:rPr>
-              <a:t>  Which features from the smoking evidence does this study have? What is it missing?</a:t>
-            </a:r>
-          </a:p>
-        </p:txBody>
-      </p:sp>
-      <p:sp>
-        <p:nvSpPr>
-          <p:cNvPr id="9" name="TextBox 8">
-            <a:extLst>
-              <a:ext uri="{FF2B5EF4-FFF2-40B4-BE49-F238E27FC236}">
-                <a16:creationId xmlns:a16="http://schemas.microsoft.com/office/drawing/2014/main" id="{EE4B5EC4-D245-95DB-F64C-842A74A83A0B}"/>
-              </a:ext>
-            </a:extLst>
-          </p:cNvPr>
-          <p:cNvSpPr txBox="1"/>
-          <p:nvPr/>
-        </p:nvSpPr>
-        <p:spPr>
-          <a:xfrm>
-            <a:off x="1117600" y="3644900"/>
-            <a:ext cx="10312400" cy="345440"/>
-          </a:xfrm>
-          <a:prstGeom prst="rect">
-            <a:avLst/>
-          </a:prstGeom>
-          <a:noFill/>
-        </p:spPr>
-        <p:txBody>
-          <a:bodyPr vert="horz" wrap="square" rtlCol="0">
-            <a:noAutofit/>
-          </a:bodyPr>
-          <a:lstStyle/>
-          <a:p>
-            <a:r>
-              <a:rPr lang="en-US" sz="1600" b="1">
-                <a:solidFill>
-                  <a:srgbClr val="C00000"/>
-                </a:solidFill>
-              </a:rPr>
-              <a:t>Time order, a dose-response and a plausible link (shorter sleep). Missing: many studies finding it again.</a:t>
-            </a:r>
-          </a:p>
-        </p:txBody>
-      </p:sp>
-      <p:sp>
-        <p:nvSpPr>
-          <p:cNvPr id="10" name="TextBox 9">
-            <a:extLst>
-              <a:ext uri="{FF2B5EF4-FFF2-40B4-BE49-F238E27FC236}">
-                <a16:creationId xmlns:a16="http://schemas.microsoft.com/office/drawing/2014/main" id="{C9303FFF-2F51-C42D-11A4-AF232C48DCA4}"/>
-              </a:ext>
-            </a:extLst>
-          </p:cNvPr>
-          <p:cNvSpPr txBox="1"/>
-          <p:nvPr/>
-        </p:nvSpPr>
-        <p:spPr>
-          <a:xfrm>
-            <a:off x="762000" y="4142740"/>
-            <a:ext cx="10668000" cy="345440"/>
-          </a:xfrm>
-          <a:prstGeom prst="rect">
-            <a:avLst/>
-          </a:prstGeom>
-          <a:noFill/>
-        </p:spPr>
-        <p:txBody>
-          <a:bodyPr vert="horz" wrap="square" rtlCol="0">
-            <a:noAutofit/>
-          </a:bodyPr>
-          <a:lstStyle/>
-          <a:p>
-            <a:pPr marL="304800" indent="-304800"/>
-            <a:r>
-              <a:rPr lang="en-US" sz="1600" b="1">
-                <a:solidFill>
-                  <a:srgbClr val="C00000"/>
-                </a:solidFill>
-              </a:rPr>
-              <a:t>3.</a:t>
-            </a:r>
-            <a:r>
-              <a:rPr lang="en-US" sz="1600">
-                <a:solidFill>
-                  <a:srgbClr val="000000"/>
-                </a:solidFill>
-              </a:rPr>
-              <a:t>  The participants were volunteers, mostly White and healthier than average. Who can we generalize to?</a:t>
-            </a:r>
-          </a:p>
-        </p:txBody>
-      </p:sp>
-      <p:sp>
-        <p:nvSpPr>
-          <p:cNvPr id="11" name="TextBox 10">
-            <a:extLst>
-              <a:ext uri="{FF2B5EF4-FFF2-40B4-BE49-F238E27FC236}">
-                <a16:creationId xmlns:a16="http://schemas.microsoft.com/office/drawing/2014/main" id="{D48E4E28-6180-4AD7-A8E4-C0D783A498E4}"/>
-              </a:ext>
-            </a:extLst>
-          </p:cNvPr>
-          <p:cNvSpPr txBox="1"/>
-          <p:nvPr/>
-        </p:nvSpPr>
-        <p:spPr>
-          <a:xfrm>
-            <a:off x="1117600" y="4437380"/>
-            <a:ext cx="10312400" cy="345440"/>
-          </a:xfrm>
-          <a:prstGeom prst="rect">
-            <a:avLst/>
-          </a:prstGeom>
-          <a:noFill/>
-        </p:spPr>
-        <p:txBody>
-          <a:bodyPr vert="horz" wrap="square" rtlCol="0">
-            <a:noAutofit/>
-          </a:bodyPr>
-          <a:lstStyle/>
-          <a:p>
-            <a:r>
-              <a:rPr lang="en-US" sz="1600" b="1">
-                <a:solidFill>
-                  <a:srgbClr val="C00000"/>
-                </a:solidFill>
-              </a:rPr>
-              <a:t>Only people like them. Volunteers are not a random sample of any population.</a:t>
-            </a:r>
-          </a:p>
-        </p:txBody>
-      </p:sp>
-      <p:sp>
-        <p:nvSpPr>
-          <p:cNvPr id="12" name="TextBox 11">
-            <a:extLst>
-              <a:ext uri="{FF2B5EF4-FFF2-40B4-BE49-F238E27FC236}">
-                <a16:creationId xmlns:a16="http://schemas.microsoft.com/office/drawing/2014/main" id="{FDE55E86-0C35-38F8-CFD9-DADE4335E1C9}"/>
+                <a16:creationId xmlns:a16="http://schemas.microsoft.com/office/drawing/2014/main" id="{92A0B40C-8745-6E52-D76C-46CA53ABD2E4}"/>
               </a:ext>
             </a:extLst>
           </p:cNvPr>
@@ -15825,17 +14998,17 @@
                   <a:srgbClr val="595959"/>
                 </a:solidFill>
               </a:rPr>
-              <a:t>Sources: Dai et al. (2026) and Münzel, Kuntic and Daiber (2026), European Heart Journal</a:t>
-            </a:r>
-          </a:p>
-        </p:txBody>
-      </p:sp>
-      <p:sp>
-        <p:nvSpPr>
-          <p:cNvPr id="3" name="Title rule">
-            <a:extLst>
-              <a:ext uri="{FF2B5EF4-FFF2-40B4-BE49-F238E27FC236}">
-                <a16:creationId xmlns:a16="http://schemas.microsoft.com/office/drawing/2014/main" id="{B2CA0A45-4556-612D-4893-11505401BA1E}"/>
+              <a:t>Source: U.S. Department of Health and Human Services (2014)</a:t>
+            </a:r>
+          </a:p>
+        </p:txBody>
+      </p:sp>
+      <p:sp>
+        <p:nvSpPr>
+          <p:cNvPr id="6" name="Title rule">
+            <a:extLst>
+              <a:ext uri="{FF2B5EF4-FFF2-40B4-BE49-F238E27FC236}">
+                <a16:creationId xmlns:a16="http://schemas.microsoft.com/office/drawing/2014/main" id="{1939F72A-BEBD-8766-65C6-B4203F49E6A9}"/>
               </a:ext>
             </a:extLst>
           </p:cNvPr>
@@ -15901,7 +15074,513 @@
     </p:spTree>
     <p:extLst>
       <p:ext uri="{BB962C8B-B14F-4D97-AF65-F5344CB8AC3E}">
-        <p14:creationId xmlns:p14="http://schemas.microsoft.com/office/powerpoint/2010/main" val="462997182"/>
+        <p14:creationId xmlns:p14="http://schemas.microsoft.com/office/powerpoint/2010/main" val="477607264"/>
+      </p:ext>
+    </p:extLst>
+  </p:cSld>
+  <p:clrMapOvr>
+    <a:masterClrMapping/>
+  </p:clrMapOvr>
+</p:sld>
+</file>
+
+<file path=ppt/slides/slide25.xml><?xml version="1.0" encoding="utf-8"?>
+<p:sld xmlns:a="http://schemas.openxmlformats.org/drawingml/2006/main" xmlns:r="http://schemas.openxmlformats.org/officeDocument/2006/relationships" xmlns:p="http://schemas.openxmlformats.org/presentationml/2006/main">
+  <p:cSld>
+    <p:spTree>
+      <p:nvGrpSpPr>
+        <p:cNvPr id="1" name=""/>
+        <p:cNvGrpSpPr/>
+        <p:nvPr/>
+      </p:nvGrpSpPr>
+      <p:grpSpPr>
+        <a:xfrm>
+          <a:off x="0" y="0"/>
+          <a:ext cx="0" cy="0"/>
+          <a:chOff x="0" y="0"/>
+          <a:chExt cx="0" cy="0"/>
+        </a:xfrm>
+      </p:grpSpPr>
+      <p:sp>
+        <p:nvSpPr>
+          <p:cNvPr id="2" name="Title 1">
+            <a:extLst>
+              <a:ext uri="{FF2B5EF4-FFF2-40B4-BE49-F238E27FC236}">
+                <a16:creationId xmlns:a16="http://schemas.microsoft.com/office/drawing/2014/main" id="{6A22AF1E-8589-CA56-2E20-310C69FEA1D3}"/>
+              </a:ext>
+            </a:extLst>
+          </p:cNvPr>
+          <p:cNvSpPr>
+            <a:spLocks noGrp="1"/>
+          </p:cNvSpPr>
+          <p:nvPr>
+            <p:ph type="title"/>
+          </p:nvPr>
+        </p:nvSpPr>
+        <p:spPr/>
+        <p:txBody>
+          <a:bodyPr>
+            <a:noAutofit/>
+          </a:bodyPr>
+          <a:lstStyle/>
+          <a:p>
+            <a:r>
+              <a:rPr lang="en-US">
+                <a:solidFill>
+                  <a:srgbClr val="1F3864"/>
+                </a:solidFill>
+              </a:rPr>
+              <a:t>Back to light at night and the heart</a:t>
+            </a:r>
+          </a:p>
+        </p:txBody>
+      </p:sp>
+      <p:sp>
+        <p:nvSpPr>
+          <p:cNvPr id="4" name="Slide Number Placeholder 3">
+            <a:extLst>
+              <a:ext uri="{FF2B5EF4-FFF2-40B4-BE49-F238E27FC236}">
+                <a16:creationId xmlns:a16="http://schemas.microsoft.com/office/drawing/2014/main" id="{73015A37-0A40-9416-1F1A-D02A04EF8047}"/>
+              </a:ext>
+            </a:extLst>
+          </p:cNvPr>
+          <p:cNvSpPr>
+            <a:spLocks noGrp="1"/>
+          </p:cNvSpPr>
+          <p:nvPr>
+            <p:ph type="sldNum" sz="quarter" idx="12"/>
+          </p:nvPr>
+        </p:nvSpPr>
+        <p:spPr/>
+        <p:txBody>
+          <a:bodyPr/>
+          <a:lstStyle/>
+          <a:p>
+            <a:fld id="{A80A81DD-F10A-4B1C-963A-0ABBB4865886}" type="slidenum">
+              <a:rPr lang="en-US" sz="1600" smtClean="0"/>
+              <a:t>25</a:t>
+            </a:fld>
+            <a:endParaRPr lang="en-US" sz="1600"/>
+          </a:p>
+        </p:txBody>
+      </p:sp>
+      <p:sp>
+        <p:nvSpPr>
+          <p:cNvPr id="5" name="TextBox 4">
+            <a:extLst>
+              <a:ext uri="{FF2B5EF4-FFF2-40B4-BE49-F238E27FC236}">
+                <a16:creationId xmlns:a16="http://schemas.microsoft.com/office/drawing/2014/main" id="{6D5A0F3E-BC1C-AB3C-7C49-4F27FBFE7DC9}"/>
+              </a:ext>
+            </a:extLst>
+          </p:cNvPr>
+          <p:cNvSpPr txBox="1"/>
+          <p:nvPr/>
+        </p:nvSpPr>
+        <p:spPr>
+          <a:xfrm>
+            <a:off x="762000" y="1841499"/>
+            <a:ext cx="10668000" cy="589280"/>
+          </a:xfrm>
+          <a:prstGeom prst="rect">
+            <a:avLst/>
+          </a:prstGeom>
+          <a:noFill/>
+        </p:spPr>
+        <p:txBody>
+          <a:bodyPr vert="horz" wrap="square" rtlCol="0">
+            <a:noAutofit/>
+          </a:bodyPr>
+          <a:lstStyle/>
+          <a:p>
+            <a:pPr>
+              <a:spcAft>
+                <a:spcPts val="400"/>
+              </a:spcAft>
+            </a:pPr>
+            <a:r>
+              <a:rPr lang="en-US" sz="1600">
+                <a:solidFill>
+                  <a:srgbClr val="000000"/>
+                </a:solidFill>
+              </a:rPr>
+              <a:t>Recall the UK Biobank study from slide 6: 11,071 adults wore a wrist light sensor for 7 days in 2013-2015, then had a heart MRI about 3 years later.</a:t>
+            </a:r>
+          </a:p>
+        </p:txBody>
+      </p:sp>
+      <p:sp>
+        <p:nvSpPr>
+          <p:cNvPr id="6" name="TextBox 5">
+            <a:extLst>
+              <a:ext uri="{FF2B5EF4-FFF2-40B4-BE49-F238E27FC236}">
+                <a16:creationId xmlns:a16="http://schemas.microsoft.com/office/drawing/2014/main" id="{457D82CE-DE26-541E-BE77-216218034116}"/>
+              </a:ext>
+            </a:extLst>
+          </p:cNvPr>
+          <p:cNvSpPr txBox="1"/>
+          <p:nvPr/>
+        </p:nvSpPr>
+        <p:spPr>
+          <a:xfrm>
+            <a:off x="762000" y="2557780"/>
+            <a:ext cx="10668000" cy="345440"/>
+          </a:xfrm>
+          <a:prstGeom prst="rect">
+            <a:avLst/>
+          </a:prstGeom>
+          <a:noFill/>
+        </p:spPr>
+        <p:txBody>
+          <a:bodyPr vert="horz" wrap="square" rtlCol="0">
+            <a:noAutofit/>
+          </a:bodyPr>
+          <a:lstStyle/>
+          <a:p>
+            <a:pPr marL="304800" indent="-304800"/>
+            <a:r>
+              <a:rPr lang="en-US" sz="1600" b="1">
+                <a:solidFill>
+                  <a:srgbClr val="C00000"/>
+                </a:solidFill>
+              </a:rPr>
+              <a:t>1.</a:t>
+            </a:r>
+            <a:r>
+              <a:rPr lang="en-US" sz="1600">
+                <a:solidFill>
+                  <a:srgbClr val="000000"/>
+                </a:solidFill>
+              </a:rPr>
+              <a:t>  Is this an observational study or an experiment?</a:t>
+            </a:r>
+          </a:p>
+        </p:txBody>
+      </p:sp>
+      <p:sp>
+        <p:nvSpPr>
+          <p:cNvPr id="7" name="TextBox 6">
+            <a:extLst>
+              <a:ext uri="{FF2B5EF4-FFF2-40B4-BE49-F238E27FC236}">
+                <a16:creationId xmlns:a16="http://schemas.microsoft.com/office/drawing/2014/main" id="{0FC8CA01-16A8-B0CA-E9BB-3617458ABCFE}"/>
+              </a:ext>
+            </a:extLst>
+          </p:cNvPr>
+          <p:cNvSpPr txBox="1"/>
+          <p:nvPr/>
+        </p:nvSpPr>
+        <p:spPr>
+          <a:xfrm>
+            <a:off x="1117600" y="2852420"/>
+            <a:ext cx="10312400" cy="345440"/>
+          </a:xfrm>
+          <a:prstGeom prst="rect">
+            <a:avLst/>
+          </a:prstGeom>
+          <a:noFill/>
+        </p:spPr>
+        <p:txBody>
+          <a:bodyPr vert="horz" wrap="square" rtlCol="0">
+            <a:noAutofit/>
+          </a:bodyPr>
+          <a:lstStyle/>
+          <a:p>
+            <a:r>
+              <a:rPr lang="en-US" sz="1600" b="1">
+                <a:solidFill>
+                  <a:srgbClr val="C00000"/>
+                </a:solidFill>
+              </a:rPr>
+              <a:t>Observational. Nobody was assigned a bright or a dark bedroom - the light people already had was measured.</a:t>
+            </a:r>
+          </a:p>
+        </p:txBody>
+      </p:sp>
+      <p:sp>
+        <p:nvSpPr>
+          <p:cNvPr id="8" name="TextBox 7">
+            <a:extLst>
+              <a:ext uri="{FF2B5EF4-FFF2-40B4-BE49-F238E27FC236}">
+                <a16:creationId xmlns:a16="http://schemas.microsoft.com/office/drawing/2014/main" id="{754BB752-313E-E3BB-C8C6-DE8F8D782176}"/>
+              </a:ext>
+            </a:extLst>
+          </p:cNvPr>
+          <p:cNvSpPr txBox="1"/>
+          <p:nvPr/>
+        </p:nvSpPr>
+        <p:spPr>
+          <a:xfrm>
+            <a:off x="762000" y="3350260"/>
+            <a:ext cx="10668000" cy="345440"/>
+          </a:xfrm>
+          <a:prstGeom prst="rect">
+            <a:avLst/>
+          </a:prstGeom>
+          <a:noFill/>
+        </p:spPr>
+        <p:txBody>
+          <a:bodyPr vert="horz" wrap="square" rtlCol="0">
+            <a:noAutofit/>
+          </a:bodyPr>
+          <a:lstStyle/>
+          <a:p>
+            <a:pPr marL="304800" indent="-304800"/>
+            <a:r>
+              <a:rPr lang="en-US" sz="1600" b="1">
+                <a:solidFill>
+                  <a:srgbClr val="C00000"/>
+                </a:solidFill>
+              </a:rPr>
+              <a:t>2.</a:t>
+            </a:r>
+            <a:r>
+              <a:rPr lang="en-US" sz="1600">
+                <a:solidFill>
+                  <a:srgbClr val="000000"/>
+                </a:solidFill>
+              </a:rPr>
+              <a:t>  People with the most light above 3 lux had 1.5% thicker heart walls than people with none. Did the light cause it?</a:t>
+            </a:r>
+          </a:p>
+        </p:txBody>
+      </p:sp>
+      <p:sp>
+        <p:nvSpPr>
+          <p:cNvPr id="9" name="TextBox 8">
+            <a:extLst>
+              <a:ext uri="{FF2B5EF4-FFF2-40B4-BE49-F238E27FC236}">
+                <a16:creationId xmlns:a16="http://schemas.microsoft.com/office/drawing/2014/main" id="{3BCF69E3-89A7-0A3C-BBC9-7A78B36DF97D}"/>
+              </a:ext>
+            </a:extLst>
+          </p:cNvPr>
+          <p:cNvSpPr txBox="1"/>
+          <p:nvPr/>
+        </p:nvSpPr>
+        <p:spPr>
+          <a:xfrm>
+            <a:off x="1117600" y="3644900"/>
+            <a:ext cx="10312400" cy="345440"/>
+          </a:xfrm>
+          <a:prstGeom prst="rect">
+            <a:avLst/>
+          </a:prstGeom>
+          <a:noFill/>
+        </p:spPr>
+        <p:txBody>
+          <a:bodyPr vert="horz" wrap="square" rtlCol="0">
+            <a:noAutofit/>
+          </a:bodyPr>
+          <a:lstStyle/>
+          <a:p>
+            <a:r>
+              <a:rPr lang="en-US" sz="1600" b="1">
+                <a:solidFill>
+                  <a:srgbClr val="C00000"/>
+                </a:solidFill>
+              </a:rPr>
+              <a:t>This study cannot tell us. It shows an association - the authors say their design cannot establish cause.</a:t>
+            </a:r>
+          </a:p>
+        </p:txBody>
+      </p:sp>
+      <p:sp>
+        <p:nvSpPr>
+          <p:cNvPr id="10" name="TextBox 9">
+            <a:extLst>
+              <a:ext uri="{FF2B5EF4-FFF2-40B4-BE49-F238E27FC236}">
+                <a16:creationId xmlns:a16="http://schemas.microsoft.com/office/drawing/2014/main" id="{16917509-9C7A-F531-8F14-27897C39BE49}"/>
+              </a:ext>
+            </a:extLst>
+          </p:cNvPr>
+          <p:cNvSpPr txBox="1"/>
+          <p:nvPr/>
+        </p:nvSpPr>
+        <p:spPr>
+          <a:xfrm>
+            <a:off x="762000" y="4142740"/>
+            <a:ext cx="10668000" cy="345440"/>
+          </a:xfrm>
+          <a:prstGeom prst="rect">
+            <a:avLst/>
+          </a:prstGeom>
+          <a:noFill/>
+        </p:spPr>
+        <p:txBody>
+          <a:bodyPr vert="horz" wrap="square" rtlCol="0">
+            <a:noAutofit/>
+          </a:bodyPr>
+          <a:lstStyle/>
+          <a:p>
+            <a:pPr marL="304800" indent="-304800"/>
+            <a:r>
+              <a:rPr lang="en-US" sz="1600" b="1">
+                <a:solidFill>
+                  <a:srgbClr val="C00000"/>
+                </a:solidFill>
+              </a:rPr>
+              <a:t>3.</a:t>
+            </a:r>
+            <a:r>
+              <a:rPr lang="en-US" sz="1600">
+                <a:solidFill>
+                  <a:srgbClr val="000000"/>
+                </a:solidFill>
+              </a:rPr>
+              <a:t>  The press release was titled “Too much light at night changes the shape and working of the heart.” Fair?</a:t>
+            </a:r>
+          </a:p>
+        </p:txBody>
+      </p:sp>
+      <p:sp>
+        <p:nvSpPr>
+          <p:cNvPr id="11" name="TextBox 10">
+            <a:extLst>
+              <a:ext uri="{FF2B5EF4-FFF2-40B4-BE49-F238E27FC236}">
+                <a16:creationId xmlns:a16="http://schemas.microsoft.com/office/drawing/2014/main" id="{1D9195F8-8C3F-F2C2-86AF-1FB585FE33AE}"/>
+              </a:ext>
+            </a:extLst>
+          </p:cNvPr>
+          <p:cNvSpPr txBox="1"/>
+          <p:nvPr/>
+        </p:nvSpPr>
+        <p:spPr>
+          <a:xfrm>
+            <a:off x="1117600" y="4437380"/>
+            <a:ext cx="10312400" cy="345440"/>
+          </a:xfrm>
+          <a:prstGeom prst="rect">
+            <a:avLst/>
+          </a:prstGeom>
+          <a:noFill/>
+        </p:spPr>
+        <p:txBody>
+          <a:bodyPr vert="horz" wrap="square" rtlCol="0">
+            <a:noAutofit/>
+          </a:bodyPr>
+          <a:lstStyle/>
+          <a:p>
+            <a:r>
+              <a:rPr lang="en-US" sz="1600" b="1">
+                <a:solidFill>
+                  <a:srgbClr val="C00000"/>
+                </a:solidFill>
+              </a:rPr>
+              <a:t>It goes too far. The paper says more night light was associated with these changes, not that it changed the heart.</a:t>
+            </a:r>
+          </a:p>
+        </p:txBody>
+      </p:sp>
+      <p:sp>
+        <p:nvSpPr>
+          <p:cNvPr id="12" name="TextBox 11">
+            <a:extLst>
+              <a:ext uri="{FF2B5EF4-FFF2-40B4-BE49-F238E27FC236}">
+                <a16:creationId xmlns:a16="http://schemas.microsoft.com/office/drawing/2014/main" id="{CD8609FA-BB60-2749-A121-ABA24D881BCD}"/>
+              </a:ext>
+            </a:extLst>
+          </p:cNvPr>
+          <p:cNvSpPr txBox="1"/>
+          <p:nvPr/>
+        </p:nvSpPr>
+        <p:spPr>
+          <a:xfrm>
+            <a:off x="762000" y="6045200"/>
+            <a:ext cx="10668000" cy="345440"/>
+          </a:xfrm>
+          <a:prstGeom prst="rect">
+            <a:avLst/>
+          </a:prstGeom>
+          <a:noFill/>
+        </p:spPr>
+        <p:txBody>
+          <a:bodyPr vert="horz" wrap="square" rtlCol="0">
+            <a:noAutofit/>
+          </a:bodyPr>
+          <a:lstStyle/>
+          <a:p>
+            <a:pPr algn="r"/>
+            <a:r>
+              <a:rPr lang="en-US" sz="1600" i="1">
+                <a:solidFill>
+                  <a:srgbClr val="595959"/>
+                </a:solidFill>
+              </a:rPr>
+              <a:t>Sources: Dai et al. (2026) and Münzel, Kuntic and Daiber (2026), European Heart Journal; ESC press release (2026)</a:t>
+            </a:r>
+          </a:p>
+        </p:txBody>
+      </p:sp>
+      <p:sp>
+        <p:nvSpPr>
+          <p:cNvPr id="3" name="Title rule">
+            <a:extLst>
+              <a:ext uri="{FF2B5EF4-FFF2-40B4-BE49-F238E27FC236}">
+                <a16:creationId xmlns:a16="http://schemas.microsoft.com/office/drawing/2014/main" id="{44D05FFE-5C77-3343-F6ED-D73A8174B663}"/>
+              </a:ext>
+            </a:extLst>
+          </p:cNvPr>
+          <p:cNvSpPr/>
+          <p:nvPr/>
+        </p:nvSpPr>
+        <p:spPr>
+          <a:xfrm>
+            <a:off x="838200" y="1600200"/>
+            <a:ext cx="10515600" cy="38100"/>
+          </a:xfrm>
+          <a:prstGeom prst="rect">
+            <a:avLst/>
+          </a:prstGeom>
+          <a:solidFill>
+            <a:srgbClr val="4472C4"/>
+          </a:solidFill>
+          <a:ln w="12700" cap="flat" cmpd="sng" algn="ctr">
+            <a:noFill/>
+            <a:prstDash val="solid"/>
+            <a:miter lim="800000"/>
+          </a:ln>
+          <a:effectLst/>
+          <a:extLst>
+            <a:ext uri="{91240B29-F687-4F45-9708-019B960494DF}">
+              <a14:hiddenLine xmlns:a14="http://schemas.microsoft.com/office/drawing/2010/main" w="12700" cap="flat" cmpd="sng" algn="ctr">
+                <a:solidFill>
+                  <a:schemeClr val="accent1">
+                    <a:shade val="15000"/>
+                  </a:schemeClr>
+                </a:solidFill>
+                <a:prstDash val="solid"/>
+                <a:miter lim="800000"/>
+              </a14:hiddenLine>
+            </a:ext>
+          </a:extLst>
+        </p:spPr>
+        <p:style>
+          <a:lnRef idx="2">
+            <a:schemeClr val="accent1">
+              <a:shade val="15000"/>
+            </a:schemeClr>
+          </a:lnRef>
+          <a:fillRef idx="1">
+            <a:schemeClr val="accent1"/>
+          </a:fillRef>
+          <a:effectRef idx="0">
+            <a:schemeClr val="accent1"/>
+          </a:effectRef>
+          <a:fontRef idx="minor">
+            <a:schemeClr val="lt1"/>
+          </a:fontRef>
+        </p:style>
+        <p:txBody>
+          <a:bodyPr rtlCol="0" anchor="ctr"/>
+          <a:lstStyle/>
+          <a:p>
+            <a:pPr algn="ctr"/>
+            <a:endParaRPr lang="en-US"/>
+          </a:p>
+        </p:txBody>
+      </p:sp>
+    </p:spTree>
+    <p:extLst>
+      <p:ext uri="{BB962C8B-B14F-4D97-AF65-F5344CB8AC3E}">
+        <p14:creationId xmlns:p14="http://schemas.microsoft.com/office/powerpoint/2010/main" val="1783935017"/>
       </p:ext>
     </p:extLst>
   </p:cSld>
@@ -16277,6 +15956,859 @@
       </p:grpSpPr>
       <p:sp>
         <p:nvSpPr>
+          <p:cNvPr id="2" name="Title 1">
+            <a:extLst>
+              <a:ext uri="{FF2B5EF4-FFF2-40B4-BE49-F238E27FC236}">
+                <a16:creationId xmlns:a16="http://schemas.microsoft.com/office/drawing/2014/main" id="{5B41C2DC-B562-4055-A05F-8710B472DC0C}"/>
+              </a:ext>
+            </a:extLst>
+          </p:cNvPr>
+          <p:cNvSpPr>
+            <a:spLocks noGrp="1"/>
+          </p:cNvSpPr>
+          <p:nvPr>
+            <p:ph type="title"/>
+          </p:nvPr>
+        </p:nvSpPr>
+        <p:spPr/>
+        <p:txBody>
+          <a:bodyPr>
+            <a:noAutofit/>
+          </a:bodyPr>
+          <a:lstStyle/>
+          <a:p>
+            <a:r>
+              <a:rPr lang="en-US">
+                <a:solidFill>
+                  <a:srgbClr val="1F3864"/>
+                </a:solidFill>
+              </a:rPr>
+              <a:t>Light at night: how strong is the evidence?</a:t>
+            </a:r>
+          </a:p>
+        </p:txBody>
+      </p:sp>
+      <p:sp>
+        <p:nvSpPr>
+          <p:cNvPr id="4" name="Slide Number Placeholder 3">
+            <a:extLst>
+              <a:ext uri="{FF2B5EF4-FFF2-40B4-BE49-F238E27FC236}">
+                <a16:creationId xmlns:a16="http://schemas.microsoft.com/office/drawing/2014/main" id="{8DE2B145-B9E0-9EDE-7846-E574CD9CB5FA}"/>
+              </a:ext>
+            </a:extLst>
+          </p:cNvPr>
+          <p:cNvSpPr>
+            <a:spLocks noGrp="1"/>
+          </p:cNvSpPr>
+          <p:nvPr>
+            <p:ph type="sldNum" sz="quarter" idx="12"/>
+          </p:nvPr>
+        </p:nvSpPr>
+        <p:spPr/>
+        <p:txBody>
+          <a:bodyPr/>
+          <a:lstStyle/>
+          <a:p>
+            <a:fld id="{A80A81DD-F10A-4B1C-963A-0ABBB4865886}" type="slidenum">
+              <a:rPr lang="en-US" sz="1600" smtClean="0"/>
+              <a:t>26</a:t>
+            </a:fld>
+            <a:endParaRPr lang="en-US" sz="1600"/>
+          </a:p>
+        </p:txBody>
+      </p:sp>
+      <p:sp>
+        <p:nvSpPr>
+          <p:cNvPr id="5" name="TextBox 4">
+            <a:extLst>
+              <a:ext uri="{FF2B5EF4-FFF2-40B4-BE49-F238E27FC236}">
+                <a16:creationId xmlns:a16="http://schemas.microsoft.com/office/drawing/2014/main" id="{264AEBD8-9C55-5C87-F654-606BB91A9C10}"/>
+              </a:ext>
+            </a:extLst>
+          </p:cNvPr>
+          <p:cNvSpPr txBox="1"/>
+          <p:nvPr/>
+        </p:nvSpPr>
+        <p:spPr>
+          <a:xfrm>
+            <a:off x="762000" y="1841499"/>
+            <a:ext cx="10668000" cy="589280"/>
+          </a:xfrm>
+          <a:prstGeom prst="rect">
+            <a:avLst/>
+          </a:prstGeom>
+          <a:noFill/>
+        </p:spPr>
+        <p:txBody>
+          <a:bodyPr vert="horz" wrap="square" rtlCol="0">
+            <a:noAutofit/>
+          </a:bodyPr>
+          <a:lstStyle/>
+          <a:p>
+            <a:pPr>
+              <a:spcAft>
+                <a:spcPts val="400"/>
+              </a:spcAft>
+            </a:pPr>
+            <a:r>
+              <a:rPr lang="en-US" sz="1600">
+                <a:solidFill>
+                  <a:srgbClr val="000000"/>
+                </a:solidFill>
+              </a:rPr>
+              <a:t>The authors adjusted for age, smoking, physical activity, BMI, air pollution, deprivation and more. The heart changes grew steadily as night light went up.</a:t>
+            </a:r>
+          </a:p>
+        </p:txBody>
+      </p:sp>
+      <p:sp>
+        <p:nvSpPr>
+          <p:cNvPr id="6" name="TextBox 5">
+            <a:extLst>
+              <a:ext uri="{FF2B5EF4-FFF2-40B4-BE49-F238E27FC236}">
+                <a16:creationId xmlns:a16="http://schemas.microsoft.com/office/drawing/2014/main" id="{83AA5382-396D-E973-8156-DC5F1BD9BB9E}"/>
+              </a:ext>
+            </a:extLst>
+          </p:cNvPr>
+          <p:cNvSpPr txBox="1"/>
+          <p:nvPr/>
+        </p:nvSpPr>
+        <p:spPr>
+          <a:xfrm>
+            <a:off x="762000" y="2557780"/>
+            <a:ext cx="10668000" cy="345440"/>
+          </a:xfrm>
+          <a:prstGeom prst="rect">
+            <a:avLst/>
+          </a:prstGeom>
+          <a:noFill/>
+        </p:spPr>
+        <p:txBody>
+          <a:bodyPr vert="horz" wrap="square" rtlCol="0">
+            <a:noAutofit/>
+          </a:bodyPr>
+          <a:lstStyle/>
+          <a:p>
+            <a:pPr marL="304800" indent="-304800"/>
+            <a:r>
+              <a:rPr lang="en-US" sz="1600" b="1">
+                <a:solidFill>
+                  <a:srgbClr val="C00000"/>
+                </a:solidFill>
+              </a:rPr>
+              <a:t>1.</a:t>
+            </a:r>
+            <a:r>
+              <a:rPr lang="en-US" sz="1600">
+                <a:solidFill>
+                  <a:srgbClr val="000000"/>
+                </a:solidFill>
+              </a:rPr>
+              <a:t>  They adjusted for many variables. Is that as good as random assignment?</a:t>
+            </a:r>
+          </a:p>
+        </p:txBody>
+      </p:sp>
+      <p:sp>
+        <p:nvSpPr>
+          <p:cNvPr id="7" name="TextBox 6">
+            <a:extLst>
+              <a:ext uri="{FF2B5EF4-FFF2-40B4-BE49-F238E27FC236}">
+                <a16:creationId xmlns:a16="http://schemas.microsoft.com/office/drawing/2014/main" id="{EDA6341D-833D-A973-E4BF-28891FD5C0E1}"/>
+              </a:ext>
+            </a:extLst>
+          </p:cNvPr>
+          <p:cNvSpPr txBox="1"/>
+          <p:nvPr/>
+        </p:nvSpPr>
+        <p:spPr>
+          <a:xfrm>
+            <a:off x="1117600" y="2852420"/>
+            <a:ext cx="10312400" cy="345440"/>
+          </a:xfrm>
+          <a:prstGeom prst="rect">
+            <a:avLst/>
+          </a:prstGeom>
+          <a:noFill/>
+        </p:spPr>
+        <p:txBody>
+          <a:bodyPr vert="horz" wrap="square" rtlCol="0">
+            <a:noAutofit/>
+          </a:bodyPr>
+          <a:lstStyle/>
+          <a:p>
+            <a:r>
+              <a:rPr lang="en-US" sz="1600" b="1">
+                <a:solidFill>
+                  <a:srgbClr val="C00000"/>
+                </a:solidFill>
+              </a:rPr>
+              <a:t>No. Adjusting only handles what was measured. Traffic noise was not, and the editorial says it could confound.</a:t>
+            </a:r>
+          </a:p>
+        </p:txBody>
+      </p:sp>
+      <p:sp>
+        <p:nvSpPr>
+          <p:cNvPr id="8" name="TextBox 7">
+            <a:extLst>
+              <a:ext uri="{FF2B5EF4-FFF2-40B4-BE49-F238E27FC236}">
+                <a16:creationId xmlns:a16="http://schemas.microsoft.com/office/drawing/2014/main" id="{58FA17D4-67C2-6627-E29A-DF60916A80D5}"/>
+              </a:ext>
+            </a:extLst>
+          </p:cNvPr>
+          <p:cNvSpPr txBox="1"/>
+          <p:nvPr/>
+        </p:nvSpPr>
+        <p:spPr>
+          <a:xfrm>
+            <a:off x="762000" y="3350260"/>
+            <a:ext cx="10668000" cy="345440"/>
+          </a:xfrm>
+          <a:prstGeom prst="rect">
+            <a:avLst/>
+          </a:prstGeom>
+          <a:noFill/>
+        </p:spPr>
+        <p:txBody>
+          <a:bodyPr vert="horz" wrap="square" rtlCol="0">
+            <a:noAutofit/>
+          </a:bodyPr>
+          <a:lstStyle/>
+          <a:p>
+            <a:pPr marL="304800" indent="-304800"/>
+            <a:r>
+              <a:rPr lang="en-US" sz="1600" b="1">
+                <a:solidFill>
+                  <a:srgbClr val="C00000"/>
+                </a:solidFill>
+              </a:rPr>
+              <a:t>2.</a:t>
+            </a:r>
+            <a:r>
+              <a:rPr lang="en-US" sz="1600">
+                <a:solidFill>
+                  <a:srgbClr val="000000"/>
+                </a:solidFill>
+              </a:rPr>
+              <a:t>  Which features from the smoking evidence does this study have? What is it missing?</a:t>
+            </a:r>
+          </a:p>
+        </p:txBody>
+      </p:sp>
+      <p:sp>
+        <p:nvSpPr>
+          <p:cNvPr id="9" name="TextBox 8">
+            <a:extLst>
+              <a:ext uri="{FF2B5EF4-FFF2-40B4-BE49-F238E27FC236}">
+                <a16:creationId xmlns:a16="http://schemas.microsoft.com/office/drawing/2014/main" id="{EE4B5EC4-D245-95DB-F64C-842A74A83A0B}"/>
+              </a:ext>
+            </a:extLst>
+          </p:cNvPr>
+          <p:cNvSpPr txBox="1"/>
+          <p:nvPr/>
+        </p:nvSpPr>
+        <p:spPr>
+          <a:xfrm>
+            <a:off x="1117600" y="3644900"/>
+            <a:ext cx="10312400" cy="345440"/>
+          </a:xfrm>
+          <a:prstGeom prst="rect">
+            <a:avLst/>
+          </a:prstGeom>
+          <a:noFill/>
+        </p:spPr>
+        <p:txBody>
+          <a:bodyPr vert="horz" wrap="square" rtlCol="0">
+            <a:noAutofit/>
+          </a:bodyPr>
+          <a:lstStyle/>
+          <a:p>
+            <a:r>
+              <a:rPr lang="en-US" sz="1600" b="1">
+                <a:solidFill>
+                  <a:srgbClr val="C00000"/>
+                </a:solidFill>
+              </a:rPr>
+              <a:t>Time order, a dose-response and a plausible link (shorter sleep). Missing: many studies finding it again.</a:t>
+            </a:r>
+          </a:p>
+        </p:txBody>
+      </p:sp>
+      <p:sp>
+        <p:nvSpPr>
+          <p:cNvPr id="10" name="TextBox 9">
+            <a:extLst>
+              <a:ext uri="{FF2B5EF4-FFF2-40B4-BE49-F238E27FC236}">
+                <a16:creationId xmlns:a16="http://schemas.microsoft.com/office/drawing/2014/main" id="{C9303FFF-2F51-C42D-11A4-AF232C48DCA4}"/>
+              </a:ext>
+            </a:extLst>
+          </p:cNvPr>
+          <p:cNvSpPr txBox="1"/>
+          <p:nvPr/>
+        </p:nvSpPr>
+        <p:spPr>
+          <a:xfrm>
+            <a:off x="762000" y="4142740"/>
+            <a:ext cx="10668000" cy="345440"/>
+          </a:xfrm>
+          <a:prstGeom prst="rect">
+            <a:avLst/>
+          </a:prstGeom>
+          <a:noFill/>
+        </p:spPr>
+        <p:txBody>
+          <a:bodyPr vert="horz" wrap="square" rtlCol="0">
+            <a:noAutofit/>
+          </a:bodyPr>
+          <a:lstStyle/>
+          <a:p>
+            <a:pPr marL="304800" indent="-304800"/>
+            <a:r>
+              <a:rPr lang="en-US" sz="1600" b="1">
+                <a:solidFill>
+                  <a:srgbClr val="C00000"/>
+                </a:solidFill>
+              </a:rPr>
+              <a:t>3.</a:t>
+            </a:r>
+            <a:r>
+              <a:rPr lang="en-US" sz="1600">
+                <a:solidFill>
+                  <a:srgbClr val="000000"/>
+                </a:solidFill>
+              </a:rPr>
+              <a:t>  The participants were volunteers, mostly White and healthier than average. Who can we generalize to?</a:t>
+            </a:r>
+          </a:p>
+        </p:txBody>
+      </p:sp>
+      <p:sp>
+        <p:nvSpPr>
+          <p:cNvPr id="11" name="TextBox 10">
+            <a:extLst>
+              <a:ext uri="{FF2B5EF4-FFF2-40B4-BE49-F238E27FC236}">
+                <a16:creationId xmlns:a16="http://schemas.microsoft.com/office/drawing/2014/main" id="{D48E4E28-6180-4AD7-A8E4-C0D783A498E4}"/>
+              </a:ext>
+            </a:extLst>
+          </p:cNvPr>
+          <p:cNvSpPr txBox="1"/>
+          <p:nvPr/>
+        </p:nvSpPr>
+        <p:spPr>
+          <a:xfrm>
+            <a:off x="1117600" y="4437380"/>
+            <a:ext cx="10312400" cy="345440"/>
+          </a:xfrm>
+          <a:prstGeom prst="rect">
+            <a:avLst/>
+          </a:prstGeom>
+          <a:noFill/>
+        </p:spPr>
+        <p:txBody>
+          <a:bodyPr vert="horz" wrap="square" rtlCol="0">
+            <a:noAutofit/>
+          </a:bodyPr>
+          <a:lstStyle/>
+          <a:p>
+            <a:r>
+              <a:rPr lang="en-US" sz="1600" b="1">
+                <a:solidFill>
+                  <a:srgbClr val="C00000"/>
+                </a:solidFill>
+              </a:rPr>
+              <a:t>Only people like them. Volunteers are not a random sample of any population.</a:t>
+            </a:r>
+          </a:p>
+        </p:txBody>
+      </p:sp>
+      <p:sp>
+        <p:nvSpPr>
+          <p:cNvPr id="12" name="TextBox 11">
+            <a:extLst>
+              <a:ext uri="{FF2B5EF4-FFF2-40B4-BE49-F238E27FC236}">
+                <a16:creationId xmlns:a16="http://schemas.microsoft.com/office/drawing/2014/main" id="{FDE55E86-0C35-38F8-CFD9-DADE4335E1C9}"/>
+              </a:ext>
+            </a:extLst>
+          </p:cNvPr>
+          <p:cNvSpPr txBox="1"/>
+          <p:nvPr/>
+        </p:nvSpPr>
+        <p:spPr>
+          <a:xfrm>
+            <a:off x="762000" y="6045200"/>
+            <a:ext cx="10668000" cy="345440"/>
+          </a:xfrm>
+          <a:prstGeom prst="rect">
+            <a:avLst/>
+          </a:prstGeom>
+          <a:noFill/>
+        </p:spPr>
+        <p:txBody>
+          <a:bodyPr vert="horz" wrap="square" rtlCol="0">
+            <a:noAutofit/>
+          </a:bodyPr>
+          <a:lstStyle/>
+          <a:p>
+            <a:pPr algn="r"/>
+            <a:r>
+              <a:rPr lang="en-US" sz="1600" i="1">
+                <a:solidFill>
+                  <a:srgbClr val="595959"/>
+                </a:solidFill>
+              </a:rPr>
+              <a:t>Sources: Dai et al. (2026) and Münzel, Kuntic and Daiber (2026), European Heart Journal</a:t>
+            </a:r>
+          </a:p>
+        </p:txBody>
+      </p:sp>
+      <p:sp>
+        <p:nvSpPr>
+          <p:cNvPr id="3" name="Title rule">
+            <a:extLst>
+              <a:ext uri="{FF2B5EF4-FFF2-40B4-BE49-F238E27FC236}">
+                <a16:creationId xmlns:a16="http://schemas.microsoft.com/office/drawing/2014/main" id="{B2CA0A45-4556-612D-4893-11505401BA1E}"/>
+              </a:ext>
+            </a:extLst>
+          </p:cNvPr>
+          <p:cNvSpPr/>
+          <p:nvPr/>
+        </p:nvSpPr>
+        <p:spPr>
+          <a:xfrm>
+            <a:off x="838200" y="1600200"/>
+            <a:ext cx="10515600" cy="38100"/>
+          </a:xfrm>
+          <a:prstGeom prst="rect">
+            <a:avLst/>
+          </a:prstGeom>
+          <a:solidFill>
+            <a:srgbClr val="4472C4"/>
+          </a:solidFill>
+          <a:ln w="12700" cap="flat" cmpd="sng" algn="ctr">
+            <a:noFill/>
+            <a:prstDash val="solid"/>
+            <a:miter lim="800000"/>
+          </a:ln>
+          <a:effectLst/>
+          <a:extLst>
+            <a:ext uri="{91240B29-F687-4F45-9708-019B960494DF}">
+              <a14:hiddenLine xmlns:a14="http://schemas.microsoft.com/office/drawing/2010/main" w="12700" cap="flat" cmpd="sng" algn="ctr">
+                <a:solidFill>
+                  <a:schemeClr val="accent1">
+                    <a:shade val="15000"/>
+                  </a:schemeClr>
+                </a:solidFill>
+                <a:prstDash val="solid"/>
+                <a:miter lim="800000"/>
+              </a14:hiddenLine>
+            </a:ext>
+          </a:extLst>
+        </p:spPr>
+        <p:style>
+          <a:lnRef idx="2">
+            <a:schemeClr val="accent1">
+              <a:shade val="15000"/>
+            </a:schemeClr>
+          </a:lnRef>
+          <a:fillRef idx="1">
+            <a:schemeClr val="accent1"/>
+          </a:fillRef>
+          <a:effectRef idx="0">
+            <a:schemeClr val="accent1"/>
+          </a:effectRef>
+          <a:fontRef idx="minor">
+            <a:schemeClr val="lt1"/>
+          </a:fontRef>
+        </p:style>
+        <p:txBody>
+          <a:bodyPr rtlCol="0" anchor="ctr"/>
+          <a:lstStyle/>
+          <a:p>
+            <a:pPr algn="ctr"/>
+            <a:endParaRPr lang="en-US"/>
+          </a:p>
+        </p:txBody>
+      </p:sp>
+    </p:spTree>
+    <p:extLst>
+      <p:ext uri="{BB962C8B-B14F-4D97-AF65-F5344CB8AC3E}">
+        <p14:creationId xmlns:p14="http://schemas.microsoft.com/office/powerpoint/2010/main" val="462997182"/>
+      </p:ext>
+    </p:extLst>
+  </p:cSld>
+  <p:clrMapOvr>
+    <a:masterClrMapping/>
+  </p:clrMapOvr>
+  <p:timing>
+    <p:tnLst>
+      <p:par>
+        <p:cTn id="1" dur="indefinite" restart="never" nodeType="tmRoot">
+          <p:childTnLst>
+            <p:seq concurrent="1" nextAc="seek">
+              <p:cTn id="2" dur="indefinite" nodeType="mainSeq">
+                <p:childTnLst>
+                  <p:par>
+                    <p:cTn id="3" fill="hold">
+                      <p:stCondLst>
+                        <p:cond delay="indefinite"/>
+                      </p:stCondLst>
+                      <p:childTnLst>
+                        <p:par>
+                          <p:cTn id="4" fill="hold">
+                            <p:stCondLst>
+                              <p:cond delay="0"/>
+                            </p:stCondLst>
+                            <p:childTnLst>
+                              <p:par>
+                                <p:cTn id="5" presetID="34" presetClass="entr" presetSubtype="0" fill="hold" grpId="0" nodeType="clickEffect">
+                                  <p:stCondLst>
+                                    <p:cond delay="0"/>
+                                  </p:stCondLst>
+                                  <p:childTnLst>
+                                    <p:set>
+                                      <p:cBhvr>
+                                        <p:cTn id="6" dur="1" fill="hold">
+                                          <p:stCondLst>
+                                            <p:cond delay="0"/>
+                                          </p:stCondLst>
+                                        </p:cTn>
+                                        <p:tgtEl>
+                                          <p:spTgt spid="7"/>
+                                        </p:tgtEl>
+                                        <p:attrNameLst>
+                                          <p:attrName>style.visibility</p:attrName>
+                                        </p:attrNameLst>
+                                      </p:cBhvr>
+                                      <p:to>
+                                        <p:strVal val="visible"/>
+                                      </p:to>
+                                    </p:set>
+                                    <p:anim from="(-#ppt_w/2)" to="(#ppt_x)" calcmode="lin" valueType="num">
+                                      <p:cBhvr>
+                                        <p:cTn id="7" dur="600" fill="hold">
+                                          <p:stCondLst>
+                                            <p:cond delay="0"/>
+                                          </p:stCondLst>
+                                        </p:cTn>
+                                        <p:tgtEl>
+                                          <p:spTgt spid="7"/>
+                                        </p:tgtEl>
+                                        <p:attrNameLst>
+                                          <p:attrName>ppt_x</p:attrName>
+                                        </p:attrNameLst>
+                                      </p:cBhvr>
+                                    </p:anim>
+                                    <p:anim from="0" to="-1.0" calcmode="lin" valueType="num">
+                                      <p:cBhvr>
+                                        <p:cTn id="8" dur="200" decel="50000" autoRev="1" fill="hold">
+                                          <p:stCondLst>
+                                            <p:cond delay="600"/>
+                                          </p:stCondLst>
+                                        </p:cTn>
+                                        <p:tgtEl>
+                                          <p:spTgt spid="7"/>
+                                        </p:tgtEl>
+                                        <p:attrNameLst>
+                                          <p:attrName>xshear</p:attrName>
+                                        </p:attrNameLst>
+                                      </p:cBhvr>
+                                    </p:anim>
+                                    <p:animScale>
+                                      <p:cBhvr>
+                                        <p:cTn id="9" dur="200" decel="100000" autoRev="1" fill="hold">
+                                          <p:stCondLst>
+                                            <p:cond delay="600"/>
+                                          </p:stCondLst>
+                                        </p:cTn>
+                                        <p:tgtEl>
+                                          <p:spTgt spid="7"/>
+                                        </p:tgtEl>
+                                      </p:cBhvr>
+                                      <p:from x="100000" y="100000"/>
+                                      <p:to x="80000" y="100000"/>
+                                    </p:animScale>
+                                    <p:anim by="(#ppt_h/3+#ppt_w*0.1)" calcmode="lin" valueType="num">
+                                      <p:cBhvr additive="sum">
+                                        <p:cTn id="10" dur="200" decel="100000" autoRev="1" fill="hold">
+                                          <p:stCondLst>
+                                            <p:cond delay="600"/>
+                                          </p:stCondLst>
+                                        </p:cTn>
+                                        <p:tgtEl>
+                                          <p:spTgt spid="7"/>
+                                        </p:tgtEl>
+                                        <p:attrNameLst>
+                                          <p:attrName>ppt_x</p:attrName>
+                                        </p:attrNameLst>
+                                      </p:cBhvr>
+                                    </p:anim>
+                                  </p:childTnLst>
+                                </p:cTn>
+                              </p:par>
+                            </p:childTnLst>
+                          </p:cTn>
+                        </p:par>
+                      </p:childTnLst>
+                    </p:cTn>
+                  </p:par>
+                  <p:par>
+                    <p:cTn id="11" fill="hold">
+                      <p:stCondLst>
+                        <p:cond delay="indefinite"/>
+                      </p:stCondLst>
+                      <p:childTnLst>
+                        <p:par>
+                          <p:cTn id="12" fill="hold">
+                            <p:stCondLst>
+                              <p:cond delay="0"/>
+                            </p:stCondLst>
+                            <p:childTnLst>
+                              <p:par>
+                                <p:cTn id="13" presetID="34" presetClass="entr" presetSubtype="0" fill="hold" grpId="0" nodeType="clickEffect">
+                                  <p:stCondLst>
+                                    <p:cond delay="0"/>
+                                  </p:stCondLst>
+                                  <p:childTnLst>
+                                    <p:set>
+                                      <p:cBhvr>
+                                        <p:cTn id="14" dur="1" fill="hold">
+                                          <p:stCondLst>
+                                            <p:cond delay="0"/>
+                                          </p:stCondLst>
+                                        </p:cTn>
+                                        <p:tgtEl>
+                                          <p:spTgt spid="9"/>
+                                        </p:tgtEl>
+                                        <p:attrNameLst>
+                                          <p:attrName>style.visibility</p:attrName>
+                                        </p:attrNameLst>
+                                      </p:cBhvr>
+                                      <p:to>
+                                        <p:strVal val="visible"/>
+                                      </p:to>
+                                    </p:set>
+                                    <p:anim from="(-#ppt_w/2)" to="(#ppt_x)" calcmode="lin" valueType="num">
+                                      <p:cBhvr>
+                                        <p:cTn id="15" dur="600" fill="hold">
+                                          <p:stCondLst>
+                                            <p:cond delay="0"/>
+                                          </p:stCondLst>
+                                        </p:cTn>
+                                        <p:tgtEl>
+                                          <p:spTgt spid="9"/>
+                                        </p:tgtEl>
+                                        <p:attrNameLst>
+                                          <p:attrName>ppt_x</p:attrName>
+                                        </p:attrNameLst>
+                                      </p:cBhvr>
+                                    </p:anim>
+                                    <p:anim from="0" to="-1.0" calcmode="lin" valueType="num">
+                                      <p:cBhvr>
+                                        <p:cTn id="16" dur="200" decel="50000" autoRev="1" fill="hold">
+                                          <p:stCondLst>
+                                            <p:cond delay="600"/>
+                                          </p:stCondLst>
+                                        </p:cTn>
+                                        <p:tgtEl>
+                                          <p:spTgt spid="9"/>
+                                        </p:tgtEl>
+                                        <p:attrNameLst>
+                                          <p:attrName>xshear</p:attrName>
+                                        </p:attrNameLst>
+                                      </p:cBhvr>
+                                    </p:anim>
+                                    <p:animScale>
+                                      <p:cBhvr>
+                                        <p:cTn id="17" dur="200" decel="100000" autoRev="1" fill="hold">
+                                          <p:stCondLst>
+                                            <p:cond delay="600"/>
+                                          </p:stCondLst>
+                                        </p:cTn>
+                                        <p:tgtEl>
+                                          <p:spTgt spid="9"/>
+                                        </p:tgtEl>
+                                      </p:cBhvr>
+                                      <p:from x="100000" y="100000"/>
+                                      <p:to x="80000" y="100000"/>
+                                    </p:animScale>
+                                    <p:anim by="(#ppt_h/3+#ppt_w*0.1)" calcmode="lin" valueType="num">
+                                      <p:cBhvr additive="sum">
+                                        <p:cTn id="18" dur="200" decel="100000" autoRev="1" fill="hold">
+                                          <p:stCondLst>
+                                            <p:cond delay="600"/>
+                                          </p:stCondLst>
+                                        </p:cTn>
+                                        <p:tgtEl>
+                                          <p:spTgt spid="9"/>
+                                        </p:tgtEl>
+                                        <p:attrNameLst>
+                                          <p:attrName>ppt_x</p:attrName>
+                                        </p:attrNameLst>
+                                      </p:cBhvr>
+                                    </p:anim>
+                                  </p:childTnLst>
+                                </p:cTn>
+                              </p:par>
+                            </p:childTnLst>
+                          </p:cTn>
+                        </p:par>
+                      </p:childTnLst>
+                    </p:cTn>
+                  </p:par>
+                  <p:par>
+                    <p:cTn id="19" fill="hold">
+                      <p:stCondLst>
+                        <p:cond delay="indefinite"/>
+                      </p:stCondLst>
+                      <p:childTnLst>
+                        <p:par>
+                          <p:cTn id="20" fill="hold">
+                            <p:stCondLst>
+                              <p:cond delay="0"/>
+                            </p:stCondLst>
+                            <p:childTnLst>
+                              <p:par>
+                                <p:cTn id="21" presetID="34" presetClass="entr" presetSubtype="0" fill="hold" grpId="0" nodeType="clickEffect">
+                                  <p:stCondLst>
+                                    <p:cond delay="0"/>
+                                  </p:stCondLst>
+                                  <p:childTnLst>
+                                    <p:set>
+                                      <p:cBhvr>
+                                        <p:cTn id="22" dur="1" fill="hold">
+                                          <p:stCondLst>
+                                            <p:cond delay="0"/>
+                                          </p:stCondLst>
+                                        </p:cTn>
+                                        <p:tgtEl>
+                                          <p:spTgt spid="11"/>
+                                        </p:tgtEl>
+                                        <p:attrNameLst>
+                                          <p:attrName>style.visibility</p:attrName>
+                                        </p:attrNameLst>
+                                      </p:cBhvr>
+                                      <p:to>
+                                        <p:strVal val="visible"/>
+                                      </p:to>
+                                    </p:set>
+                                    <p:anim from="(-#ppt_w/2)" to="(#ppt_x)" calcmode="lin" valueType="num">
+                                      <p:cBhvr>
+                                        <p:cTn id="23" dur="600" fill="hold">
+                                          <p:stCondLst>
+                                            <p:cond delay="0"/>
+                                          </p:stCondLst>
+                                        </p:cTn>
+                                        <p:tgtEl>
+                                          <p:spTgt spid="11"/>
+                                        </p:tgtEl>
+                                        <p:attrNameLst>
+                                          <p:attrName>ppt_x</p:attrName>
+                                        </p:attrNameLst>
+                                      </p:cBhvr>
+                                    </p:anim>
+                                    <p:anim from="0" to="-1.0" calcmode="lin" valueType="num">
+                                      <p:cBhvr>
+                                        <p:cTn id="24" dur="200" decel="50000" autoRev="1" fill="hold">
+                                          <p:stCondLst>
+                                            <p:cond delay="600"/>
+                                          </p:stCondLst>
+                                        </p:cTn>
+                                        <p:tgtEl>
+                                          <p:spTgt spid="11"/>
+                                        </p:tgtEl>
+                                        <p:attrNameLst>
+                                          <p:attrName>xshear</p:attrName>
+                                        </p:attrNameLst>
+                                      </p:cBhvr>
+                                    </p:anim>
+                                    <p:animScale>
+                                      <p:cBhvr>
+                                        <p:cTn id="25" dur="200" decel="100000" autoRev="1" fill="hold">
+                                          <p:stCondLst>
+                                            <p:cond delay="600"/>
+                                          </p:stCondLst>
+                                        </p:cTn>
+                                        <p:tgtEl>
+                                          <p:spTgt spid="11"/>
+                                        </p:tgtEl>
+                                      </p:cBhvr>
+                                      <p:from x="100000" y="100000"/>
+                                      <p:to x="80000" y="100000"/>
+                                    </p:animScale>
+                                    <p:anim by="(#ppt_h/3+#ppt_w*0.1)" calcmode="lin" valueType="num">
+                                      <p:cBhvr additive="sum">
+                                        <p:cTn id="26" dur="200" decel="100000" autoRev="1" fill="hold">
+                                          <p:stCondLst>
+                                            <p:cond delay="600"/>
+                                          </p:stCondLst>
+                                        </p:cTn>
+                                        <p:tgtEl>
+                                          <p:spTgt spid="11"/>
+                                        </p:tgtEl>
+                                        <p:attrNameLst>
+                                          <p:attrName>ppt_x</p:attrName>
+                                        </p:attrNameLst>
+                                      </p:cBhvr>
+                                    </p:anim>
+                                  </p:childTnLst>
+                                </p:cTn>
+                              </p:par>
+                            </p:childTnLst>
+                          </p:cTn>
+                        </p:par>
+                      </p:childTnLst>
+                    </p:cTn>
+                  </p:par>
+                </p:childTnLst>
+              </p:cTn>
+              <p:prevCondLst>
+                <p:cond evt="onPrev" delay="0">
+                  <p:tgtEl>
+                    <p:sldTgt/>
+                  </p:tgtEl>
+                </p:cond>
+              </p:prevCondLst>
+              <p:nextCondLst>
+                <p:cond evt="onNext" delay="0">
+                  <p:tgtEl>
+                    <p:sldTgt/>
+                  </p:tgtEl>
+                </p:cond>
+              </p:nextCondLst>
+            </p:seq>
+          </p:childTnLst>
+        </p:cTn>
+      </p:par>
+    </p:tnLst>
+    <p:bldLst>
+      <p:bldP spid="7" grpId="0"/>
+      <p:bldP spid="9" grpId="0"/>
+      <p:bldP spid="11" grpId="0"/>
+    </p:bldLst>
+  </p:timing>
+</p:sld>
+</file>
+
+<file path=ppt/slides/slide27.xml><?xml version="1.0" encoding="utf-8"?>
+<p:sld xmlns:a="http://schemas.openxmlformats.org/drawingml/2006/main" xmlns:r="http://schemas.openxmlformats.org/officeDocument/2006/relationships" xmlns:p="http://schemas.openxmlformats.org/presentationml/2006/main">
+  <p:cSld>
+    <p:spTree>
+      <p:nvGrpSpPr>
+        <p:cNvPr id="1" name=""/>
+        <p:cNvGrpSpPr/>
+        <p:nvPr/>
+      </p:nvGrpSpPr>
+      <p:grpSpPr>
+        <a:xfrm>
+          <a:off x="0" y="0"/>
+          <a:ext cx="0" cy="0"/>
+          <a:chOff x="0" y="0"/>
+          <a:chExt cx="0" cy="0"/>
+        </a:xfrm>
+      </p:grpSpPr>
+      <p:sp>
+        <p:nvSpPr>
           <p:cNvPr id="19" name="Definition card">
             <a:extLst>
               <a:ext uri="{FF2B5EF4-FFF2-40B4-BE49-F238E27FC236}">
@@ -16612,7 +17144,7 @@
           <a:p>
             <a:fld id="{A80A81DD-F10A-4B1C-963A-0ABBB4865886}" type="slidenum">
               <a:rPr lang="en-US" sz="1600" smtClean="0"/>
-              <a:t>26</a:t>
+              <a:t>27</a:t>
             </a:fld>
             <a:endParaRPr lang="en-US" sz="1600"/>
           </a:p>
@@ -17646,7 +18178,7 @@
 </p:sld>
 </file>
 
-<file path=ppt/slides/slide27.xml><?xml version="1.0" encoding="utf-8"?>
+<file path=ppt/slides/slide28.xml><?xml version="1.0" encoding="utf-8"?>
 <p:sld xmlns:a="http://schemas.openxmlformats.org/drawingml/2006/main" xmlns:r="http://schemas.openxmlformats.org/officeDocument/2006/relationships" xmlns:p="http://schemas.openxmlformats.org/presentationml/2006/main">
   <p:cSld>
     <p:spTree>
@@ -17720,7 +18252,7 @@
           <a:p>
             <a:fld id="{A80A81DD-F10A-4B1C-963A-0ABBB4865886}" type="slidenum">
               <a:rPr lang="en-US" sz="1600" smtClean="0"/>
-              <a:t>27</a:t>
+              <a:t>28</a:t>
             </a:fld>
             <a:endParaRPr lang="en-US" sz="1600"/>
           </a:p>
@@ -18691,7 +19223,7 @@
 </p:sld>
 </file>
 
-<file path=ppt/slides/slide28.xml><?xml version="1.0" encoding="utf-8"?>
+<file path=ppt/slides/slide29.xml><?xml version="1.0" encoding="utf-8"?>
 <p:sld xmlns:a="http://schemas.openxmlformats.org/drawingml/2006/main" xmlns:r="http://schemas.openxmlformats.org/officeDocument/2006/relationships" xmlns:p="http://schemas.openxmlformats.org/presentationml/2006/main">
   <p:cSld>
     <p:spTree>
@@ -18933,7 +19465,7 @@
           <a:p>
             <a:fld id="{A80A81DD-F10A-4B1C-963A-0ABBB4865886}" type="slidenum">
               <a:rPr lang="en-US" sz="1600" smtClean="0"/>
-              <a:t>28</a:t>
+              <a:t>29</a:t>
             </a:fld>
             <a:endParaRPr lang="en-US" sz="1600"/>
           </a:p>
@@ -19601,1175 +20133,6 @@
 </p:sld>
 </file>
 
-<file path=ppt/slides/slide29.xml><?xml version="1.0" encoding="utf-8"?>
-<p:sld xmlns:a="http://schemas.openxmlformats.org/drawingml/2006/main" xmlns:r="http://schemas.openxmlformats.org/officeDocument/2006/relationships" xmlns:p="http://schemas.openxmlformats.org/presentationml/2006/main">
-  <p:cSld>
-    <p:spTree>
-      <p:nvGrpSpPr>
-        <p:cNvPr id="1" name=""/>
-        <p:cNvGrpSpPr/>
-        <p:nvPr/>
-      </p:nvGrpSpPr>
-      <p:grpSpPr>
-        <a:xfrm>
-          <a:off x="0" y="0"/>
-          <a:ext cx="0" cy="0"/>
-          <a:chOff x="0" y="0"/>
-          <a:chExt cx="0" cy="0"/>
-        </a:xfrm>
-      </p:grpSpPr>
-      <p:sp>
-        <p:nvSpPr>
-          <p:cNvPr id="16" name="Definition card">
-            <a:extLst>
-              <a:ext uri="{FF2B5EF4-FFF2-40B4-BE49-F238E27FC236}">
-                <a16:creationId xmlns:a16="http://schemas.microsoft.com/office/drawing/2014/main" id="{0986321D-DD51-CC3D-7DD0-2F9B636F6666}"/>
-              </a:ext>
-            </a:extLst>
-          </p:cNvPr>
-          <p:cNvSpPr/>
-          <p:nvPr/>
-        </p:nvSpPr>
-        <p:spPr>
-          <a:xfrm>
-            <a:off x="762000" y="4711700"/>
-            <a:ext cx="10668000" cy="828040"/>
-          </a:xfrm>
-          <a:prstGeom prst="roundRect">
-            <a:avLst>
-              <a:gd name="adj" fmla="val 12000"/>
-            </a:avLst>
-          </a:prstGeom>
-          <a:solidFill>
-            <a:srgbClr val="F2F6FC"/>
-          </a:solidFill>
-          <a:ln w="15875">
-            <a:solidFill>
-              <a:srgbClr val="4472C4"/>
-            </a:solidFill>
-          </a:ln>
-        </p:spPr>
-        <p:style>
-          <a:lnRef idx="2">
-            <a:schemeClr val="accent1">
-              <a:shade val="15000"/>
-            </a:schemeClr>
-          </a:lnRef>
-          <a:fillRef idx="1">
-            <a:schemeClr val="accent1"/>
-          </a:fillRef>
-          <a:effectRef idx="0">
-            <a:schemeClr val="accent1"/>
-          </a:effectRef>
-          <a:fontRef idx="minor">
-            <a:schemeClr val="lt1"/>
-          </a:fontRef>
-        </p:style>
-        <p:txBody>
-          <a:bodyPr rtlCol="0" anchor="ctr"/>
-          <a:lstStyle/>
-          <a:p>
-            <a:pPr algn="ctr"/>
-            <a:endParaRPr lang="en-US"/>
-          </a:p>
-        </p:txBody>
-      </p:sp>
-      <p:sp>
-        <p:nvSpPr>
-          <p:cNvPr id="13" name="Definition card">
-            <a:extLst>
-              <a:ext uri="{FF2B5EF4-FFF2-40B4-BE49-F238E27FC236}">
-                <a16:creationId xmlns:a16="http://schemas.microsoft.com/office/drawing/2014/main" id="{3240A742-6545-D275-21CB-933A9D3A95BD}"/>
-              </a:ext>
-            </a:extLst>
-          </p:cNvPr>
-          <p:cNvSpPr/>
-          <p:nvPr/>
-        </p:nvSpPr>
-        <p:spPr>
-          <a:xfrm>
-            <a:off x="762000" y="4025900"/>
-            <a:ext cx="10668000" cy="558800"/>
-          </a:xfrm>
-          <a:prstGeom prst="roundRect">
-            <a:avLst>
-              <a:gd name="adj" fmla="val 12000"/>
-            </a:avLst>
-          </a:prstGeom>
-          <a:solidFill>
-            <a:srgbClr val="F2F6FC"/>
-          </a:solidFill>
-          <a:ln w="15875">
-            <a:solidFill>
-              <a:srgbClr val="4472C4"/>
-            </a:solidFill>
-          </a:ln>
-        </p:spPr>
-        <p:style>
-          <a:lnRef idx="2">
-            <a:schemeClr val="accent1">
-              <a:shade val="15000"/>
-            </a:schemeClr>
-          </a:lnRef>
-          <a:fillRef idx="1">
-            <a:schemeClr val="accent1"/>
-          </a:fillRef>
-          <a:effectRef idx="0">
-            <a:schemeClr val="accent1"/>
-          </a:effectRef>
-          <a:fontRef idx="minor">
-            <a:schemeClr val="lt1"/>
-          </a:fontRef>
-        </p:style>
-        <p:txBody>
-          <a:bodyPr rtlCol="0" anchor="ctr"/>
-          <a:lstStyle/>
-          <a:p>
-            <a:pPr algn="ctr"/>
-            <a:endParaRPr lang="en-US"/>
-          </a:p>
-        </p:txBody>
-      </p:sp>
-      <p:sp>
-        <p:nvSpPr>
-          <p:cNvPr id="10" name="Definition card">
-            <a:extLst>
-              <a:ext uri="{FF2B5EF4-FFF2-40B4-BE49-F238E27FC236}">
-                <a16:creationId xmlns:a16="http://schemas.microsoft.com/office/drawing/2014/main" id="{748393A2-618F-1098-18D2-B69CA52BD216}"/>
-              </a:ext>
-            </a:extLst>
-          </p:cNvPr>
-          <p:cNvSpPr/>
-          <p:nvPr/>
-        </p:nvSpPr>
-        <p:spPr>
-          <a:xfrm>
-            <a:off x="762000" y="2796540"/>
-            <a:ext cx="10668000" cy="1102360"/>
-          </a:xfrm>
-          <a:prstGeom prst="roundRect">
-            <a:avLst>
-              <a:gd name="adj" fmla="val 12000"/>
-            </a:avLst>
-          </a:prstGeom>
-          <a:solidFill>
-            <a:srgbClr val="F2F6FC"/>
-          </a:solidFill>
-          <a:ln w="15875">
-            <a:solidFill>
-              <a:srgbClr val="4472C4"/>
-            </a:solidFill>
-          </a:ln>
-        </p:spPr>
-        <p:style>
-          <a:lnRef idx="2">
-            <a:schemeClr val="accent1">
-              <a:shade val="15000"/>
-            </a:schemeClr>
-          </a:lnRef>
-          <a:fillRef idx="1">
-            <a:schemeClr val="accent1"/>
-          </a:fillRef>
-          <a:effectRef idx="0">
-            <a:schemeClr val="accent1"/>
-          </a:effectRef>
-          <a:fontRef idx="minor">
-            <a:schemeClr val="lt1"/>
-          </a:fontRef>
-        </p:style>
-        <p:txBody>
-          <a:bodyPr rtlCol="0" anchor="ctr"/>
-          <a:lstStyle/>
-          <a:p>
-            <a:pPr algn="ctr"/>
-            <a:endParaRPr lang="en-US"/>
-          </a:p>
-        </p:txBody>
-      </p:sp>
-      <p:sp>
-        <p:nvSpPr>
-          <p:cNvPr id="7" name="Definition card">
-            <a:extLst>
-              <a:ext uri="{FF2B5EF4-FFF2-40B4-BE49-F238E27FC236}">
-                <a16:creationId xmlns:a16="http://schemas.microsoft.com/office/drawing/2014/main" id="{AD35FDEF-A6C9-D92F-1656-6ED66949569F}"/>
-              </a:ext>
-            </a:extLst>
-          </p:cNvPr>
-          <p:cNvSpPr/>
-          <p:nvPr/>
-        </p:nvSpPr>
-        <p:spPr>
-          <a:xfrm>
-            <a:off x="762000" y="1841500"/>
-            <a:ext cx="10668000" cy="828040"/>
-          </a:xfrm>
-          <a:prstGeom prst="roundRect">
-            <a:avLst>
-              <a:gd name="adj" fmla="val 12000"/>
-            </a:avLst>
-          </a:prstGeom>
-          <a:solidFill>
-            <a:srgbClr val="F2F6FC"/>
-          </a:solidFill>
-          <a:ln w="15875">
-            <a:solidFill>
-              <a:srgbClr val="4472C4"/>
-            </a:solidFill>
-          </a:ln>
-        </p:spPr>
-        <p:style>
-          <a:lnRef idx="2">
-            <a:schemeClr val="accent1">
-              <a:shade val="15000"/>
-            </a:schemeClr>
-          </a:lnRef>
-          <a:fillRef idx="1">
-            <a:schemeClr val="accent1"/>
-          </a:fillRef>
-          <a:effectRef idx="0">
-            <a:schemeClr val="accent1"/>
-          </a:effectRef>
-          <a:fontRef idx="minor">
-            <a:schemeClr val="lt1"/>
-          </a:fontRef>
-        </p:style>
-        <p:txBody>
-          <a:bodyPr rtlCol="0" anchor="ctr"/>
-          <a:lstStyle/>
-          <a:p>
-            <a:pPr algn="ctr"/>
-            <a:endParaRPr lang="en-US"/>
-          </a:p>
-        </p:txBody>
-      </p:sp>
-      <p:sp>
-        <p:nvSpPr>
-          <p:cNvPr id="2" name="Title 1">
-            <a:extLst>
-              <a:ext uri="{FF2B5EF4-FFF2-40B4-BE49-F238E27FC236}">
-                <a16:creationId xmlns:a16="http://schemas.microsoft.com/office/drawing/2014/main" id="{B9AA9945-18E2-A815-CD09-6E30DA8CC8DD}"/>
-              </a:ext>
-            </a:extLst>
-          </p:cNvPr>
-          <p:cNvSpPr>
-            <a:spLocks noGrp="1"/>
-          </p:cNvSpPr>
-          <p:nvPr>
-            <p:ph type="title"/>
-          </p:nvPr>
-        </p:nvSpPr>
-        <p:spPr/>
-        <p:txBody>
-          <a:bodyPr>
-            <a:noAutofit/>
-          </a:bodyPr>
-          <a:lstStyle/>
-          <a:p>
-            <a:r>
-              <a:rPr lang="en-US">
-                <a:solidFill>
-                  <a:srgbClr val="1F3864"/>
-                </a:solidFill>
-              </a:rPr>
-              <a:t>Placebos and blinding</a:t>
-            </a:r>
-          </a:p>
-        </p:txBody>
-      </p:sp>
-      <p:sp>
-        <p:nvSpPr>
-          <p:cNvPr id="4" name="Slide Number Placeholder 3">
-            <a:extLst>
-              <a:ext uri="{FF2B5EF4-FFF2-40B4-BE49-F238E27FC236}">
-                <a16:creationId xmlns:a16="http://schemas.microsoft.com/office/drawing/2014/main" id="{7CD39166-75E8-99F6-EF42-55FFE5636461}"/>
-              </a:ext>
-            </a:extLst>
-          </p:cNvPr>
-          <p:cNvSpPr>
-            <a:spLocks noGrp="1"/>
-          </p:cNvSpPr>
-          <p:nvPr>
-            <p:ph type="sldNum" sz="quarter" idx="12"/>
-          </p:nvPr>
-        </p:nvSpPr>
-        <p:spPr/>
-        <p:txBody>
-          <a:bodyPr/>
-          <a:lstStyle/>
-          <a:p>
-            <a:fld id="{A80A81DD-F10A-4B1C-963A-0ABBB4865886}" type="slidenum">
-              <a:rPr lang="en-US" sz="1600" smtClean="0"/>
-              <a:t>29</a:t>
-            </a:fld>
-            <a:endParaRPr lang="en-US" sz="1600"/>
-          </a:p>
-        </p:txBody>
-      </p:sp>
-      <p:sp>
-        <p:nvSpPr>
-          <p:cNvPr id="5" name="TextBox 4">
-            <a:extLst>
-              <a:ext uri="{FF2B5EF4-FFF2-40B4-BE49-F238E27FC236}">
-                <a16:creationId xmlns:a16="http://schemas.microsoft.com/office/drawing/2014/main" id="{1F914461-1C87-49C0-A9DA-02B03CA129A0}"/>
-              </a:ext>
-            </a:extLst>
-          </p:cNvPr>
-          <p:cNvSpPr txBox="1"/>
-          <p:nvPr/>
-        </p:nvSpPr>
-        <p:spPr>
-          <a:xfrm>
-            <a:off x="914400" y="1943100"/>
-            <a:ext cx="3022600" cy="381000"/>
-          </a:xfrm>
-          <a:prstGeom prst="rect">
-            <a:avLst/>
-          </a:prstGeom>
-          <a:noFill/>
-        </p:spPr>
-        <p:txBody>
-          <a:bodyPr vert="horz" wrap="square" rtlCol="0">
-            <a:noAutofit/>
-          </a:bodyPr>
-          <a:lstStyle/>
-          <a:p>
-            <a:r>
-              <a:rPr lang="en-US" b="1">
-                <a:solidFill>
-                  <a:srgbClr val="C00000"/>
-                </a:solidFill>
-              </a:rPr>
-              <a:t>placebo</a:t>
-            </a:r>
-          </a:p>
-        </p:txBody>
-      </p:sp>
-      <p:sp>
-        <p:nvSpPr>
-          <p:cNvPr id="6" name="TextBox 5">
-            <a:extLst>
-              <a:ext uri="{FF2B5EF4-FFF2-40B4-BE49-F238E27FC236}">
-                <a16:creationId xmlns:a16="http://schemas.microsoft.com/office/drawing/2014/main" id="{9E0A0659-C886-4CB8-B25B-5E2B59B4990B}"/>
-              </a:ext>
-            </a:extLst>
-          </p:cNvPr>
-          <p:cNvSpPr txBox="1"/>
-          <p:nvPr/>
-        </p:nvSpPr>
-        <p:spPr>
-          <a:xfrm>
-            <a:off x="4013200" y="1943099"/>
-            <a:ext cx="7264400" cy="650240"/>
-          </a:xfrm>
-          <a:prstGeom prst="rect">
-            <a:avLst/>
-          </a:prstGeom>
-          <a:noFill/>
-        </p:spPr>
-        <p:txBody>
-          <a:bodyPr vert="horz" wrap="square" rtlCol="0">
-            <a:noAutofit/>
-          </a:bodyPr>
-          <a:lstStyle/>
-          <a:p>
-            <a:r>
-              <a:rPr lang="en-US">
-                <a:solidFill>
-                  <a:srgbClr val="000000"/>
-                </a:solidFill>
-              </a:rPr>
-              <a:t>an inactive treatment that looks exactly like the real one</a:t>
-            </a:r>
-          </a:p>
-          <a:p>
-            <a:r>
-              <a:rPr lang="en-US" i="1">
-                <a:solidFill>
-                  <a:srgbClr val="595959"/>
-                </a:solidFill>
-              </a:rPr>
-              <a:t>a sugar pill, or a saline injection</a:t>
-            </a:r>
-          </a:p>
-        </p:txBody>
-      </p:sp>
-      <p:sp>
-        <p:nvSpPr>
-          <p:cNvPr id="8" name="TextBox 7">
-            <a:extLst>
-              <a:ext uri="{FF2B5EF4-FFF2-40B4-BE49-F238E27FC236}">
-                <a16:creationId xmlns:a16="http://schemas.microsoft.com/office/drawing/2014/main" id="{E93E6C15-B051-DA6B-FC50-75C45B601985}"/>
-              </a:ext>
-            </a:extLst>
-          </p:cNvPr>
-          <p:cNvSpPr txBox="1"/>
-          <p:nvPr/>
-        </p:nvSpPr>
-        <p:spPr>
-          <a:xfrm>
-            <a:off x="914400" y="2898140"/>
-            <a:ext cx="3022600" cy="381000"/>
-          </a:xfrm>
-          <a:prstGeom prst="rect">
-            <a:avLst/>
-          </a:prstGeom>
-          <a:noFill/>
-        </p:spPr>
-        <p:txBody>
-          <a:bodyPr vert="horz" wrap="square" rtlCol="0">
-            <a:noAutofit/>
-          </a:bodyPr>
-          <a:lstStyle/>
-          <a:p>
-            <a:r>
-              <a:rPr lang="en-US" b="1">
-                <a:solidFill>
-                  <a:srgbClr val="C00000"/>
-                </a:solidFill>
-              </a:rPr>
-              <a:t>placebo effect</a:t>
-            </a:r>
-          </a:p>
-        </p:txBody>
-      </p:sp>
-      <p:sp>
-        <p:nvSpPr>
-          <p:cNvPr id="9" name="TextBox 8">
-            <a:extLst>
-              <a:ext uri="{FF2B5EF4-FFF2-40B4-BE49-F238E27FC236}">
-                <a16:creationId xmlns:a16="http://schemas.microsoft.com/office/drawing/2014/main" id="{8311B553-B0DF-9622-DF06-AFFDA7ADF708}"/>
-              </a:ext>
-            </a:extLst>
-          </p:cNvPr>
-          <p:cNvSpPr txBox="1"/>
-          <p:nvPr/>
-        </p:nvSpPr>
-        <p:spPr>
-          <a:xfrm>
-            <a:off x="4013200" y="2898140"/>
-            <a:ext cx="7264400" cy="924560"/>
-          </a:xfrm>
-          <a:prstGeom prst="rect">
-            <a:avLst/>
-          </a:prstGeom>
-          <a:noFill/>
-        </p:spPr>
-        <p:txBody>
-          <a:bodyPr vert="horz" wrap="square" rtlCol="0">
-            <a:noAutofit/>
-          </a:bodyPr>
-          <a:lstStyle/>
-          <a:p>
-            <a:r>
-              <a:rPr lang="en-US">
-                <a:solidFill>
-                  <a:srgbClr val="000000"/>
-                </a:solidFill>
-              </a:rPr>
-              <a:t>people often improve simply because they believe they are being treated</a:t>
-            </a:r>
-          </a:p>
-          <a:p>
-            <a:r>
-              <a:rPr lang="en-US" i="1">
-                <a:solidFill>
-                  <a:srgbClr val="595959"/>
-                </a:solidFill>
-              </a:rPr>
-              <a:t>in one study, believing you had taken a performance drug worked almost as well as the drug itself</a:t>
-            </a:r>
-          </a:p>
-        </p:txBody>
-      </p:sp>
-      <p:sp>
-        <p:nvSpPr>
-          <p:cNvPr id="11" name="TextBox 10">
-            <a:extLst>
-              <a:ext uri="{FF2B5EF4-FFF2-40B4-BE49-F238E27FC236}">
-                <a16:creationId xmlns:a16="http://schemas.microsoft.com/office/drawing/2014/main" id="{BD588549-1922-B620-2B4E-9464BCE53BB2}"/>
-              </a:ext>
-            </a:extLst>
-          </p:cNvPr>
-          <p:cNvSpPr txBox="1"/>
-          <p:nvPr/>
-        </p:nvSpPr>
-        <p:spPr>
-          <a:xfrm>
-            <a:off x="914400" y="4127500"/>
-            <a:ext cx="3022600" cy="381000"/>
-          </a:xfrm>
-          <a:prstGeom prst="rect">
-            <a:avLst/>
-          </a:prstGeom>
-          <a:noFill/>
-        </p:spPr>
-        <p:txBody>
-          <a:bodyPr vert="horz" wrap="square" rtlCol="0">
-            <a:noAutofit/>
-          </a:bodyPr>
-          <a:lstStyle/>
-          <a:p>
-            <a:r>
-              <a:rPr lang="en-US" b="1">
-                <a:solidFill>
-                  <a:srgbClr val="C00000"/>
-                </a:solidFill>
-              </a:rPr>
-              <a:t>blinding</a:t>
-            </a:r>
-          </a:p>
-        </p:txBody>
-      </p:sp>
-      <p:sp>
-        <p:nvSpPr>
-          <p:cNvPr id="12" name="TextBox 11">
-            <a:extLst>
-              <a:ext uri="{FF2B5EF4-FFF2-40B4-BE49-F238E27FC236}">
-                <a16:creationId xmlns:a16="http://schemas.microsoft.com/office/drawing/2014/main" id="{6D5D28C7-3333-6E48-704B-CF3132518528}"/>
-              </a:ext>
-            </a:extLst>
-          </p:cNvPr>
-          <p:cNvSpPr txBox="1"/>
-          <p:nvPr/>
-        </p:nvSpPr>
-        <p:spPr>
-          <a:xfrm>
-            <a:off x="4013200" y="4127500"/>
-            <a:ext cx="7264400" cy="381000"/>
-          </a:xfrm>
-          <a:prstGeom prst="rect">
-            <a:avLst/>
-          </a:prstGeom>
-          <a:noFill/>
-        </p:spPr>
-        <p:txBody>
-          <a:bodyPr vert="horz" wrap="square" rtlCol="0">
-            <a:noAutofit/>
-          </a:bodyPr>
-          <a:lstStyle/>
-          <a:p>
-            <a:r>
-              <a:rPr lang="en-US">
-                <a:solidFill>
-                  <a:srgbClr val="000000"/>
-                </a:solidFill>
-              </a:rPr>
-              <a:t>the subjects do not know which treatment they received</a:t>
-            </a:r>
-          </a:p>
-        </p:txBody>
-      </p:sp>
-      <p:sp>
-        <p:nvSpPr>
-          <p:cNvPr id="14" name="TextBox 13">
-            <a:extLst>
-              <a:ext uri="{FF2B5EF4-FFF2-40B4-BE49-F238E27FC236}">
-                <a16:creationId xmlns:a16="http://schemas.microsoft.com/office/drawing/2014/main" id="{C5CD5F34-944C-50F9-7B04-0A433180EADC}"/>
-              </a:ext>
-            </a:extLst>
-          </p:cNvPr>
-          <p:cNvSpPr txBox="1"/>
-          <p:nvPr/>
-        </p:nvSpPr>
-        <p:spPr>
-          <a:xfrm>
-            <a:off x="914400" y="4813300"/>
-            <a:ext cx="3022600" cy="381000"/>
-          </a:xfrm>
-          <a:prstGeom prst="rect">
-            <a:avLst/>
-          </a:prstGeom>
-          <a:noFill/>
-        </p:spPr>
-        <p:txBody>
-          <a:bodyPr vert="horz" wrap="square" rtlCol="0">
-            <a:noAutofit/>
-          </a:bodyPr>
-          <a:lstStyle/>
-          <a:p>
-            <a:r>
-              <a:rPr lang="en-US" b="1">
-                <a:solidFill>
-                  <a:srgbClr val="C00000"/>
-                </a:solidFill>
-              </a:rPr>
-              <a:t>double-blind</a:t>
-            </a:r>
-          </a:p>
-        </p:txBody>
-      </p:sp>
-      <p:sp>
-        <p:nvSpPr>
-          <p:cNvPr id="15" name="TextBox 14">
-            <a:extLst>
-              <a:ext uri="{FF2B5EF4-FFF2-40B4-BE49-F238E27FC236}">
-                <a16:creationId xmlns:a16="http://schemas.microsoft.com/office/drawing/2014/main" id="{75F50005-2E1E-E3B6-F676-29A98A6D4792}"/>
-              </a:ext>
-            </a:extLst>
-          </p:cNvPr>
-          <p:cNvSpPr txBox="1"/>
-          <p:nvPr/>
-        </p:nvSpPr>
-        <p:spPr>
-          <a:xfrm>
-            <a:off x="4013200" y="4813299"/>
-            <a:ext cx="7264400" cy="650240"/>
-          </a:xfrm>
-          <a:prstGeom prst="rect">
-            <a:avLst/>
-          </a:prstGeom>
-          <a:noFill/>
-        </p:spPr>
-        <p:txBody>
-          <a:bodyPr vert="horz" wrap="square" rtlCol="0">
-            <a:noAutofit/>
-          </a:bodyPr>
-          <a:lstStyle/>
-          <a:p>
-            <a:r>
-              <a:rPr lang="en-US">
-                <a:solidFill>
-                  <a:srgbClr val="000000"/>
-                </a:solidFill>
-              </a:rPr>
-              <a:t>neither the subjects nor the researchers working with them know who received what</a:t>
-            </a:r>
-          </a:p>
-        </p:txBody>
-      </p:sp>
-      <p:sp>
-        <p:nvSpPr>
-          <p:cNvPr id="3" name="Title rule">
-            <a:extLst>
-              <a:ext uri="{FF2B5EF4-FFF2-40B4-BE49-F238E27FC236}">
-                <a16:creationId xmlns:a16="http://schemas.microsoft.com/office/drawing/2014/main" id="{E11A2D97-48DE-89D2-6522-EBF2B2D53551}"/>
-              </a:ext>
-            </a:extLst>
-          </p:cNvPr>
-          <p:cNvSpPr/>
-          <p:nvPr/>
-        </p:nvSpPr>
-        <p:spPr>
-          <a:xfrm>
-            <a:off x="838200" y="1600200"/>
-            <a:ext cx="10515600" cy="38100"/>
-          </a:xfrm>
-          <a:prstGeom prst="rect">
-            <a:avLst/>
-          </a:prstGeom>
-          <a:solidFill>
-            <a:srgbClr val="4472C4"/>
-          </a:solidFill>
-          <a:ln w="12700" cap="flat" cmpd="sng" algn="ctr">
-            <a:noFill/>
-            <a:prstDash val="solid"/>
-            <a:miter lim="800000"/>
-          </a:ln>
-          <a:effectLst/>
-          <a:extLst>
-            <a:ext uri="{91240B29-F687-4F45-9708-019B960494DF}">
-              <a14:hiddenLine xmlns:a14="http://schemas.microsoft.com/office/drawing/2010/main" w="12700" cap="flat" cmpd="sng" algn="ctr">
-                <a:solidFill>
-                  <a:schemeClr val="accent1">
-                    <a:shade val="15000"/>
-                  </a:schemeClr>
-                </a:solidFill>
-                <a:prstDash val="solid"/>
-                <a:miter lim="800000"/>
-              </a14:hiddenLine>
-            </a:ext>
-          </a:extLst>
-        </p:spPr>
-        <p:style>
-          <a:lnRef idx="2">
-            <a:schemeClr val="accent1">
-              <a:shade val="15000"/>
-            </a:schemeClr>
-          </a:lnRef>
-          <a:fillRef idx="1">
-            <a:schemeClr val="accent1"/>
-          </a:fillRef>
-          <a:effectRef idx="0">
-            <a:schemeClr val="accent1"/>
-          </a:effectRef>
-          <a:fontRef idx="minor">
-            <a:schemeClr val="lt1"/>
-          </a:fontRef>
-        </p:style>
-        <p:txBody>
-          <a:bodyPr rtlCol="0" anchor="ctr"/>
-          <a:lstStyle/>
-          <a:p>
-            <a:pPr algn="ctr"/>
-            <a:endParaRPr lang="en-US"/>
-          </a:p>
-        </p:txBody>
-      </p:sp>
-    </p:spTree>
-    <p:extLst>
-      <p:ext uri="{BB962C8B-B14F-4D97-AF65-F5344CB8AC3E}">
-        <p14:creationId xmlns:p14="http://schemas.microsoft.com/office/powerpoint/2010/main" val="3972102136"/>
-      </p:ext>
-    </p:extLst>
-  </p:cSld>
-  <p:clrMapOvr>
-    <a:masterClrMapping/>
-  </p:clrMapOvr>
-  <p:timing>
-    <p:tnLst>
-      <p:par>
-        <p:cTn id="1" dur="indefinite" restart="never" nodeType="tmRoot">
-          <p:childTnLst>
-            <p:seq concurrent="1" nextAc="seek">
-              <p:cTn id="2" dur="indefinite" nodeType="mainSeq">
-                <p:childTnLst>
-                  <p:par>
-                    <p:cTn id="3" fill="hold">
-                      <p:stCondLst>
-                        <p:cond delay="indefinite"/>
-                      </p:stCondLst>
-                      <p:childTnLst>
-                        <p:par>
-                          <p:cTn id="4" fill="hold">
-                            <p:stCondLst>
-                              <p:cond delay="0"/>
-                            </p:stCondLst>
-                            <p:childTnLst>
-                              <p:par>
-                                <p:cTn id="5" presetID="34" presetClass="entr" presetSubtype="0" fill="hold" grpId="0" nodeType="clickEffect">
-                                  <p:stCondLst>
-                                    <p:cond delay="0"/>
-                                  </p:stCondLst>
-                                  <p:childTnLst>
-                                    <p:set>
-                                      <p:cBhvr>
-                                        <p:cTn id="6" dur="1" fill="hold">
-                                          <p:stCondLst>
-                                            <p:cond delay="0"/>
-                                          </p:stCondLst>
-                                        </p:cTn>
-                                        <p:tgtEl>
-                                          <p:spTgt spid="6"/>
-                                        </p:tgtEl>
-                                        <p:attrNameLst>
-                                          <p:attrName>style.visibility</p:attrName>
-                                        </p:attrNameLst>
-                                      </p:cBhvr>
-                                      <p:to>
-                                        <p:strVal val="visible"/>
-                                      </p:to>
-                                    </p:set>
-                                    <p:anim from="(-#ppt_w/2)" to="(#ppt_x)" calcmode="lin" valueType="num">
-                                      <p:cBhvr>
-                                        <p:cTn id="7" dur="600" fill="hold">
-                                          <p:stCondLst>
-                                            <p:cond delay="0"/>
-                                          </p:stCondLst>
-                                        </p:cTn>
-                                        <p:tgtEl>
-                                          <p:spTgt spid="6"/>
-                                        </p:tgtEl>
-                                        <p:attrNameLst>
-                                          <p:attrName>ppt_x</p:attrName>
-                                        </p:attrNameLst>
-                                      </p:cBhvr>
-                                    </p:anim>
-                                    <p:anim from="0" to="-1.0" calcmode="lin" valueType="num">
-                                      <p:cBhvr>
-                                        <p:cTn id="8" dur="200" decel="50000" autoRev="1" fill="hold">
-                                          <p:stCondLst>
-                                            <p:cond delay="600"/>
-                                          </p:stCondLst>
-                                        </p:cTn>
-                                        <p:tgtEl>
-                                          <p:spTgt spid="6"/>
-                                        </p:tgtEl>
-                                        <p:attrNameLst>
-                                          <p:attrName>xshear</p:attrName>
-                                        </p:attrNameLst>
-                                      </p:cBhvr>
-                                    </p:anim>
-                                    <p:animScale>
-                                      <p:cBhvr>
-                                        <p:cTn id="9" dur="200" decel="100000" autoRev="1" fill="hold">
-                                          <p:stCondLst>
-                                            <p:cond delay="600"/>
-                                          </p:stCondLst>
-                                        </p:cTn>
-                                        <p:tgtEl>
-                                          <p:spTgt spid="6"/>
-                                        </p:tgtEl>
-                                      </p:cBhvr>
-                                      <p:from x="100000" y="100000"/>
-                                      <p:to x="80000" y="100000"/>
-                                    </p:animScale>
-                                    <p:anim by="(#ppt_h/3+#ppt_w*0.1)" calcmode="lin" valueType="num">
-                                      <p:cBhvr additive="sum">
-                                        <p:cTn id="10" dur="200" decel="100000" autoRev="1" fill="hold">
-                                          <p:stCondLst>
-                                            <p:cond delay="600"/>
-                                          </p:stCondLst>
-                                        </p:cTn>
-                                        <p:tgtEl>
-                                          <p:spTgt spid="6"/>
-                                        </p:tgtEl>
-                                        <p:attrNameLst>
-                                          <p:attrName>ppt_x</p:attrName>
-                                        </p:attrNameLst>
-                                      </p:cBhvr>
-                                    </p:anim>
-                                  </p:childTnLst>
-                                </p:cTn>
-                              </p:par>
-                            </p:childTnLst>
-                          </p:cTn>
-                        </p:par>
-                      </p:childTnLst>
-                    </p:cTn>
-                  </p:par>
-                  <p:par>
-                    <p:cTn id="11" fill="hold">
-                      <p:stCondLst>
-                        <p:cond delay="indefinite"/>
-                      </p:stCondLst>
-                      <p:childTnLst>
-                        <p:par>
-                          <p:cTn id="12" fill="hold">
-                            <p:stCondLst>
-                              <p:cond delay="0"/>
-                            </p:stCondLst>
-                            <p:childTnLst>
-                              <p:par>
-                                <p:cTn id="13" presetID="34" presetClass="entr" presetSubtype="0" fill="hold" grpId="0" nodeType="clickEffect">
-                                  <p:stCondLst>
-                                    <p:cond delay="0"/>
-                                  </p:stCondLst>
-                                  <p:childTnLst>
-                                    <p:set>
-                                      <p:cBhvr>
-                                        <p:cTn id="14" dur="1" fill="hold">
-                                          <p:stCondLst>
-                                            <p:cond delay="0"/>
-                                          </p:stCondLst>
-                                        </p:cTn>
-                                        <p:tgtEl>
-                                          <p:spTgt spid="9"/>
-                                        </p:tgtEl>
-                                        <p:attrNameLst>
-                                          <p:attrName>style.visibility</p:attrName>
-                                        </p:attrNameLst>
-                                      </p:cBhvr>
-                                      <p:to>
-                                        <p:strVal val="visible"/>
-                                      </p:to>
-                                    </p:set>
-                                    <p:anim from="(-#ppt_w/2)" to="(#ppt_x)" calcmode="lin" valueType="num">
-                                      <p:cBhvr>
-                                        <p:cTn id="15" dur="600" fill="hold">
-                                          <p:stCondLst>
-                                            <p:cond delay="0"/>
-                                          </p:stCondLst>
-                                        </p:cTn>
-                                        <p:tgtEl>
-                                          <p:spTgt spid="9"/>
-                                        </p:tgtEl>
-                                        <p:attrNameLst>
-                                          <p:attrName>ppt_x</p:attrName>
-                                        </p:attrNameLst>
-                                      </p:cBhvr>
-                                    </p:anim>
-                                    <p:anim from="0" to="-1.0" calcmode="lin" valueType="num">
-                                      <p:cBhvr>
-                                        <p:cTn id="16" dur="200" decel="50000" autoRev="1" fill="hold">
-                                          <p:stCondLst>
-                                            <p:cond delay="600"/>
-                                          </p:stCondLst>
-                                        </p:cTn>
-                                        <p:tgtEl>
-                                          <p:spTgt spid="9"/>
-                                        </p:tgtEl>
-                                        <p:attrNameLst>
-                                          <p:attrName>xshear</p:attrName>
-                                        </p:attrNameLst>
-                                      </p:cBhvr>
-                                    </p:anim>
-                                    <p:animScale>
-                                      <p:cBhvr>
-                                        <p:cTn id="17" dur="200" decel="100000" autoRev="1" fill="hold">
-                                          <p:stCondLst>
-                                            <p:cond delay="600"/>
-                                          </p:stCondLst>
-                                        </p:cTn>
-                                        <p:tgtEl>
-                                          <p:spTgt spid="9"/>
-                                        </p:tgtEl>
-                                      </p:cBhvr>
-                                      <p:from x="100000" y="100000"/>
-                                      <p:to x="80000" y="100000"/>
-                                    </p:animScale>
-                                    <p:anim by="(#ppt_h/3+#ppt_w*0.1)" calcmode="lin" valueType="num">
-                                      <p:cBhvr additive="sum">
-                                        <p:cTn id="18" dur="200" decel="100000" autoRev="1" fill="hold">
-                                          <p:stCondLst>
-                                            <p:cond delay="600"/>
-                                          </p:stCondLst>
-                                        </p:cTn>
-                                        <p:tgtEl>
-                                          <p:spTgt spid="9"/>
-                                        </p:tgtEl>
-                                        <p:attrNameLst>
-                                          <p:attrName>ppt_x</p:attrName>
-                                        </p:attrNameLst>
-                                      </p:cBhvr>
-                                    </p:anim>
-                                  </p:childTnLst>
-                                </p:cTn>
-                              </p:par>
-                            </p:childTnLst>
-                          </p:cTn>
-                        </p:par>
-                      </p:childTnLst>
-                    </p:cTn>
-                  </p:par>
-                  <p:par>
-                    <p:cTn id="19" fill="hold">
-                      <p:stCondLst>
-                        <p:cond delay="indefinite"/>
-                      </p:stCondLst>
-                      <p:childTnLst>
-                        <p:par>
-                          <p:cTn id="20" fill="hold">
-                            <p:stCondLst>
-                              <p:cond delay="0"/>
-                            </p:stCondLst>
-                            <p:childTnLst>
-                              <p:par>
-                                <p:cTn id="21" presetID="34" presetClass="entr" presetSubtype="0" fill="hold" grpId="0" nodeType="clickEffect">
-                                  <p:stCondLst>
-                                    <p:cond delay="0"/>
-                                  </p:stCondLst>
-                                  <p:childTnLst>
-                                    <p:set>
-                                      <p:cBhvr>
-                                        <p:cTn id="22" dur="1" fill="hold">
-                                          <p:stCondLst>
-                                            <p:cond delay="0"/>
-                                          </p:stCondLst>
-                                        </p:cTn>
-                                        <p:tgtEl>
-                                          <p:spTgt spid="12"/>
-                                        </p:tgtEl>
-                                        <p:attrNameLst>
-                                          <p:attrName>style.visibility</p:attrName>
-                                        </p:attrNameLst>
-                                      </p:cBhvr>
-                                      <p:to>
-                                        <p:strVal val="visible"/>
-                                      </p:to>
-                                    </p:set>
-                                    <p:anim from="(-#ppt_w/2)" to="(#ppt_x)" calcmode="lin" valueType="num">
-                                      <p:cBhvr>
-                                        <p:cTn id="23" dur="600" fill="hold">
-                                          <p:stCondLst>
-                                            <p:cond delay="0"/>
-                                          </p:stCondLst>
-                                        </p:cTn>
-                                        <p:tgtEl>
-                                          <p:spTgt spid="12"/>
-                                        </p:tgtEl>
-                                        <p:attrNameLst>
-                                          <p:attrName>ppt_x</p:attrName>
-                                        </p:attrNameLst>
-                                      </p:cBhvr>
-                                    </p:anim>
-                                    <p:anim from="0" to="-1.0" calcmode="lin" valueType="num">
-                                      <p:cBhvr>
-                                        <p:cTn id="24" dur="200" decel="50000" autoRev="1" fill="hold">
-                                          <p:stCondLst>
-                                            <p:cond delay="600"/>
-                                          </p:stCondLst>
-                                        </p:cTn>
-                                        <p:tgtEl>
-                                          <p:spTgt spid="12"/>
-                                        </p:tgtEl>
-                                        <p:attrNameLst>
-                                          <p:attrName>xshear</p:attrName>
-                                        </p:attrNameLst>
-                                      </p:cBhvr>
-                                    </p:anim>
-                                    <p:animScale>
-                                      <p:cBhvr>
-                                        <p:cTn id="25" dur="200" decel="100000" autoRev="1" fill="hold">
-                                          <p:stCondLst>
-                                            <p:cond delay="600"/>
-                                          </p:stCondLst>
-                                        </p:cTn>
-                                        <p:tgtEl>
-                                          <p:spTgt spid="12"/>
-                                        </p:tgtEl>
-                                      </p:cBhvr>
-                                      <p:from x="100000" y="100000"/>
-                                      <p:to x="80000" y="100000"/>
-                                    </p:animScale>
-                                    <p:anim by="(#ppt_h/3+#ppt_w*0.1)" calcmode="lin" valueType="num">
-                                      <p:cBhvr additive="sum">
-                                        <p:cTn id="26" dur="200" decel="100000" autoRev="1" fill="hold">
-                                          <p:stCondLst>
-                                            <p:cond delay="600"/>
-                                          </p:stCondLst>
-                                        </p:cTn>
-                                        <p:tgtEl>
-                                          <p:spTgt spid="12"/>
-                                        </p:tgtEl>
-                                        <p:attrNameLst>
-                                          <p:attrName>ppt_x</p:attrName>
-                                        </p:attrNameLst>
-                                      </p:cBhvr>
-                                    </p:anim>
-                                  </p:childTnLst>
-                                </p:cTn>
-                              </p:par>
-                            </p:childTnLst>
-                          </p:cTn>
-                        </p:par>
-                      </p:childTnLst>
-                    </p:cTn>
-                  </p:par>
-                  <p:par>
-                    <p:cTn id="27" fill="hold">
-                      <p:stCondLst>
-                        <p:cond delay="indefinite"/>
-                      </p:stCondLst>
-                      <p:childTnLst>
-                        <p:par>
-                          <p:cTn id="28" fill="hold">
-                            <p:stCondLst>
-                              <p:cond delay="0"/>
-                            </p:stCondLst>
-                            <p:childTnLst>
-                              <p:par>
-                                <p:cTn id="29" presetID="34" presetClass="entr" presetSubtype="0" fill="hold" grpId="0" nodeType="clickEffect">
-                                  <p:stCondLst>
-                                    <p:cond delay="0"/>
-                                  </p:stCondLst>
-                                  <p:childTnLst>
-                                    <p:set>
-                                      <p:cBhvr>
-                                        <p:cTn id="30" dur="1" fill="hold">
-                                          <p:stCondLst>
-                                            <p:cond delay="0"/>
-                                          </p:stCondLst>
-                                        </p:cTn>
-                                        <p:tgtEl>
-                                          <p:spTgt spid="15"/>
-                                        </p:tgtEl>
-                                        <p:attrNameLst>
-                                          <p:attrName>style.visibility</p:attrName>
-                                        </p:attrNameLst>
-                                      </p:cBhvr>
-                                      <p:to>
-                                        <p:strVal val="visible"/>
-                                      </p:to>
-                                    </p:set>
-                                    <p:anim from="(-#ppt_w/2)" to="(#ppt_x)" calcmode="lin" valueType="num">
-                                      <p:cBhvr>
-                                        <p:cTn id="31" dur="600" fill="hold">
-                                          <p:stCondLst>
-                                            <p:cond delay="0"/>
-                                          </p:stCondLst>
-                                        </p:cTn>
-                                        <p:tgtEl>
-                                          <p:spTgt spid="15"/>
-                                        </p:tgtEl>
-                                        <p:attrNameLst>
-                                          <p:attrName>ppt_x</p:attrName>
-                                        </p:attrNameLst>
-                                      </p:cBhvr>
-                                    </p:anim>
-                                    <p:anim from="0" to="-1.0" calcmode="lin" valueType="num">
-                                      <p:cBhvr>
-                                        <p:cTn id="32" dur="200" decel="50000" autoRev="1" fill="hold">
-                                          <p:stCondLst>
-                                            <p:cond delay="600"/>
-                                          </p:stCondLst>
-                                        </p:cTn>
-                                        <p:tgtEl>
-                                          <p:spTgt spid="15"/>
-                                        </p:tgtEl>
-                                        <p:attrNameLst>
-                                          <p:attrName>xshear</p:attrName>
-                                        </p:attrNameLst>
-                                      </p:cBhvr>
-                                    </p:anim>
-                                    <p:animScale>
-                                      <p:cBhvr>
-                                        <p:cTn id="33" dur="200" decel="100000" autoRev="1" fill="hold">
-                                          <p:stCondLst>
-                                            <p:cond delay="600"/>
-                                          </p:stCondLst>
-                                        </p:cTn>
-                                        <p:tgtEl>
-                                          <p:spTgt spid="15"/>
-                                        </p:tgtEl>
-                                      </p:cBhvr>
-                                      <p:from x="100000" y="100000"/>
-                                      <p:to x="80000" y="100000"/>
-                                    </p:animScale>
-                                    <p:anim by="(#ppt_h/3+#ppt_w*0.1)" calcmode="lin" valueType="num">
-                                      <p:cBhvr additive="sum">
-                                        <p:cTn id="34" dur="200" decel="100000" autoRev="1" fill="hold">
-                                          <p:stCondLst>
-                                            <p:cond delay="600"/>
-                                          </p:stCondLst>
-                                        </p:cTn>
-                                        <p:tgtEl>
-                                          <p:spTgt spid="15"/>
-                                        </p:tgtEl>
-                                        <p:attrNameLst>
-                                          <p:attrName>ppt_x</p:attrName>
-                                        </p:attrNameLst>
-                                      </p:cBhvr>
-                                    </p:anim>
-                                  </p:childTnLst>
-                                </p:cTn>
-                              </p:par>
-                            </p:childTnLst>
-                          </p:cTn>
-                        </p:par>
-                      </p:childTnLst>
-                    </p:cTn>
-                  </p:par>
-                </p:childTnLst>
-              </p:cTn>
-              <p:prevCondLst>
-                <p:cond evt="onPrev" delay="0">
-                  <p:tgtEl>
-                    <p:sldTgt/>
-                  </p:tgtEl>
-                </p:cond>
-              </p:prevCondLst>
-              <p:nextCondLst>
-                <p:cond evt="onNext" delay="0">
-                  <p:tgtEl>
-                    <p:sldTgt/>
-                  </p:tgtEl>
-                </p:cond>
-              </p:nextCondLst>
-            </p:seq>
-          </p:childTnLst>
-        </p:cTn>
-      </p:par>
-    </p:tnLst>
-    <p:bldLst>
-      <p:bldP spid="6" grpId="0"/>
-      <p:bldP spid="9" grpId="0"/>
-      <p:bldP spid="12" grpId="0"/>
-      <p:bldP spid="15" grpId="0"/>
-    </p:bldLst>
-  </p:timing>
-</p:sld>
-</file>
-
 <file path=ppt/slides/slide3.xml><?xml version="1.0" encoding="utf-8"?>
 <p:sld xmlns:a="http://schemas.openxmlformats.org/drawingml/2006/main" xmlns:r="http://schemas.openxmlformats.org/officeDocument/2006/relationships" xmlns:p="http://schemas.openxmlformats.org/presentationml/2006/main">
   <p:cSld>
@@ -20865,13 +20228,21 @@
                   <a:srgbClr val="C00000"/>
                 </a:solidFill>
               </a:rPr>
-              <a:t>5   </a:t>
-            </a:r>
-            <a:r>
-              <a:rPr lang="en-US" b="1"/>
-              <a:t>What is a convenience sample?</a:t>
-            </a:r>
-            <a:endParaRPr lang="en-US" b="1" dirty="0"/>
+              <a:t>5</a:t>
+            </a:r>
+            <a:r>
+              <a:rPr lang="en-US" b="1">
+                <a:solidFill>
+                  <a:srgbClr val="000000"/>
+                </a:solidFill>
+              </a:rPr>
+              <a:t>   What is a convenience sample?</a:t>
+            </a:r>
+            <a:endParaRPr lang="en-US" b="1" dirty="0">
+              <a:solidFill>
+                <a:srgbClr val="000000"/>
+              </a:solidFill>
+            </a:endParaRPr>
           </a:p>
         </p:txBody>
       </p:sp>
@@ -20956,13 +20327,21 @@
                   <a:srgbClr val="C00000"/>
                 </a:solidFill>
               </a:rPr>
-              <a:t>6   </a:t>
-            </a:r>
-            <a:r>
-              <a:rPr lang="en-US" b="1"/>
-              <a:t>What is sampling with replacement?</a:t>
-            </a:r>
-            <a:endParaRPr lang="en-US" b="1" dirty="0"/>
+              <a:t>6</a:t>
+            </a:r>
+            <a:r>
+              <a:rPr lang="en-US" b="1">
+                <a:solidFill>
+                  <a:srgbClr val="000000"/>
+                </a:solidFill>
+              </a:rPr>
+              <a:t>   What is sampling with replacement?</a:t>
+            </a:r>
+            <a:endParaRPr lang="en-US" b="1" dirty="0">
+              <a:solidFill>
+                <a:srgbClr val="000000"/>
+              </a:solidFill>
+            </a:endParaRPr>
           </a:p>
         </p:txBody>
       </p:sp>
@@ -21047,13 +20426,21 @@
                   <a:srgbClr val="C00000"/>
                 </a:solidFill>
               </a:rPr>
-              <a:t>7   </a:t>
-            </a:r>
-            <a:r>
-              <a:rPr lang="en-US" b="1"/>
-              <a:t>What is sampling without replacement?</a:t>
-            </a:r>
-            <a:endParaRPr lang="en-US" b="1" dirty="0"/>
+              <a:t>7</a:t>
+            </a:r>
+            <a:r>
+              <a:rPr lang="en-US" b="1">
+                <a:solidFill>
+                  <a:srgbClr val="000000"/>
+                </a:solidFill>
+              </a:rPr>
+              <a:t>   What is sampling without replacement?</a:t>
+            </a:r>
+            <a:endParaRPr lang="en-US" b="1" dirty="0">
+              <a:solidFill>
+                <a:srgbClr val="000000"/>
+              </a:solidFill>
+            </a:endParaRPr>
           </a:p>
         </p:txBody>
       </p:sp>
@@ -21138,13 +20525,21 @@
                   <a:srgbClr val="C00000"/>
                 </a:solidFill>
               </a:rPr>
-              <a:t>8   </a:t>
-            </a:r>
-            <a:r>
-              <a:rPr lang="en-US" b="1"/>
-              <a:t>What is a voluntary response sample?</a:t>
-            </a:r>
-            <a:endParaRPr lang="en-US" b="1" dirty="0"/>
+              <a:t>8</a:t>
+            </a:r>
+            <a:r>
+              <a:rPr lang="en-US" b="1">
+                <a:solidFill>
+                  <a:srgbClr val="000000"/>
+                </a:solidFill>
+              </a:rPr>
+              <a:t>   What is a voluntary response sample?</a:t>
+            </a:r>
+            <a:endParaRPr lang="en-US" b="1" dirty="0">
+              <a:solidFill>
+                <a:srgbClr val="000000"/>
+              </a:solidFill>
+            </a:endParaRPr>
           </a:p>
         </p:txBody>
       </p:sp>
@@ -21640,10 +21035,234 @@
       </p:grpSpPr>
       <p:sp>
         <p:nvSpPr>
+          <p:cNvPr id="16" name="Definition card">
+            <a:extLst>
+              <a:ext uri="{FF2B5EF4-FFF2-40B4-BE49-F238E27FC236}">
+                <a16:creationId xmlns:a16="http://schemas.microsoft.com/office/drawing/2014/main" id="{0986321D-DD51-CC3D-7DD0-2F9B636F6666}"/>
+              </a:ext>
+            </a:extLst>
+          </p:cNvPr>
+          <p:cNvSpPr/>
+          <p:nvPr/>
+        </p:nvSpPr>
+        <p:spPr>
+          <a:xfrm>
+            <a:off x="762000" y="4711700"/>
+            <a:ext cx="10668000" cy="828040"/>
+          </a:xfrm>
+          <a:prstGeom prst="roundRect">
+            <a:avLst>
+              <a:gd name="adj" fmla="val 12000"/>
+            </a:avLst>
+          </a:prstGeom>
+          <a:solidFill>
+            <a:srgbClr val="F2F6FC"/>
+          </a:solidFill>
+          <a:ln w="15875">
+            <a:solidFill>
+              <a:srgbClr val="4472C4"/>
+            </a:solidFill>
+          </a:ln>
+        </p:spPr>
+        <p:style>
+          <a:lnRef idx="2">
+            <a:schemeClr val="accent1">
+              <a:shade val="15000"/>
+            </a:schemeClr>
+          </a:lnRef>
+          <a:fillRef idx="1">
+            <a:schemeClr val="accent1"/>
+          </a:fillRef>
+          <a:effectRef idx="0">
+            <a:schemeClr val="accent1"/>
+          </a:effectRef>
+          <a:fontRef idx="minor">
+            <a:schemeClr val="lt1"/>
+          </a:fontRef>
+        </p:style>
+        <p:txBody>
+          <a:bodyPr rtlCol="0" anchor="ctr"/>
+          <a:lstStyle/>
+          <a:p>
+            <a:pPr algn="ctr"/>
+            <a:endParaRPr lang="en-US"/>
+          </a:p>
+        </p:txBody>
+      </p:sp>
+      <p:sp>
+        <p:nvSpPr>
+          <p:cNvPr id="13" name="Definition card">
+            <a:extLst>
+              <a:ext uri="{FF2B5EF4-FFF2-40B4-BE49-F238E27FC236}">
+                <a16:creationId xmlns:a16="http://schemas.microsoft.com/office/drawing/2014/main" id="{3240A742-6545-D275-21CB-933A9D3A95BD}"/>
+              </a:ext>
+            </a:extLst>
+          </p:cNvPr>
+          <p:cNvSpPr/>
+          <p:nvPr/>
+        </p:nvSpPr>
+        <p:spPr>
+          <a:xfrm>
+            <a:off x="762000" y="4025900"/>
+            <a:ext cx="10668000" cy="558800"/>
+          </a:xfrm>
+          <a:prstGeom prst="roundRect">
+            <a:avLst>
+              <a:gd name="adj" fmla="val 12000"/>
+            </a:avLst>
+          </a:prstGeom>
+          <a:solidFill>
+            <a:srgbClr val="F2F6FC"/>
+          </a:solidFill>
+          <a:ln w="15875">
+            <a:solidFill>
+              <a:srgbClr val="4472C4"/>
+            </a:solidFill>
+          </a:ln>
+        </p:spPr>
+        <p:style>
+          <a:lnRef idx="2">
+            <a:schemeClr val="accent1">
+              <a:shade val="15000"/>
+            </a:schemeClr>
+          </a:lnRef>
+          <a:fillRef idx="1">
+            <a:schemeClr val="accent1"/>
+          </a:fillRef>
+          <a:effectRef idx="0">
+            <a:schemeClr val="accent1"/>
+          </a:effectRef>
+          <a:fontRef idx="minor">
+            <a:schemeClr val="lt1"/>
+          </a:fontRef>
+        </p:style>
+        <p:txBody>
+          <a:bodyPr rtlCol="0" anchor="ctr"/>
+          <a:lstStyle/>
+          <a:p>
+            <a:pPr algn="ctr"/>
+            <a:endParaRPr lang="en-US"/>
+          </a:p>
+        </p:txBody>
+      </p:sp>
+      <p:sp>
+        <p:nvSpPr>
+          <p:cNvPr id="10" name="Definition card">
+            <a:extLst>
+              <a:ext uri="{FF2B5EF4-FFF2-40B4-BE49-F238E27FC236}">
+                <a16:creationId xmlns:a16="http://schemas.microsoft.com/office/drawing/2014/main" id="{748393A2-618F-1098-18D2-B69CA52BD216}"/>
+              </a:ext>
+            </a:extLst>
+          </p:cNvPr>
+          <p:cNvSpPr/>
+          <p:nvPr/>
+        </p:nvSpPr>
+        <p:spPr>
+          <a:xfrm>
+            <a:off x="762000" y="2796540"/>
+            <a:ext cx="10668000" cy="1102360"/>
+          </a:xfrm>
+          <a:prstGeom prst="roundRect">
+            <a:avLst>
+              <a:gd name="adj" fmla="val 12000"/>
+            </a:avLst>
+          </a:prstGeom>
+          <a:solidFill>
+            <a:srgbClr val="F2F6FC"/>
+          </a:solidFill>
+          <a:ln w="15875">
+            <a:solidFill>
+              <a:srgbClr val="4472C4"/>
+            </a:solidFill>
+          </a:ln>
+        </p:spPr>
+        <p:style>
+          <a:lnRef idx="2">
+            <a:schemeClr val="accent1">
+              <a:shade val="15000"/>
+            </a:schemeClr>
+          </a:lnRef>
+          <a:fillRef idx="1">
+            <a:schemeClr val="accent1"/>
+          </a:fillRef>
+          <a:effectRef idx="0">
+            <a:schemeClr val="accent1"/>
+          </a:effectRef>
+          <a:fontRef idx="minor">
+            <a:schemeClr val="lt1"/>
+          </a:fontRef>
+        </p:style>
+        <p:txBody>
+          <a:bodyPr rtlCol="0" anchor="ctr"/>
+          <a:lstStyle/>
+          <a:p>
+            <a:pPr algn="ctr"/>
+            <a:endParaRPr lang="en-US"/>
+          </a:p>
+        </p:txBody>
+      </p:sp>
+      <p:sp>
+        <p:nvSpPr>
+          <p:cNvPr id="7" name="Definition card">
+            <a:extLst>
+              <a:ext uri="{FF2B5EF4-FFF2-40B4-BE49-F238E27FC236}">
+                <a16:creationId xmlns:a16="http://schemas.microsoft.com/office/drawing/2014/main" id="{AD35FDEF-A6C9-D92F-1656-6ED66949569F}"/>
+              </a:ext>
+            </a:extLst>
+          </p:cNvPr>
+          <p:cNvSpPr/>
+          <p:nvPr/>
+        </p:nvSpPr>
+        <p:spPr>
+          <a:xfrm>
+            <a:off x="762000" y="1841500"/>
+            <a:ext cx="10668000" cy="828040"/>
+          </a:xfrm>
+          <a:prstGeom prst="roundRect">
+            <a:avLst>
+              <a:gd name="adj" fmla="val 12000"/>
+            </a:avLst>
+          </a:prstGeom>
+          <a:solidFill>
+            <a:srgbClr val="F2F6FC"/>
+          </a:solidFill>
+          <a:ln w="15875">
+            <a:solidFill>
+              <a:srgbClr val="4472C4"/>
+            </a:solidFill>
+          </a:ln>
+        </p:spPr>
+        <p:style>
+          <a:lnRef idx="2">
+            <a:schemeClr val="accent1">
+              <a:shade val="15000"/>
+            </a:schemeClr>
+          </a:lnRef>
+          <a:fillRef idx="1">
+            <a:schemeClr val="accent1"/>
+          </a:fillRef>
+          <a:effectRef idx="0">
+            <a:schemeClr val="accent1"/>
+          </a:effectRef>
+          <a:fontRef idx="minor">
+            <a:schemeClr val="lt1"/>
+          </a:fontRef>
+        </p:style>
+        <p:txBody>
+          <a:bodyPr rtlCol="0" anchor="ctr"/>
+          <a:lstStyle/>
+          <a:p>
+            <a:pPr algn="ctr"/>
+            <a:endParaRPr lang="en-US"/>
+          </a:p>
+        </p:txBody>
+      </p:sp>
+      <p:sp>
+        <p:nvSpPr>
           <p:cNvPr id="2" name="Title 1">
             <a:extLst>
               <a:ext uri="{FF2B5EF4-FFF2-40B4-BE49-F238E27FC236}">
-                <a16:creationId xmlns:a16="http://schemas.microsoft.com/office/drawing/2014/main" id="{6A615B16-617F-F91A-E768-60685CC2F671}"/>
+                <a16:creationId xmlns:a16="http://schemas.microsoft.com/office/drawing/2014/main" id="{B9AA9945-18E2-A815-CD09-6E30DA8CC8DD}"/>
               </a:ext>
             </a:extLst>
           </p:cNvPr>
@@ -21667,7 +21286,7 @@
                   <a:srgbClr val="1F3864"/>
                 </a:solidFill>
               </a:rPr>
-              <a:t>The 2020 Pfizer-BioNTech vaccine trial</a:t>
+              <a:t>Placebos and blinding</a:t>
             </a:r>
           </a:p>
         </p:txBody>
@@ -21677,7 +21296,7 @@
           <p:cNvPr id="4" name="Slide Number Placeholder 3">
             <a:extLst>
               <a:ext uri="{FF2B5EF4-FFF2-40B4-BE49-F238E27FC236}">
-                <a16:creationId xmlns:a16="http://schemas.microsoft.com/office/drawing/2014/main" id="{9573F39A-FB57-1204-AB85-BFED908622A3}"/>
+                <a16:creationId xmlns:a16="http://schemas.microsoft.com/office/drawing/2014/main" id="{7CD39166-75E8-99F6-EF42-55FFE5636461}"/>
               </a:ext>
             </a:extLst>
           </p:cNvPr>
@@ -21696,6 +21315,951 @@
             <a:fld id="{A80A81DD-F10A-4B1C-963A-0ABBB4865886}" type="slidenum">
               <a:rPr lang="en-US" sz="1600" smtClean="0"/>
               <a:t>30</a:t>
+            </a:fld>
+            <a:endParaRPr lang="en-US" sz="1600"/>
+          </a:p>
+        </p:txBody>
+      </p:sp>
+      <p:sp>
+        <p:nvSpPr>
+          <p:cNvPr id="5" name="TextBox 4">
+            <a:extLst>
+              <a:ext uri="{FF2B5EF4-FFF2-40B4-BE49-F238E27FC236}">
+                <a16:creationId xmlns:a16="http://schemas.microsoft.com/office/drawing/2014/main" id="{1F914461-1C87-49C0-A9DA-02B03CA129A0}"/>
+              </a:ext>
+            </a:extLst>
+          </p:cNvPr>
+          <p:cNvSpPr txBox="1"/>
+          <p:nvPr/>
+        </p:nvSpPr>
+        <p:spPr>
+          <a:xfrm>
+            <a:off x="914400" y="1943100"/>
+            <a:ext cx="3022600" cy="381000"/>
+          </a:xfrm>
+          <a:prstGeom prst="rect">
+            <a:avLst/>
+          </a:prstGeom>
+          <a:noFill/>
+        </p:spPr>
+        <p:txBody>
+          <a:bodyPr vert="horz" wrap="square" rtlCol="0">
+            <a:noAutofit/>
+          </a:bodyPr>
+          <a:lstStyle/>
+          <a:p>
+            <a:r>
+              <a:rPr lang="en-US" b="1">
+                <a:solidFill>
+                  <a:srgbClr val="C00000"/>
+                </a:solidFill>
+              </a:rPr>
+              <a:t>placebo</a:t>
+            </a:r>
+          </a:p>
+        </p:txBody>
+      </p:sp>
+      <p:sp>
+        <p:nvSpPr>
+          <p:cNvPr id="6" name="TextBox 5">
+            <a:extLst>
+              <a:ext uri="{FF2B5EF4-FFF2-40B4-BE49-F238E27FC236}">
+                <a16:creationId xmlns:a16="http://schemas.microsoft.com/office/drawing/2014/main" id="{9E0A0659-C886-4CB8-B25B-5E2B59B4990B}"/>
+              </a:ext>
+            </a:extLst>
+          </p:cNvPr>
+          <p:cNvSpPr txBox="1"/>
+          <p:nvPr/>
+        </p:nvSpPr>
+        <p:spPr>
+          <a:xfrm>
+            <a:off x="4013200" y="1943099"/>
+            <a:ext cx="7264400" cy="650240"/>
+          </a:xfrm>
+          <a:prstGeom prst="rect">
+            <a:avLst/>
+          </a:prstGeom>
+          <a:noFill/>
+        </p:spPr>
+        <p:txBody>
+          <a:bodyPr vert="horz" wrap="square" rtlCol="0">
+            <a:noAutofit/>
+          </a:bodyPr>
+          <a:lstStyle/>
+          <a:p>
+            <a:r>
+              <a:rPr lang="en-US">
+                <a:solidFill>
+                  <a:srgbClr val="000000"/>
+                </a:solidFill>
+              </a:rPr>
+              <a:t>an inactive treatment that looks exactly like the real one</a:t>
+            </a:r>
+          </a:p>
+          <a:p>
+            <a:r>
+              <a:rPr lang="en-US" i="1">
+                <a:solidFill>
+                  <a:srgbClr val="595959"/>
+                </a:solidFill>
+              </a:rPr>
+              <a:t>a sugar pill, or a saline injection</a:t>
+            </a:r>
+          </a:p>
+        </p:txBody>
+      </p:sp>
+      <p:sp>
+        <p:nvSpPr>
+          <p:cNvPr id="8" name="TextBox 7">
+            <a:extLst>
+              <a:ext uri="{FF2B5EF4-FFF2-40B4-BE49-F238E27FC236}">
+                <a16:creationId xmlns:a16="http://schemas.microsoft.com/office/drawing/2014/main" id="{E93E6C15-B051-DA6B-FC50-75C45B601985}"/>
+              </a:ext>
+            </a:extLst>
+          </p:cNvPr>
+          <p:cNvSpPr txBox="1"/>
+          <p:nvPr/>
+        </p:nvSpPr>
+        <p:spPr>
+          <a:xfrm>
+            <a:off x="914400" y="2898140"/>
+            <a:ext cx="3022600" cy="381000"/>
+          </a:xfrm>
+          <a:prstGeom prst="rect">
+            <a:avLst/>
+          </a:prstGeom>
+          <a:noFill/>
+        </p:spPr>
+        <p:txBody>
+          <a:bodyPr vert="horz" wrap="square" rtlCol="0">
+            <a:noAutofit/>
+          </a:bodyPr>
+          <a:lstStyle/>
+          <a:p>
+            <a:r>
+              <a:rPr lang="en-US" b="1">
+                <a:solidFill>
+                  <a:srgbClr val="C00000"/>
+                </a:solidFill>
+              </a:rPr>
+              <a:t>placebo effect</a:t>
+            </a:r>
+          </a:p>
+        </p:txBody>
+      </p:sp>
+      <p:sp>
+        <p:nvSpPr>
+          <p:cNvPr id="9" name="TextBox 8">
+            <a:extLst>
+              <a:ext uri="{FF2B5EF4-FFF2-40B4-BE49-F238E27FC236}">
+                <a16:creationId xmlns:a16="http://schemas.microsoft.com/office/drawing/2014/main" id="{8311B553-B0DF-9622-DF06-AFFDA7ADF708}"/>
+              </a:ext>
+            </a:extLst>
+          </p:cNvPr>
+          <p:cNvSpPr txBox="1"/>
+          <p:nvPr/>
+        </p:nvSpPr>
+        <p:spPr>
+          <a:xfrm>
+            <a:off x="4013200" y="2898140"/>
+            <a:ext cx="7264400" cy="924560"/>
+          </a:xfrm>
+          <a:prstGeom prst="rect">
+            <a:avLst/>
+          </a:prstGeom>
+          <a:noFill/>
+        </p:spPr>
+        <p:txBody>
+          <a:bodyPr vert="horz" wrap="square" rtlCol="0">
+            <a:noAutofit/>
+          </a:bodyPr>
+          <a:lstStyle/>
+          <a:p>
+            <a:r>
+              <a:rPr lang="en-US">
+                <a:solidFill>
+                  <a:srgbClr val="000000"/>
+                </a:solidFill>
+              </a:rPr>
+              <a:t>people often improve simply because they believe they are being treated</a:t>
+            </a:r>
+          </a:p>
+          <a:p>
+            <a:r>
+              <a:rPr lang="en-US" i="1">
+                <a:solidFill>
+                  <a:srgbClr val="595959"/>
+                </a:solidFill>
+              </a:rPr>
+              <a:t>in one study, believing you had taken a performance drug worked almost as well as the drug itself</a:t>
+            </a:r>
+          </a:p>
+        </p:txBody>
+      </p:sp>
+      <p:sp>
+        <p:nvSpPr>
+          <p:cNvPr id="11" name="TextBox 10">
+            <a:extLst>
+              <a:ext uri="{FF2B5EF4-FFF2-40B4-BE49-F238E27FC236}">
+                <a16:creationId xmlns:a16="http://schemas.microsoft.com/office/drawing/2014/main" id="{BD588549-1922-B620-2B4E-9464BCE53BB2}"/>
+              </a:ext>
+            </a:extLst>
+          </p:cNvPr>
+          <p:cNvSpPr txBox="1"/>
+          <p:nvPr/>
+        </p:nvSpPr>
+        <p:spPr>
+          <a:xfrm>
+            <a:off x="914400" y="4127500"/>
+            <a:ext cx="3022600" cy="381000"/>
+          </a:xfrm>
+          <a:prstGeom prst="rect">
+            <a:avLst/>
+          </a:prstGeom>
+          <a:noFill/>
+        </p:spPr>
+        <p:txBody>
+          <a:bodyPr vert="horz" wrap="square" rtlCol="0">
+            <a:noAutofit/>
+          </a:bodyPr>
+          <a:lstStyle/>
+          <a:p>
+            <a:r>
+              <a:rPr lang="en-US" b="1">
+                <a:solidFill>
+                  <a:srgbClr val="C00000"/>
+                </a:solidFill>
+              </a:rPr>
+              <a:t>blinding</a:t>
+            </a:r>
+          </a:p>
+        </p:txBody>
+      </p:sp>
+      <p:sp>
+        <p:nvSpPr>
+          <p:cNvPr id="12" name="TextBox 11">
+            <a:extLst>
+              <a:ext uri="{FF2B5EF4-FFF2-40B4-BE49-F238E27FC236}">
+                <a16:creationId xmlns:a16="http://schemas.microsoft.com/office/drawing/2014/main" id="{6D5D28C7-3333-6E48-704B-CF3132518528}"/>
+              </a:ext>
+            </a:extLst>
+          </p:cNvPr>
+          <p:cNvSpPr txBox="1"/>
+          <p:nvPr/>
+        </p:nvSpPr>
+        <p:spPr>
+          <a:xfrm>
+            <a:off x="4013200" y="4127500"/>
+            <a:ext cx="7264400" cy="381000"/>
+          </a:xfrm>
+          <a:prstGeom prst="rect">
+            <a:avLst/>
+          </a:prstGeom>
+          <a:noFill/>
+        </p:spPr>
+        <p:txBody>
+          <a:bodyPr vert="horz" wrap="square" rtlCol="0">
+            <a:noAutofit/>
+          </a:bodyPr>
+          <a:lstStyle/>
+          <a:p>
+            <a:r>
+              <a:rPr lang="en-US">
+                <a:solidFill>
+                  <a:srgbClr val="000000"/>
+                </a:solidFill>
+              </a:rPr>
+              <a:t>the subjects do not know which treatment they received</a:t>
+            </a:r>
+          </a:p>
+        </p:txBody>
+      </p:sp>
+      <p:sp>
+        <p:nvSpPr>
+          <p:cNvPr id="14" name="TextBox 13">
+            <a:extLst>
+              <a:ext uri="{FF2B5EF4-FFF2-40B4-BE49-F238E27FC236}">
+                <a16:creationId xmlns:a16="http://schemas.microsoft.com/office/drawing/2014/main" id="{C5CD5F34-944C-50F9-7B04-0A433180EADC}"/>
+              </a:ext>
+            </a:extLst>
+          </p:cNvPr>
+          <p:cNvSpPr txBox="1"/>
+          <p:nvPr/>
+        </p:nvSpPr>
+        <p:spPr>
+          <a:xfrm>
+            <a:off x="914400" y="4813300"/>
+            <a:ext cx="3022600" cy="381000"/>
+          </a:xfrm>
+          <a:prstGeom prst="rect">
+            <a:avLst/>
+          </a:prstGeom>
+          <a:noFill/>
+        </p:spPr>
+        <p:txBody>
+          <a:bodyPr vert="horz" wrap="square" rtlCol="0">
+            <a:noAutofit/>
+          </a:bodyPr>
+          <a:lstStyle/>
+          <a:p>
+            <a:r>
+              <a:rPr lang="en-US" b="1">
+                <a:solidFill>
+                  <a:srgbClr val="C00000"/>
+                </a:solidFill>
+              </a:rPr>
+              <a:t>double-blind</a:t>
+            </a:r>
+          </a:p>
+        </p:txBody>
+      </p:sp>
+      <p:sp>
+        <p:nvSpPr>
+          <p:cNvPr id="15" name="TextBox 14">
+            <a:extLst>
+              <a:ext uri="{FF2B5EF4-FFF2-40B4-BE49-F238E27FC236}">
+                <a16:creationId xmlns:a16="http://schemas.microsoft.com/office/drawing/2014/main" id="{75F50005-2E1E-E3B6-F676-29A98A6D4792}"/>
+              </a:ext>
+            </a:extLst>
+          </p:cNvPr>
+          <p:cNvSpPr txBox="1"/>
+          <p:nvPr/>
+        </p:nvSpPr>
+        <p:spPr>
+          <a:xfrm>
+            <a:off x="4013200" y="4813299"/>
+            <a:ext cx="7264400" cy="650240"/>
+          </a:xfrm>
+          <a:prstGeom prst="rect">
+            <a:avLst/>
+          </a:prstGeom>
+          <a:noFill/>
+        </p:spPr>
+        <p:txBody>
+          <a:bodyPr vert="horz" wrap="square" rtlCol="0">
+            <a:noAutofit/>
+          </a:bodyPr>
+          <a:lstStyle/>
+          <a:p>
+            <a:r>
+              <a:rPr lang="en-US">
+                <a:solidFill>
+                  <a:srgbClr val="000000"/>
+                </a:solidFill>
+              </a:rPr>
+              <a:t>neither the subjects nor the researchers working with them know who received what</a:t>
+            </a:r>
+          </a:p>
+        </p:txBody>
+      </p:sp>
+      <p:sp>
+        <p:nvSpPr>
+          <p:cNvPr id="3" name="Title rule">
+            <a:extLst>
+              <a:ext uri="{FF2B5EF4-FFF2-40B4-BE49-F238E27FC236}">
+                <a16:creationId xmlns:a16="http://schemas.microsoft.com/office/drawing/2014/main" id="{E11A2D97-48DE-89D2-6522-EBF2B2D53551}"/>
+              </a:ext>
+            </a:extLst>
+          </p:cNvPr>
+          <p:cNvSpPr/>
+          <p:nvPr/>
+        </p:nvSpPr>
+        <p:spPr>
+          <a:xfrm>
+            <a:off x="838200" y="1600200"/>
+            <a:ext cx="10515600" cy="38100"/>
+          </a:xfrm>
+          <a:prstGeom prst="rect">
+            <a:avLst/>
+          </a:prstGeom>
+          <a:solidFill>
+            <a:srgbClr val="4472C4"/>
+          </a:solidFill>
+          <a:ln w="12700" cap="flat" cmpd="sng" algn="ctr">
+            <a:noFill/>
+            <a:prstDash val="solid"/>
+            <a:miter lim="800000"/>
+          </a:ln>
+          <a:effectLst/>
+          <a:extLst>
+            <a:ext uri="{91240B29-F687-4F45-9708-019B960494DF}">
+              <a14:hiddenLine xmlns:a14="http://schemas.microsoft.com/office/drawing/2010/main" w="12700" cap="flat" cmpd="sng" algn="ctr">
+                <a:solidFill>
+                  <a:schemeClr val="accent1">
+                    <a:shade val="15000"/>
+                  </a:schemeClr>
+                </a:solidFill>
+                <a:prstDash val="solid"/>
+                <a:miter lim="800000"/>
+              </a14:hiddenLine>
+            </a:ext>
+          </a:extLst>
+        </p:spPr>
+        <p:style>
+          <a:lnRef idx="2">
+            <a:schemeClr val="accent1">
+              <a:shade val="15000"/>
+            </a:schemeClr>
+          </a:lnRef>
+          <a:fillRef idx="1">
+            <a:schemeClr val="accent1"/>
+          </a:fillRef>
+          <a:effectRef idx="0">
+            <a:schemeClr val="accent1"/>
+          </a:effectRef>
+          <a:fontRef idx="minor">
+            <a:schemeClr val="lt1"/>
+          </a:fontRef>
+        </p:style>
+        <p:txBody>
+          <a:bodyPr rtlCol="0" anchor="ctr"/>
+          <a:lstStyle/>
+          <a:p>
+            <a:pPr algn="ctr"/>
+            <a:endParaRPr lang="en-US"/>
+          </a:p>
+        </p:txBody>
+      </p:sp>
+    </p:spTree>
+    <p:extLst>
+      <p:ext uri="{BB962C8B-B14F-4D97-AF65-F5344CB8AC3E}">
+        <p14:creationId xmlns:p14="http://schemas.microsoft.com/office/powerpoint/2010/main" val="3972102136"/>
+      </p:ext>
+    </p:extLst>
+  </p:cSld>
+  <p:clrMapOvr>
+    <a:masterClrMapping/>
+  </p:clrMapOvr>
+  <p:timing>
+    <p:tnLst>
+      <p:par>
+        <p:cTn id="1" dur="indefinite" restart="never" nodeType="tmRoot">
+          <p:childTnLst>
+            <p:seq concurrent="1" nextAc="seek">
+              <p:cTn id="2" dur="indefinite" nodeType="mainSeq">
+                <p:childTnLst>
+                  <p:par>
+                    <p:cTn id="3" fill="hold">
+                      <p:stCondLst>
+                        <p:cond delay="indefinite"/>
+                      </p:stCondLst>
+                      <p:childTnLst>
+                        <p:par>
+                          <p:cTn id="4" fill="hold">
+                            <p:stCondLst>
+                              <p:cond delay="0"/>
+                            </p:stCondLst>
+                            <p:childTnLst>
+                              <p:par>
+                                <p:cTn id="5" presetID="34" presetClass="entr" presetSubtype="0" fill="hold" grpId="0" nodeType="clickEffect">
+                                  <p:stCondLst>
+                                    <p:cond delay="0"/>
+                                  </p:stCondLst>
+                                  <p:childTnLst>
+                                    <p:set>
+                                      <p:cBhvr>
+                                        <p:cTn id="6" dur="1" fill="hold">
+                                          <p:stCondLst>
+                                            <p:cond delay="0"/>
+                                          </p:stCondLst>
+                                        </p:cTn>
+                                        <p:tgtEl>
+                                          <p:spTgt spid="6"/>
+                                        </p:tgtEl>
+                                        <p:attrNameLst>
+                                          <p:attrName>style.visibility</p:attrName>
+                                        </p:attrNameLst>
+                                      </p:cBhvr>
+                                      <p:to>
+                                        <p:strVal val="visible"/>
+                                      </p:to>
+                                    </p:set>
+                                    <p:anim from="(-#ppt_w/2)" to="(#ppt_x)" calcmode="lin" valueType="num">
+                                      <p:cBhvr>
+                                        <p:cTn id="7" dur="600" fill="hold">
+                                          <p:stCondLst>
+                                            <p:cond delay="0"/>
+                                          </p:stCondLst>
+                                        </p:cTn>
+                                        <p:tgtEl>
+                                          <p:spTgt spid="6"/>
+                                        </p:tgtEl>
+                                        <p:attrNameLst>
+                                          <p:attrName>ppt_x</p:attrName>
+                                        </p:attrNameLst>
+                                      </p:cBhvr>
+                                    </p:anim>
+                                    <p:anim from="0" to="-1.0" calcmode="lin" valueType="num">
+                                      <p:cBhvr>
+                                        <p:cTn id="8" dur="200" decel="50000" autoRev="1" fill="hold">
+                                          <p:stCondLst>
+                                            <p:cond delay="600"/>
+                                          </p:stCondLst>
+                                        </p:cTn>
+                                        <p:tgtEl>
+                                          <p:spTgt spid="6"/>
+                                        </p:tgtEl>
+                                        <p:attrNameLst>
+                                          <p:attrName>xshear</p:attrName>
+                                        </p:attrNameLst>
+                                      </p:cBhvr>
+                                    </p:anim>
+                                    <p:animScale>
+                                      <p:cBhvr>
+                                        <p:cTn id="9" dur="200" decel="100000" autoRev="1" fill="hold">
+                                          <p:stCondLst>
+                                            <p:cond delay="600"/>
+                                          </p:stCondLst>
+                                        </p:cTn>
+                                        <p:tgtEl>
+                                          <p:spTgt spid="6"/>
+                                        </p:tgtEl>
+                                      </p:cBhvr>
+                                      <p:from x="100000" y="100000"/>
+                                      <p:to x="80000" y="100000"/>
+                                    </p:animScale>
+                                    <p:anim by="(#ppt_h/3+#ppt_w*0.1)" calcmode="lin" valueType="num">
+                                      <p:cBhvr additive="sum">
+                                        <p:cTn id="10" dur="200" decel="100000" autoRev="1" fill="hold">
+                                          <p:stCondLst>
+                                            <p:cond delay="600"/>
+                                          </p:stCondLst>
+                                        </p:cTn>
+                                        <p:tgtEl>
+                                          <p:spTgt spid="6"/>
+                                        </p:tgtEl>
+                                        <p:attrNameLst>
+                                          <p:attrName>ppt_x</p:attrName>
+                                        </p:attrNameLst>
+                                      </p:cBhvr>
+                                    </p:anim>
+                                  </p:childTnLst>
+                                </p:cTn>
+                              </p:par>
+                            </p:childTnLst>
+                          </p:cTn>
+                        </p:par>
+                      </p:childTnLst>
+                    </p:cTn>
+                  </p:par>
+                  <p:par>
+                    <p:cTn id="11" fill="hold">
+                      <p:stCondLst>
+                        <p:cond delay="indefinite"/>
+                      </p:stCondLst>
+                      <p:childTnLst>
+                        <p:par>
+                          <p:cTn id="12" fill="hold">
+                            <p:stCondLst>
+                              <p:cond delay="0"/>
+                            </p:stCondLst>
+                            <p:childTnLst>
+                              <p:par>
+                                <p:cTn id="13" presetID="34" presetClass="entr" presetSubtype="0" fill="hold" grpId="0" nodeType="clickEffect">
+                                  <p:stCondLst>
+                                    <p:cond delay="0"/>
+                                  </p:stCondLst>
+                                  <p:childTnLst>
+                                    <p:set>
+                                      <p:cBhvr>
+                                        <p:cTn id="14" dur="1" fill="hold">
+                                          <p:stCondLst>
+                                            <p:cond delay="0"/>
+                                          </p:stCondLst>
+                                        </p:cTn>
+                                        <p:tgtEl>
+                                          <p:spTgt spid="9"/>
+                                        </p:tgtEl>
+                                        <p:attrNameLst>
+                                          <p:attrName>style.visibility</p:attrName>
+                                        </p:attrNameLst>
+                                      </p:cBhvr>
+                                      <p:to>
+                                        <p:strVal val="visible"/>
+                                      </p:to>
+                                    </p:set>
+                                    <p:anim from="(-#ppt_w/2)" to="(#ppt_x)" calcmode="lin" valueType="num">
+                                      <p:cBhvr>
+                                        <p:cTn id="15" dur="600" fill="hold">
+                                          <p:stCondLst>
+                                            <p:cond delay="0"/>
+                                          </p:stCondLst>
+                                        </p:cTn>
+                                        <p:tgtEl>
+                                          <p:spTgt spid="9"/>
+                                        </p:tgtEl>
+                                        <p:attrNameLst>
+                                          <p:attrName>ppt_x</p:attrName>
+                                        </p:attrNameLst>
+                                      </p:cBhvr>
+                                    </p:anim>
+                                    <p:anim from="0" to="-1.0" calcmode="lin" valueType="num">
+                                      <p:cBhvr>
+                                        <p:cTn id="16" dur="200" decel="50000" autoRev="1" fill="hold">
+                                          <p:stCondLst>
+                                            <p:cond delay="600"/>
+                                          </p:stCondLst>
+                                        </p:cTn>
+                                        <p:tgtEl>
+                                          <p:spTgt spid="9"/>
+                                        </p:tgtEl>
+                                        <p:attrNameLst>
+                                          <p:attrName>xshear</p:attrName>
+                                        </p:attrNameLst>
+                                      </p:cBhvr>
+                                    </p:anim>
+                                    <p:animScale>
+                                      <p:cBhvr>
+                                        <p:cTn id="17" dur="200" decel="100000" autoRev="1" fill="hold">
+                                          <p:stCondLst>
+                                            <p:cond delay="600"/>
+                                          </p:stCondLst>
+                                        </p:cTn>
+                                        <p:tgtEl>
+                                          <p:spTgt spid="9"/>
+                                        </p:tgtEl>
+                                      </p:cBhvr>
+                                      <p:from x="100000" y="100000"/>
+                                      <p:to x="80000" y="100000"/>
+                                    </p:animScale>
+                                    <p:anim by="(#ppt_h/3+#ppt_w*0.1)" calcmode="lin" valueType="num">
+                                      <p:cBhvr additive="sum">
+                                        <p:cTn id="18" dur="200" decel="100000" autoRev="1" fill="hold">
+                                          <p:stCondLst>
+                                            <p:cond delay="600"/>
+                                          </p:stCondLst>
+                                        </p:cTn>
+                                        <p:tgtEl>
+                                          <p:spTgt spid="9"/>
+                                        </p:tgtEl>
+                                        <p:attrNameLst>
+                                          <p:attrName>ppt_x</p:attrName>
+                                        </p:attrNameLst>
+                                      </p:cBhvr>
+                                    </p:anim>
+                                  </p:childTnLst>
+                                </p:cTn>
+                              </p:par>
+                            </p:childTnLst>
+                          </p:cTn>
+                        </p:par>
+                      </p:childTnLst>
+                    </p:cTn>
+                  </p:par>
+                  <p:par>
+                    <p:cTn id="19" fill="hold">
+                      <p:stCondLst>
+                        <p:cond delay="indefinite"/>
+                      </p:stCondLst>
+                      <p:childTnLst>
+                        <p:par>
+                          <p:cTn id="20" fill="hold">
+                            <p:stCondLst>
+                              <p:cond delay="0"/>
+                            </p:stCondLst>
+                            <p:childTnLst>
+                              <p:par>
+                                <p:cTn id="21" presetID="34" presetClass="entr" presetSubtype="0" fill="hold" grpId="0" nodeType="clickEffect">
+                                  <p:stCondLst>
+                                    <p:cond delay="0"/>
+                                  </p:stCondLst>
+                                  <p:childTnLst>
+                                    <p:set>
+                                      <p:cBhvr>
+                                        <p:cTn id="22" dur="1" fill="hold">
+                                          <p:stCondLst>
+                                            <p:cond delay="0"/>
+                                          </p:stCondLst>
+                                        </p:cTn>
+                                        <p:tgtEl>
+                                          <p:spTgt spid="12"/>
+                                        </p:tgtEl>
+                                        <p:attrNameLst>
+                                          <p:attrName>style.visibility</p:attrName>
+                                        </p:attrNameLst>
+                                      </p:cBhvr>
+                                      <p:to>
+                                        <p:strVal val="visible"/>
+                                      </p:to>
+                                    </p:set>
+                                    <p:anim from="(-#ppt_w/2)" to="(#ppt_x)" calcmode="lin" valueType="num">
+                                      <p:cBhvr>
+                                        <p:cTn id="23" dur="600" fill="hold">
+                                          <p:stCondLst>
+                                            <p:cond delay="0"/>
+                                          </p:stCondLst>
+                                        </p:cTn>
+                                        <p:tgtEl>
+                                          <p:spTgt spid="12"/>
+                                        </p:tgtEl>
+                                        <p:attrNameLst>
+                                          <p:attrName>ppt_x</p:attrName>
+                                        </p:attrNameLst>
+                                      </p:cBhvr>
+                                    </p:anim>
+                                    <p:anim from="0" to="-1.0" calcmode="lin" valueType="num">
+                                      <p:cBhvr>
+                                        <p:cTn id="24" dur="200" decel="50000" autoRev="1" fill="hold">
+                                          <p:stCondLst>
+                                            <p:cond delay="600"/>
+                                          </p:stCondLst>
+                                        </p:cTn>
+                                        <p:tgtEl>
+                                          <p:spTgt spid="12"/>
+                                        </p:tgtEl>
+                                        <p:attrNameLst>
+                                          <p:attrName>xshear</p:attrName>
+                                        </p:attrNameLst>
+                                      </p:cBhvr>
+                                    </p:anim>
+                                    <p:animScale>
+                                      <p:cBhvr>
+                                        <p:cTn id="25" dur="200" decel="100000" autoRev="1" fill="hold">
+                                          <p:stCondLst>
+                                            <p:cond delay="600"/>
+                                          </p:stCondLst>
+                                        </p:cTn>
+                                        <p:tgtEl>
+                                          <p:spTgt spid="12"/>
+                                        </p:tgtEl>
+                                      </p:cBhvr>
+                                      <p:from x="100000" y="100000"/>
+                                      <p:to x="80000" y="100000"/>
+                                    </p:animScale>
+                                    <p:anim by="(#ppt_h/3+#ppt_w*0.1)" calcmode="lin" valueType="num">
+                                      <p:cBhvr additive="sum">
+                                        <p:cTn id="26" dur="200" decel="100000" autoRev="1" fill="hold">
+                                          <p:stCondLst>
+                                            <p:cond delay="600"/>
+                                          </p:stCondLst>
+                                        </p:cTn>
+                                        <p:tgtEl>
+                                          <p:spTgt spid="12"/>
+                                        </p:tgtEl>
+                                        <p:attrNameLst>
+                                          <p:attrName>ppt_x</p:attrName>
+                                        </p:attrNameLst>
+                                      </p:cBhvr>
+                                    </p:anim>
+                                  </p:childTnLst>
+                                </p:cTn>
+                              </p:par>
+                            </p:childTnLst>
+                          </p:cTn>
+                        </p:par>
+                      </p:childTnLst>
+                    </p:cTn>
+                  </p:par>
+                  <p:par>
+                    <p:cTn id="27" fill="hold">
+                      <p:stCondLst>
+                        <p:cond delay="indefinite"/>
+                      </p:stCondLst>
+                      <p:childTnLst>
+                        <p:par>
+                          <p:cTn id="28" fill="hold">
+                            <p:stCondLst>
+                              <p:cond delay="0"/>
+                            </p:stCondLst>
+                            <p:childTnLst>
+                              <p:par>
+                                <p:cTn id="29" presetID="34" presetClass="entr" presetSubtype="0" fill="hold" grpId="0" nodeType="clickEffect">
+                                  <p:stCondLst>
+                                    <p:cond delay="0"/>
+                                  </p:stCondLst>
+                                  <p:childTnLst>
+                                    <p:set>
+                                      <p:cBhvr>
+                                        <p:cTn id="30" dur="1" fill="hold">
+                                          <p:stCondLst>
+                                            <p:cond delay="0"/>
+                                          </p:stCondLst>
+                                        </p:cTn>
+                                        <p:tgtEl>
+                                          <p:spTgt spid="15"/>
+                                        </p:tgtEl>
+                                        <p:attrNameLst>
+                                          <p:attrName>style.visibility</p:attrName>
+                                        </p:attrNameLst>
+                                      </p:cBhvr>
+                                      <p:to>
+                                        <p:strVal val="visible"/>
+                                      </p:to>
+                                    </p:set>
+                                    <p:anim from="(-#ppt_w/2)" to="(#ppt_x)" calcmode="lin" valueType="num">
+                                      <p:cBhvr>
+                                        <p:cTn id="31" dur="600" fill="hold">
+                                          <p:stCondLst>
+                                            <p:cond delay="0"/>
+                                          </p:stCondLst>
+                                        </p:cTn>
+                                        <p:tgtEl>
+                                          <p:spTgt spid="15"/>
+                                        </p:tgtEl>
+                                        <p:attrNameLst>
+                                          <p:attrName>ppt_x</p:attrName>
+                                        </p:attrNameLst>
+                                      </p:cBhvr>
+                                    </p:anim>
+                                    <p:anim from="0" to="-1.0" calcmode="lin" valueType="num">
+                                      <p:cBhvr>
+                                        <p:cTn id="32" dur="200" decel="50000" autoRev="1" fill="hold">
+                                          <p:stCondLst>
+                                            <p:cond delay="600"/>
+                                          </p:stCondLst>
+                                        </p:cTn>
+                                        <p:tgtEl>
+                                          <p:spTgt spid="15"/>
+                                        </p:tgtEl>
+                                        <p:attrNameLst>
+                                          <p:attrName>xshear</p:attrName>
+                                        </p:attrNameLst>
+                                      </p:cBhvr>
+                                    </p:anim>
+                                    <p:animScale>
+                                      <p:cBhvr>
+                                        <p:cTn id="33" dur="200" decel="100000" autoRev="1" fill="hold">
+                                          <p:stCondLst>
+                                            <p:cond delay="600"/>
+                                          </p:stCondLst>
+                                        </p:cTn>
+                                        <p:tgtEl>
+                                          <p:spTgt spid="15"/>
+                                        </p:tgtEl>
+                                      </p:cBhvr>
+                                      <p:from x="100000" y="100000"/>
+                                      <p:to x="80000" y="100000"/>
+                                    </p:animScale>
+                                    <p:anim by="(#ppt_h/3+#ppt_w*0.1)" calcmode="lin" valueType="num">
+                                      <p:cBhvr additive="sum">
+                                        <p:cTn id="34" dur="200" decel="100000" autoRev="1" fill="hold">
+                                          <p:stCondLst>
+                                            <p:cond delay="600"/>
+                                          </p:stCondLst>
+                                        </p:cTn>
+                                        <p:tgtEl>
+                                          <p:spTgt spid="15"/>
+                                        </p:tgtEl>
+                                        <p:attrNameLst>
+                                          <p:attrName>ppt_x</p:attrName>
+                                        </p:attrNameLst>
+                                      </p:cBhvr>
+                                    </p:anim>
+                                  </p:childTnLst>
+                                </p:cTn>
+                              </p:par>
+                            </p:childTnLst>
+                          </p:cTn>
+                        </p:par>
+                      </p:childTnLst>
+                    </p:cTn>
+                  </p:par>
+                </p:childTnLst>
+              </p:cTn>
+              <p:prevCondLst>
+                <p:cond evt="onPrev" delay="0">
+                  <p:tgtEl>
+                    <p:sldTgt/>
+                  </p:tgtEl>
+                </p:cond>
+              </p:prevCondLst>
+              <p:nextCondLst>
+                <p:cond evt="onNext" delay="0">
+                  <p:tgtEl>
+                    <p:sldTgt/>
+                  </p:tgtEl>
+                </p:cond>
+              </p:nextCondLst>
+            </p:seq>
+          </p:childTnLst>
+        </p:cTn>
+      </p:par>
+    </p:tnLst>
+    <p:bldLst>
+      <p:bldP spid="6" grpId="0"/>
+      <p:bldP spid="9" grpId="0"/>
+      <p:bldP spid="12" grpId="0"/>
+      <p:bldP spid="15" grpId="0"/>
+    </p:bldLst>
+  </p:timing>
+</p:sld>
+</file>
+
+<file path=ppt/slides/slide31.xml><?xml version="1.0" encoding="utf-8"?>
+<p:sld xmlns:a="http://schemas.openxmlformats.org/drawingml/2006/main" xmlns:r="http://schemas.openxmlformats.org/officeDocument/2006/relationships" xmlns:p="http://schemas.openxmlformats.org/presentationml/2006/main">
+  <p:cSld>
+    <p:spTree>
+      <p:nvGrpSpPr>
+        <p:cNvPr id="1" name=""/>
+        <p:cNvGrpSpPr/>
+        <p:nvPr/>
+      </p:nvGrpSpPr>
+      <p:grpSpPr>
+        <a:xfrm>
+          <a:off x="0" y="0"/>
+          <a:ext cx="0" cy="0"/>
+          <a:chOff x="0" y="0"/>
+          <a:chExt cx="0" cy="0"/>
+        </a:xfrm>
+      </p:grpSpPr>
+      <p:sp>
+        <p:nvSpPr>
+          <p:cNvPr id="2" name="Title 1">
+            <a:extLst>
+              <a:ext uri="{FF2B5EF4-FFF2-40B4-BE49-F238E27FC236}">
+                <a16:creationId xmlns:a16="http://schemas.microsoft.com/office/drawing/2014/main" id="{6A615B16-617F-F91A-E768-60685CC2F671}"/>
+              </a:ext>
+            </a:extLst>
+          </p:cNvPr>
+          <p:cNvSpPr>
+            <a:spLocks noGrp="1"/>
+          </p:cNvSpPr>
+          <p:nvPr>
+            <p:ph type="title"/>
+          </p:nvPr>
+        </p:nvSpPr>
+        <p:spPr/>
+        <p:txBody>
+          <a:bodyPr>
+            <a:noAutofit/>
+          </a:bodyPr>
+          <a:lstStyle/>
+          <a:p>
+            <a:r>
+              <a:rPr lang="en-US">
+                <a:solidFill>
+                  <a:srgbClr val="1F3864"/>
+                </a:solidFill>
+              </a:rPr>
+              <a:t>The 2020 Pfizer-BioNTech vaccine trial</a:t>
+            </a:r>
+          </a:p>
+        </p:txBody>
+      </p:sp>
+      <p:sp>
+        <p:nvSpPr>
+          <p:cNvPr id="4" name="Slide Number Placeholder 3">
+            <a:extLst>
+              <a:ext uri="{FF2B5EF4-FFF2-40B4-BE49-F238E27FC236}">
+                <a16:creationId xmlns:a16="http://schemas.microsoft.com/office/drawing/2014/main" id="{9573F39A-FB57-1204-AB85-BFED908622A3}"/>
+              </a:ext>
+            </a:extLst>
+          </p:cNvPr>
+          <p:cNvSpPr>
+            <a:spLocks noGrp="1"/>
+          </p:cNvSpPr>
+          <p:nvPr>
+            <p:ph type="sldNum" sz="quarter" idx="12"/>
+          </p:nvPr>
+        </p:nvSpPr>
+        <p:spPr/>
+        <p:txBody>
+          <a:bodyPr/>
+          <a:lstStyle/>
+          <a:p>
+            <a:fld id="{A80A81DD-F10A-4B1C-963A-0ABBB4865886}" type="slidenum">
+              <a:rPr lang="en-US" sz="1600" smtClean="0"/>
+              <a:t>31</a:t>
             </a:fld>
             <a:endParaRPr lang="en-US" sz="1600"/>
           </a:p>
@@ -22474,7 +23038,7 @@
 </p:sld>
 </file>
 
-<file path=ppt/slides/slide31.xml><?xml version="1.0" encoding="utf-8"?>
+<file path=ppt/slides/slide32.xml><?xml version="1.0" encoding="utf-8"?>
 <p:sld xmlns:a="http://schemas.openxmlformats.org/drawingml/2006/main" xmlns:r="http://schemas.openxmlformats.org/officeDocument/2006/relationships" xmlns:p="http://schemas.openxmlformats.org/presentationml/2006/main">
   <p:cSld>
     <p:spTree>
@@ -22548,7 +23112,7 @@
           <a:p>
             <a:fld id="{A80A81DD-F10A-4B1C-963A-0ABBB4865886}" type="slidenum">
               <a:rPr lang="en-US" sz="1600" smtClean="0"/>
-              <a:t>31</a:t>
+              <a:t>32</a:t>
             </a:fld>
             <a:endParaRPr lang="en-US" sz="1600"/>
           </a:p>
@@ -22983,7 +23547,7 @@
 </p:sld>
 </file>
 
-<file path=ppt/slides/slide32.xml><?xml version="1.0" encoding="utf-8"?>
+<file path=ppt/slides/slide33.xml><?xml version="1.0" encoding="utf-8"?>
 <p:sld xmlns:a="http://schemas.openxmlformats.org/drawingml/2006/main" xmlns:r="http://schemas.openxmlformats.org/officeDocument/2006/relationships" xmlns:p="http://schemas.openxmlformats.org/presentationml/2006/main">
   <p:cSld>
     <p:spTree>
@@ -23057,7 +23621,7 @@
           <a:p>
             <a:fld id="{A80A81DD-F10A-4B1C-963A-0ABBB4865886}" type="slidenum">
               <a:rPr lang="en-US" sz="1600" smtClean="0"/>
-              <a:t>32</a:t>
+              <a:t>33</a:t>
             </a:fld>
             <a:endParaRPr lang="en-US" sz="1600"/>
           </a:p>
@@ -23434,7 +23998,7 @@
 </p:sld>
 </file>
 
-<file path=ppt/slides/slide33.xml><?xml version="1.0" encoding="utf-8"?>
+<file path=ppt/slides/slide34.xml><?xml version="1.0" encoding="utf-8"?>
 <p:sld xmlns:a="http://schemas.openxmlformats.org/drawingml/2006/main" xmlns:r="http://schemas.openxmlformats.org/officeDocument/2006/relationships" xmlns:p="http://schemas.openxmlformats.org/presentationml/2006/main">
   <p:cSld>
     <p:spTree>
@@ -23508,7 +24072,7 @@
           <a:p>
             <a:fld id="{A80A81DD-F10A-4B1C-963A-0ABBB4865886}" type="slidenum">
               <a:rPr lang="en-US" sz="1600" smtClean="0"/>
-              <a:t>33</a:t>
+              <a:t>34</a:t>
             </a:fld>
             <a:endParaRPr lang="en-US" sz="1600"/>
           </a:p>
@@ -24039,7 +24603,7 @@
 </p:sld>
 </file>
 
-<file path=ppt/slides/slide34.xml><?xml version="1.0" encoding="utf-8"?>
+<file path=ppt/slides/slide35.xml><?xml version="1.0" encoding="utf-8"?>
 <p:sld xmlns:a="http://schemas.openxmlformats.org/drawingml/2006/main" xmlns:r="http://schemas.openxmlformats.org/officeDocument/2006/relationships" xmlns:p="http://schemas.openxmlformats.org/presentationml/2006/main">
   <p:cSld>
     <p:spTree>
@@ -24113,7 +24677,7 @@
           <a:p>
             <a:fld id="{A80A81DD-F10A-4B1C-963A-0ABBB4865886}" type="slidenum">
               <a:rPr lang="en-US" sz="1600" smtClean="0"/>
-              <a:t>34</a:t>
+              <a:t>35</a:t>
             </a:fld>
             <a:endParaRPr lang="en-US" sz="1600"/>
           </a:p>
@@ -24605,7 +25169,7 @@
 </p:sld>
 </file>
 
-<file path=ppt/slides/slide35.xml><?xml version="1.0" encoding="utf-8"?>
+<file path=ppt/slides/slide36.xml><?xml version="1.0" encoding="utf-8"?>
 <p:sld xmlns:a="http://schemas.openxmlformats.org/drawingml/2006/main" xmlns:r="http://schemas.openxmlformats.org/officeDocument/2006/relationships" xmlns:p="http://schemas.openxmlformats.org/presentationml/2006/main">
   <p:cSld>
     <p:spTree>
@@ -24679,7 +25243,7 @@
           <a:p>
             <a:fld id="{A80A81DD-F10A-4B1C-963A-0ABBB4865886}" type="slidenum">
               <a:rPr lang="en-US" sz="1600" smtClean="0"/>
-              <a:t>35</a:t>
+              <a:t>36</a:t>
             </a:fld>
             <a:endParaRPr lang="en-US" sz="1600"/>
           </a:p>
@@ -25177,7 +25741,7 @@
 </p:sld>
 </file>
 
-<file path=ppt/slides/slide36.xml><?xml version="1.0" encoding="utf-8"?>
+<file path=ppt/slides/slide37.xml><?xml version="1.0" encoding="utf-8"?>
 <p:sld xmlns:a="http://schemas.openxmlformats.org/drawingml/2006/main" xmlns:r="http://schemas.openxmlformats.org/officeDocument/2006/relationships" xmlns:p="http://schemas.openxmlformats.org/presentationml/2006/main">
   <p:cSld>
     <p:spTree>
@@ -25251,7 +25815,7 @@
           <a:p>
             <a:fld id="{A80A81DD-F10A-4B1C-963A-0ABBB4865886}" type="slidenum">
               <a:rPr lang="en-US" sz="1600" smtClean="0"/>
-              <a:t>36</a:t>
+              <a:t>37</a:t>
             </a:fld>
             <a:endParaRPr lang="en-US" sz="1600"/>
           </a:p>
@@ -25674,859 +26238,6 @@
     <p:extLst>
       <p:ext uri="{BB962C8B-B14F-4D97-AF65-F5344CB8AC3E}">
         <p14:creationId xmlns:p14="http://schemas.microsoft.com/office/powerpoint/2010/main" val="2277220017"/>
-      </p:ext>
-    </p:extLst>
-  </p:cSld>
-  <p:clrMapOvr>
-    <a:masterClrMapping/>
-  </p:clrMapOvr>
-  <p:timing>
-    <p:tnLst>
-      <p:par>
-        <p:cTn id="1" dur="indefinite" restart="never" nodeType="tmRoot">
-          <p:childTnLst>
-            <p:seq concurrent="1" nextAc="seek">
-              <p:cTn id="2" dur="indefinite" nodeType="mainSeq">
-                <p:childTnLst>
-                  <p:par>
-                    <p:cTn id="3" fill="hold">
-                      <p:stCondLst>
-                        <p:cond delay="indefinite"/>
-                      </p:stCondLst>
-                      <p:childTnLst>
-                        <p:par>
-                          <p:cTn id="4" fill="hold">
-                            <p:stCondLst>
-                              <p:cond delay="0"/>
-                            </p:stCondLst>
-                            <p:childTnLst>
-                              <p:par>
-                                <p:cTn id="5" presetID="34" presetClass="entr" presetSubtype="0" fill="hold" grpId="0" nodeType="clickEffect">
-                                  <p:stCondLst>
-                                    <p:cond delay="0"/>
-                                  </p:stCondLst>
-                                  <p:childTnLst>
-                                    <p:set>
-                                      <p:cBhvr>
-                                        <p:cTn id="6" dur="1" fill="hold">
-                                          <p:stCondLst>
-                                            <p:cond delay="0"/>
-                                          </p:stCondLst>
-                                        </p:cTn>
-                                        <p:tgtEl>
-                                          <p:spTgt spid="7"/>
-                                        </p:tgtEl>
-                                        <p:attrNameLst>
-                                          <p:attrName>style.visibility</p:attrName>
-                                        </p:attrNameLst>
-                                      </p:cBhvr>
-                                      <p:to>
-                                        <p:strVal val="visible"/>
-                                      </p:to>
-                                    </p:set>
-                                    <p:anim from="(-#ppt_w/2)" to="(#ppt_x)" calcmode="lin" valueType="num">
-                                      <p:cBhvr>
-                                        <p:cTn id="7" dur="600" fill="hold">
-                                          <p:stCondLst>
-                                            <p:cond delay="0"/>
-                                          </p:stCondLst>
-                                        </p:cTn>
-                                        <p:tgtEl>
-                                          <p:spTgt spid="7"/>
-                                        </p:tgtEl>
-                                        <p:attrNameLst>
-                                          <p:attrName>ppt_x</p:attrName>
-                                        </p:attrNameLst>
-                                      </p:cBhvr>
-                                    </p:anim>
-                                    <p:anim from="0" to="-1.0" calcmode="lin" valueType="num">
-                                      <p:cBhvr>
-                                        <p:cTn id="8" dur="200" decel="50000" autoRev="1" fill="hold">
-                                          <p:stCondLst>
-                                            <p:cond delay="600"/>
-                                          </p:stCondLst>
-                                        </p:cTn>
-                                        <p:tgtEl>
-                                          <p:spTgt spid="7"/>
-                                        </p:tgtEl>
-                                        <p:attrNameLst>
-                                          <p:attrName>xshear</p:attrName>
-                                        </p:attrNameLst>
-                                      </p:cBhvr>
-                                    </p:anim>
-                                    <p:animScale>
-                                      <p:cBhvr>
-                                        <p:cTn id="9" dur="200" decel="100000" autoRev="1" fill="hold">
-                                          <p:stCondLst>
-                                            <p:cond delay="600"/>
-                                          </p:stCondLst>
-                                        </p:cTn>
-                                        <p:tgtEl>
-                                          <p:spTgt spid="7"/>
-                                        </p:tgtEl>
-                                      </p:cBhvr>
-                                      <p:from x="100000" y="100000"/>
-                                      <p:to x="80000" y="100000"/>
-                                    </p:animScale>
-                                    <p:anim by="(#ppt_h/3+#ppt_w*0.1)" calcmode="lin" valueType="num">
-                                      <p:cBhvr additive="sum">
-                                        <p:cTn id="10" dur="200" decel="100000" autoRev="1" fill="hold">
-                                          <p:stCondLst>
-                                            <p:cond delay="600"/>
-                                          </p:stCondLst>
-                                        </p:cTn>
-                                        <p:tgtEl>
-                                          <p:spTgt spid="7"/>
-                                        </p:tgtEl>
-                                        <p:attrNameLst>
-                                          <p:attrName>ppt_x</p:attrName>
-                                        </p:attrNameLst>
-                                      </p:cBhvr>
-                                    </p:anim>
-                                  </p:childTnLst>
-                                </p:cTn>
-                              </p:par>
-                            </p:childTnLst>
-                          </p:cTn>
-                        </p:par>
-                      </p:childTnLst>
-                    </p:cTn>
-                  </p:par>
-                  <p:par>
-                    <p:cTn id="11" fill="hold">
-                      <p:stCondLst>
-                        <p:cond delay="indefinite"/>
-                      </p:stCondLst>
-                      <p:childTnLst>
-                        <p:par>
-                          <p:cTn id="12" fill="hold">
-                            <p:stCondLst>
-                              <p:cond delay="0"/>
-                            </p:stCondLst>
-                            <p:childTnLst>
-                              <p:par>
-                                <p:cTn id="13" presetID="34" presetClass="entr" presetSubtype="0" fill="hold" grpId="0" nodeType="clickEffect">
-                                  <p:stCondLst>
-                                    <p:cond delay="0"/>
-                                  </p:stCondLst>
-                                  <p:childTnLst>
-                                    <p:set>
-                                      <p:cBhvr>
-                                        <p:cTn id="14" dur="1" fill="hold">
-                                          <p:stCondLst>
-                                            <p:cond delay="0"/>
-                                          </p:stCondLst>
-                                        </p:cTn>
-                                        <p:tgtEl>
-                                          <p:spTgt spid="9"/>
-                                        </p:tgtEl>
-                                        <p:attrNameLst>
-                                          <p:attrName>style.visibility</p:attrName>
-                                        </p:attrNameLst>
-                                      </p:cBhvr>
-                                      <p:to>
-                                        <p:strVal val="visible"/>
-                                      </p:to>
-                                    </p:set>
-                                    <p:anim from="(-#ppt_w/2)" to="(#ppt_x)" calcmode="lin" valueType="num">
-                                      <p:cBhvr>
-                                        <p:cTn id="15" dur="600" fill="hold">
-                                          <p:stCondLst>
-                                            <p:cond delay="0"/>
-                                          </p:stCondLst>
-                                        </p:cTn>
-                                        <p:tgtEl>
-                                          <p:spTgt spid="9"/>
-                                        </p:tgtEl>
-                                        <p:attrNameLst>
-                                          <p:attrName>ppt_x</p:attrName>
-                                        </p:attrNameLst>
-                                      </p:cBhvr>
-                                    </p:anim>
-                                    <p:anim from="0" to="-1.0" calcmode="lin" valueType="num">
-                                      <p:cBhvr>
-                                        <p:cTn id="16" dur="200" decel="50000" autoRev="1" fill="hold">
-                                          <p:stCondLst>
-                                            <p:cond delay="600"/>
-                                          </p:stCondLst>
-                                        </p:cTn>
-                                        <p:tgtEl>
-                                          <p:spTgt spid="9"/>
-                                        </p:tgtEl>
-                                        <p:attrNameLst>
-                                          <p:attrName>xshear</p:attrName>
-                                        </p:attrNameLst>
-                                      </p:cBhvr>
-                                    </p:anim>
-                                    <p:animScale>
-                                      <p:cBhvr>
-                                        <p:cTn id="17" dur="200" decel="100000" autoRev="1" fill="hold">
-                                          <p:stCondLst>
-                                            <p:cond delay="600"/>
-                                          </p:stCondLst>
-                                        </p:cTn>
-                                        <p:tgtEl>
-                                          <p:spTgt spid="9"/>
-                                        </p:tgtEl>
-                                      </p:cBhvr>
-                                      <p:from x="100000" y="100000"/>
-                                      <p:to x="80000" y="100000"/>
-                                    </p:animScale>
-                                    <p:anim by="(#ppt_h/3+#ppt_w*0.1)" calcmode="lin" valueType="num">
-                                      <p:cBhvr additive="sum">
-                                        <p:cTn id="18" dur="200" decel="100000" autoRev="1" fill="hold">
-                                          <p:stCondLst>
-                                            <p:cond delay="600"/>
-                                          </p:stCondLst>
-                                        </p:cTn>
-                                        <p:tgtEl>
-                                          <p:spTgt spid="9"/>
-                                        </p:tgtEl>
-                                        <p:attrNameLst>
-                                          <p:attrName>ppt_x</p:attrName>
-                                        </p:attrNameLst>
-                                      </p:cBhvr>
-                                    </p:anim>
-                                  </p:childTnLst>
-                                </p:cTn>
-                              </p:par>
-                            </p:childTnLst>
-                          </p:cTn>
-                        </p:par>
-                      </p:childTnLst>
-                    </p:cTn>
-                  </p:par>
-                  <p:par>
-                    <p:cTn id="19" fill="hold">
-                      <p:stCondLst>
-                        <p:cond delay="indefinite"/>
-                      </p:stCondLst>
-                      <p:childTnLst>
-                        <p:par>
-                          <p:cTn id="20" fill="hold">
-                            <p:stCondLst>
-                              <p:cond delay="0"/>
-                            </p:stCondLst>
-                            <p:childTnLst>
-                              <p:par>
-                                <p:cTn id="21" presetID="34" presetClass="entr" presetSubtype="0" fill="hold" grpId="0" nodeType="clickEffect">
-                                  <p:stCondLst>
-                                    <p:cond delay="0"/>
-                                  </p:stCondLst>
-                                  <p:childTnLst>
-                                    <p:set>
-                                      <p:cBhvr>
-                                        <p:cTn id="22" dur="1" fill="hold">
-                                          <p:stCondLst>
-                                            <p:cond delay="0"/>
-                                          </p:stCondLst>
-                                        </p:cTn>
-                                        <p:tgtEl>
-                                          <p:spTgt spid="11"/>
-                                        </p:tgtEl>
-                                        <p:attrNameLst>
-                                          <p:attrName>style.visibility</p:attrName>
-                                        </p:attrNameLst>
-                                      </p:cBhvr>
-                                      <p:to>
-                                        <p:strVal val="visible"/>
-                                      </p:to>
-                                    </p:set>
-                                    <p:anim from="(-#ppt_w/2)" to="(#ppt_x)" calcmode="lin" valueType="num">
-                                      <p:cBhvr>
-                                        <p:cTn id="23" dur="600" fill="hold">
-                                          <p:stCondLst>
-                                            <p:cond delay="0"/>
-                                          </p:stCondLst>
-                                        </p:cTn>
-                                        <p:tgtEl>
-                                          <p:spTgt spid="11"/>
-                                        </p:tgtEl>
-                                        <p:attrNameLst>
-                                          <p:attrName>ppt_x</p:attrName>
-                                        </p:attrNameLst>
-                                      </p:cBhvr>
-                                    </p:anim>
-                                    <p:anim from="0" to="-1.0" calcmode="lin" valueType="num">
-                                      <p:cBhvr>
-                                        <p:cTn id="24" dur="200" decel="50000" autoRev="1" fill="hold">
-                                          <p:stCondLst>
-                                            <p:cond delay="600"/>
-                                          </p:stCondLst>
-                                        </p:cTn>
-                                        <p:tgtEl>
-                                          <p:spTgt spid="11"/>
-                                        </p:tgtEl>
-                                        <p:attrNameLst>
-                                          <p:attrName>xshear</p:attrName>
-                                        </p:attrNameLst>
-                                      </p:cBhvr>
-                                    </p:anim>
-                                    <p:animScale>
-                                      <p:cBhvr>
-                                        <p:cTn id="25" dur="200" decel="100000" autoRev="1" fill="hold">
-                                          <p:stCondLst>
-                                            <p:cond delay="600"/>
-                                          </p:stCondLst>
-                                        </p:cTn>
-                                        <p:tgtEl>
-                                          <p:spTgt spid="11"/>
-                                        </p:tgtEl>
-                                      </p:cBhvr>
-                                      <p:from x="100000" y="100000"/>
-                                      <p:to x="80000" y="100000"/>
-                                    </p:animScale>
-                                    <p:anim by="(#ppt_h/3+#ppt_w*0.1)" calcmode="lin" valueType="num">
-                                      <p:cBhvr additive="sum">
-                                        <p:cTn id="26" dur="200" decel="100000" autoRev="1" fill="hold">
-                                          <p:stCondLst>
-                                            <p:cond delay="600"/>
-                                          </p:stCondLst>
-                                        </p:cTn>
-                                        <p:tgtEl>
-                                          <p:spTgt spid="11"/>
-                                        </p:tgtEl>
-                                        <p:attrNameLst>
-                                          <p:attrName>ppt_x</p:attrName>
-                                        </p:attrNameLst>
-                                      </p:cBhvr>
-                                    </p:anim>
-                                  </p:childTnLst>
-                                </p:cTn>
-                              </p:par>
-                            </p:childTnLst>
-                          </p:cTn>
-                        </p:par>
-                      </p:childTnLst>
-                    </p:cTn>
-                  </p:par>
-                </p:childTnLst>
-              </p:cTn>
-              <p:prevCondLst>
-                <p:cond evt="onPrev" delay="0">
-                  <p:tgtEl>
-                    <p:sldTgt/>
-                  </p:tgtEl>
-                </p:cond>
-              </p:prevCondLst>
-              <p:nextCondLst>
-                <p:cond evt="onNext" delay="0">
-                  <p:tgtEl>
-                    <p:sldTgt/>
-                  </p:tgtEl>
-                </p:cond>
-              </p:nextCondLst>
-            </p:seq>
-          </p:childTnLst>
-        </p:cTn>
-      </p:par>
-    </p:tnLst>
-    <p:bldLst>
-      <p:bldP spid="7" grpId="0"/>
-      <p:bldP spid="9" grpId="0"/>
-      <p:bldP spid="11" grpId="0"/>
-    </p:bldLst>
-  </p:timing>
-</p:sld>
-</file>
-
-<file path=ppt/slides/slide37.xml><?xml version="1.0" encoding="utf-8"?>
-<p:sld xmlns:a="http://schemas.openxmlformats.org/drawingml/2006/main" xmlns:r="http://schemas.openxmlformats.org/officeDocument/2006/relationships" xmlns:p="http://schemas.openxmlformats.org/presentationml/2006/main">
-  <p:cSld>
-    <p:spTree>
-      <p:nvGrpSpPr>
-        <p:cNvPr id="1" name=""/>
-        <p:cNvGrpSpPr/>
-        <p:nvPr/>
-      </p:nvGrpSpPr>
-      <p:grpSpPr>
-        <a:xfrm>
-          <a:off x="0" y="0"/>
-          <a:ext cx="0" cy="0"/>
-          <a:chOff x="0" y="0"/>
-          <a:chExt cx="0" cy="0"/>
-        </a:xfrm>
-      </p:grpSpPr>
-      <p:sp>
-        <p:nvSpPr>
-          <p:cNvPr id="2" name="Title 1">
-            <a:extLst>
-              <a:ext uri="{FF2B5EF4-FFF2-40B4-BE49-F238E27FC236}">
-                <a16:creationId xmlns:a16="http://schemas.microsoft.com/office/drawing/2014/main" id="{928FBCDC-48E3-34D7-E16A-ED185680B6C5}"/>
-              </a:ext>
-            </a:extLst>
-          </p:cNvPr>
-          <p:cNvSpPr>
-            <a:spLocks noGrp="1"/>
-          </p:cNvSpPr>
-          <p:nvPr>
-            <p:ph type="title"/>
-          </p:nvPr>
-        </p:nvSpPr>
-        <p:spPr/>
-        <p:txBody>
-          <a:bodyPr>
-            <a:noAutofit/>
-          </a:bodyPr>
-          <a:lstStyle/>
-          <a:p>
-            <a:r>
-              <a:rPr lang="en-US">
-                <a:solidFill>
-                  <a:srgbClr val="1F3864"/>
-                </a:solidFill>
-              </a:rPr>
-              <a:t>Ethics: the Facebook experiment</a:t>
-            </a:r>
-          </a:p>
-        </p:txBody>
-      </p:sp>
-      <p:sp>
-        <p:nvSpPr>
-          <p:cNvPr id="4" name="Slide Number Placeholder 3">
-            <a:extLst>
-              <a:ext uri="{FF2B5EF4-FFF2-40B4-BE49-F238E27FC236}">
-                <a16:creationId xmlns:a16="http://schemas.microsoft.com/office/drawing/2014/main" id="{867D343A-B691-3B93-BC2E-2BC7ADBAE788}"/>
-              </a:ext>
-            </a:extLst>
-          </p:cNvPr>
-          <p:cNvSpPr>
-            <a:spLocks noGrp="1"/>
-          </p:cNvSpPr>
-          <p:nvPr>
-            <p:ph type="sldNum" sz="quarter" idx="12"/>
-          </p:nvPr>
-        </p:nvSpPr>
-        <p:spPr/>
-        <p:txBody>
-          <a:bodyPr/>
-          <a:lstStyle/>
-          <a:p>
-            <a:fld id="{A80A81DD-F10A-4B1C-963A-0ABBB4865886}" type="slidenum">
-              <a:rPr lang="en-US" sz="1600" smtClean="0"/>
-              <a:t>37</a:t>
-            </a:fld>
-            <a:endParaRPr lang="en-US" sz="1600"/>
-          </a:p>
-        </p:txBody>
-      </p:sp>
-      <p:sp>
-        <p:nvSpPr>
-          <p:cNvPr id="5" name="TextBox 4">
-            <a:extLst>
-              <a:ext uri="{FF2B5EF4-FFF2-40B4-BE49-F238E27FC236}">
-                <a16:creationId xmlns:a16="http://schemas.microsoft.com/office/drawing/2014/main" id="{803EF544-7BC1-830E-74B1-64EDAAE169AE}"/>
-              </a:ext>
-            </a:extLst>
-          </p:cNvPr>
-          <p:cNvSpPr txBox="1"/>
-          <p:nvPr/>
-        </p:nvSpPr>
-        <p:spPr>
-          <a:xfrm>
-            <a:off x="762000" y="1841499"/>
-            <a:ext cx="10668000" cy="589280"/>
-          </a:xfrm>
-          <a:prstGeom prst="rect">
-            <a:avLst/>
-          </a:prstGeom>
-          <a:noFill/>
-        </p:spPr>
-        <p:txBody>
-          <a:bodyPr vert="horz" wrap="square" rtlCol="0">
-            <a:noAutofit/>
-          </a:bodyPr>
-          <a:lstStyle/>
-          <a:p>
-            <a:pPr>
-              <a:spcAft>
-                <a:spcPts val="400"/>
-              </a:spcAft>
-            </a:pPr>
-            <a:r>
-              <a:rPr lang="en-US" sz="1600">
-                <a:solidFill>
-                  <a:srgbClr val="000000"/>
-                </a:solidFill>
-              </a:rPr>
-              <a:t>For one week in January 2012, Facebook changed the News Feeds of 689,003 users: some saw fewer positive posts, some fewer negative ones. The results were published in 2014. The users never knew.</a:t>
-            </a:r>
-          </a:p>
-        </p:txBody>
-      </p:sp>
-      <p:sp>
-        <p:nvSpPr>
-          <p:cNvPr id="6" name="TextBox 5">
-            <a:extLst>
-              <a:ext uri="{FF2B5EF4-FFF2-40B4-BE49-F238E27FC236}">
-                <a16:creationId xmlns:a16="http://schemas.microsoft.com/office/drawing/2014/main" id="{173928F0-6402-96DA-08AE-79702CFCC1E5}"/>
-              </a:ext>
-            </a:extLst>
-          </p:cNvPr>
-          <p:cNvSpPr txBox="1"/>
-          <p:nvPr/>
-        </p:nvSpPr>
-        <p:spPr>
-          <a:xfrm>
-            <a:off x="762000" y="2557780"/>
-            <a:ext cx="10668000" cy="345440"/>
-          </a:xfrm>
-          <a:prstGeom prst="rect">
-            <a:avLst/>
-          </a:prstGeom>
-          <a:noFill/>
-        </p:spPr>
-        <p:txBody>
-          <a:bodyPr vert="horz" wrap="square" rtlCol="0">
-            <a:noAutofit/>
-          </a:bodyPr>
-          <a:lstStyle/>
-          <a:p>
-            <a:pPr marL="304800" indent="-304800"/>
-            <a:r>
-              <a:rPr lang="en-US" sz="1600" b="1">
-                <a:solidFill>
-                  <a:srgbClr val="C00000"/>
-                </a:solidFill>
-              </a:rPr>
-              <a:t>1.</a:t>
-            </a:r>
-            <a:r>
-              <a:rPr lang="en-US" sz="1600">
-                <a:solidFill>
-                  <a:srgbClr val="000000"/>
-                </a:solidFill>
-              </a:rPr>
-              <a:t>  Facebook said agreeing to its Data Use Policy counted as informed consent. Do you agree?</a:t>
-            </a:r>
-          </a:p>
-        </p:txBody>
-      </p:sp>
-      <p:sp>
-        <p:nvSpPr>
-          <p:cNvPr id="7" name="TextBox 6">
-            <a:extLst>
-              <a:ext uri="{FF2B5EF4-FFF2-40B4-BE49-F238E27FC236}">
-                <a16:creationId xmlns:a16="http://schemas.microsoft.com/office/drawing/2014/main" id="{096B0234-5946-443E-D3EF-6B904164792E}"/>
-              </a:ext>
-            </a:extLst>
-          </p:cNvPr>
-          <p:cNvSpPr txBox="1"/>
-          <p:nvPr/>
-        </p:nvSpPr>
-        <p:spPr>
-          <a:xfrm>
-            <a:off x="1117600" y="2852419"/>
-            <a:ext cx="10312400" cy="589280"/>
-          </a:xfrm>
-          <a:prstGeom prst="rect">
-            <a:avLst/>
-          </a:prstGeom>
-          <a:noFill/>
-        </p:spPr>
-        <p:txBody>
-          <a:bodyPr vert="horz" wrap="square" rtlCol="0">
-            <a:noAutofit/>
-          </a:bodyPr>
-          <a:lstStyle/>
-          <a:p>
-            <a:r>
-              <a:rPr lang="en-US" sz="1600" b="1">
-                <a:solidFill>
-                  <a:srgbClr val="C00000"/>
-                </a:solidFill>
-              </a:rPr>
-              <a:t>The journal did not: its Expression of Concern said the study may not have met the principles of informed consent and the chance to opt out.</a:t>
-            </a:r>
-          </a:p>
-        </p:txBody>
-      </p:sp>
-      <p:sp>
-        <p:nvSpPr>
-          <p:cNvPr id="8" name="TextBox 7">
-            <a:extLst>
-              <a:ext uri="{FF2B5EF4-FFF2-40B4-BE49-F238E27FC236}">
-                <a16:creationId xmlns:a16="http://schemas.microsoft.com/office/drawing/2014/main" id="{DDBAFEBF-2B58-DFE7-62AD-B002E3656906}"/>
-              </a:ext>
-            </a:extLst>
-          </p:cNvPr>
-          <p:cNvSpPr txBox="1"/>
-          <p:nvPr/>
-        </p:nvSpPr>
-        <p:spPr>
-          <a:xfrm>
-            <a:off x="762000" y="3594100"/>
-            <a:ext cx="10668000" cy="345440"/>
-          </a:xfrm>
-          <a:prstGeom prst="rect">
-            <a:avLst/>
-          </a:prstGeom>
-          <a:noFill/>
-        </p:spPr>
-        <p:txBody>
-          <a:bodyPr vert="horz" wrap="square" rtlCol="0">
-            <a:noAutofit/>
-          </a:bodyPr>
-          <a:lstStyle/>
-          <a:p>
-            <a:pPr marL="304800" indent="-304800"/>
-            <a:r>
-              <a:rPr lang="en-US" sz="1600" b="1">
-                <a:solidFill>
-                  <a:srgbClr val="C00000"/>
-                </a:solidFill>
-              </a:rPr>
-              <a:t>2.</a:t>
-            </a:r>
-            <a:r>
-              <a:rPr lang="en-US" sz="1600">
-                <a:solidFill>
-                  <a:srgbClr val="000000"/>
-                </a:solidFill>
-              </a:rPr>
-              <a:t>  Why did no ethics board stop it?</a:t>
-            </a:r>
-          </a:p>
-        </p:txBody>
-      </p:sp>
-      <p:sp>
-        <p:nvSpPr>
-          <p:cNvPr id="9" name="TextBox 8">
-            <a:extLst>
-              <a:ext uri="{FF2B5EF4-FFF2-40B4-BE49-F238E27FC236}">
-                <a16:creationId xmlns:a16="http://schemas.microsoft.com/office/drawing/2014/main" id="{37C5EB09-8181-01D4-0AE9-A06C5E9A6703}"/>
-              </a:ext>
-            </a:extLst>
-          </p:cNvPr>
-          <p:cNvSpPr txBox="1"/>
-          <p:nvPr/>
-        </p:nvSpPr>
-        <p:spPr>
-          <a:xfrm>
-            <a:off x="1117600" y="3888739"/>
-            <a:ext cx="10312400" cy="589280"/>
-          </a:xfrm>
-          <a:prstGeom prst="rect">
-            <a:avLst/>
-          </a:prstGeom>
-          <a:noFill/>
-        </p:spPr>
-        <p:txBody>
-          <a:bodyPr vert="horz" wrap="square" rtlCol="0">
-            <a:noAutofit/>
-          </a:bodyPr>
-          <a:lstStyle/>
-          <a:p>
-            <a:r>
-              <a:rPr lang="en-US" sz="1600" b="1">
-                <a:solidFill>
-                  <a:srgbClr val="C00000"/>
-                </a:solidFill>
-              </a:rPr>
-              <a:t>Facebook, a private company, was not bound by the federal rules. Cornell's board decided its researcher was not directly involved, so it did no review.</a:t>
-            </a:r>
-          </a:p>
-        </p:txBody>
-      </p:sp>
-      <p:sp>
-        <p:nvSpPr>
-          <p:cNvPr id="10" name="TextBox 9">
-            <a:extLst>
-              <a:ext uri="{FF2B5EF4-FFF2-40B4-BE49-F238E27FC236}">
-                <a16:creationId xmlns:a16="http://schemas.microsoft.com/office/drawing/2014/main" id="{2235831A-51A3-E82F-82A5-67061AA1A22E}"/>
-              </a:ext>
-            </a:extLst>
-          </p:cNvPr>
-          <p:cNvSpPr txBox="1"/>
-          <p:nvPr/>
-        </p:nvSpPr>
-        <p:spPr>
-          <a:xfrm>
-            <a:off x="762000" y="4630420"/>
-            <a:ext cx="10668000" cy="345440"/>
-          </a:xfrm>
-          <a:prstGeom prst="rect">
-            <a:avLst/>
-          </a:prstGeom>
-          <a:noFill/>
-        </p:spPr>
-        <p:txBody>
-          <a:bodyPr vert="horz" wrap="square" rtlCol="0">
-            <a:noAutofit/>
-          </a:bodyPr>
-          <a:lstStyle/>
-          <a:p>
-            <a:pPr marL="304800" indent="-304800"/>
-            <a:r>
-              <a:rPr lang="en-US" sz="1600" b="1">
-                <a:solidFill>
-                  <a:srgbClr val="C00000"/>
-                </a:solidFill>
-              </a:rPr>
-              <a:t>3.</a:t>
-            </a:r>
-            <a:r>
-              <a:rPr lang="en-US" sz="1600">
-                <a:solidFill>
-                  <a:srgbClr val="000000"/>
-                </a:solidFill>
-              </a:rPr>
-              <a:t>  What is the lesson?</a:t>
-            </a:r>
-          </a:p>
-        </p:txBody>
-      </p:sp>
-      <p:sp>
-        <p:nvSpPr>
-          <p:cNvPr id="11" name="TextBox 10">
-            <a:extLst>
-              <a:ext uri="{FF2B5EF4-FFF2-40B4-BE49-F238E27FC236}">
-                <a16:creationId xmlns:a16="http://schemas.microsoft.com/office/drawing/2014/main" id="{7EEE7946-5EA0-8B72-F855-AEB4B6636110}"/>
-              </a:ext>
-            </a:extLst>
-          </p:cNvPr>
-          <p:cNvSpPr txBox="1"/>
-          <p:nvPr/>
-        </p:nvSpPr>
-        <p:spPr>
-          <a:xfrm>
-            <a:off x="1117600" y="4925060"/>
-            <a:ext cx="10312400" cy="345440"/>
-          </a:xfrm>
-          <a:prstGeom prst="rect">
-            <a:avLst/>
-          </a:prstGeom>
-          <a:noFill/>
-        </p:spPr>
-        <p:txBody>
-          <a:bodyPr vert="horz" wrap="square" rtlCol="0">
-            <a:noAutofit/>
-          </a:bodyPr>
-          <a:lstStyle/>
-          <a:p>
-            <a:r>
-              <a:rPr lang="en-US" sz="1600" b="1">
-                <a:solidFill>
-                  <a:srgbClr val="C00000"/>
-                </a:solidFill>
-              </a:rPr>
-              <a:t>Clicking I agree on a terms-of-service page is not informed consent - even for a well-designed experiment.</a:t>
-            </a:r>
-          </a:p>
-        </p:txBody>
-      </p:sp>
-      <p:sp>
-        <p:nvSpPr>
-          <p:cNvPr id="12" name="TextBox 11">
-            <a:extLst>
-              <a:ext uri="{FF2B5EF4-FFF2-40B4-BE49-F238E27FC236}">
-                <a16:creationId xmlns:a16="http://schemas.microsoft.com/office/drawing/2014/main" id="{3D8E5BD3-1CF7-2352-2707-2D7DBFFA6EBD}"/>
-              </a:ext>
-            </a:extLst>
-          </p:cNvPr>
-          <p:cNvSpPr txBox="1"/>
-          <p:nvPr/>
-        </p:nvSpPr>
-        <p:spPr>
-          <a:xfrm>
-            <a:off x="762000" y="6045200"/>
-            <a:ext cx="10668000" cy="345440"/>
-          </a:xfrm>
-          <a:prstGeom prst="rect">
-            <a:avLst/>
-          </a:prstGeom>
-          <a:noFill/>
-        </p:spPr>
-        <p:txBody>
-          <a:bodyPr vert="horz" wrap="square" rtlCol="0">
-            <a:noAutofit/>
-          </a:bodyPr>
-          <a:lstStyle/>
-          <a:p>
-            <a:pPr algn="r"/>
-            <a:r>
-              <a:rPr lang="en-US" sz="1600" i="1">
-                <a:solidFill>
-                  <a:srgbClr val="595959"/>
-                </a:solidFill>
-              </a:rPr>
-              <a:t>Sources: Kramer, Guillory and Hancock (2014), PNAS; PNAS Editorial Expression of Concern (2014)</a:t>
-            </a:r>
-          </a:p>
-        </p:txBody>
-      </p:sp>
-      <p:sp>
-        <p:nvSpPr>
-          <p:cNvPr id="3" name="Title rule">
-            <a:extLst>
-              <a:ext uri="{FF2B5EF4-FFF2-40B4-BE49-F238E27FC236}">
-                <a16:creationId xmlns:a16="http://schemas.microsoft.com/office/drawing/2014/main" id="{2A19CE9B-6143-6D05-1FF1-AF917901111D}"/>
-              </a:ext>
-            </a:extLst>
-          </p:cNvPr>
-          <p:cNvSpPr/>
-          <p:nvPr/>
-        </p:nvSpPr>
-        <p:spPr>
-          <a:xfrm>
-            <a:off x="838200" y="1600200"/>
-            <a:ext cx="10515600" cy="38100"/>
-          </a:xfrm>
-          <a:prstGeom prst="rect">
-            <a:avLst/>
-          </a:prstGeom>
-          <a:solidFill>
-            <a:srgbClr val="4472C4"/>
-          </a:solidFill>
-          <a:ln w="12700" cap="flat" cmpd="sng" algn="ctr">
-            <a:noFill/>
-            <a:prstDash val="solid"/>
-            <a:miter lim="800000"/>
-          </a:ln>
-          <a:effectLst/>
-          <a:extLst>
-            <a:ext uri="{91240B29-F687-4F45-9708-019B960494DF}">
-              <a14:hiddenLine xmlns:a14="http://schemas.microsoft.com/office/drawing/2010/main" w="12700" cap="flat" cmpd="sng" algn="ctr">
-                <a:solidFill>
-                  <a:schemeClr val="accent1">
-                    <a:shade val="15000"/>
-                  </a:schemeClr>
-                </a:solidFill>
-                <a:prstDash val="solid"/>
-                <a:miter lim="800000"/>
-              </a14:hiddenLine>
-            </a:ext>
-          </a:extLst>
-        </p:spPr>
-        <p:style>
-          <a:lnRef idx="2">
-            <a:schemeClr val="accent1">
-              <a:shade val="15000"/>
-            </a:schemeClr>
-          </a:lnRef>
-          <a:fillRef idx="1">
-            <a:schemeClr val="accent1"/>
-          </a:fillRef>
-          <a:effectRef idx="0">
-            <a:schemeClr val="accent1"/>
-          </a:effectRef>
-          <a:fontRef idx="minor">
-            <a:schemeClr val="lt1"/>
-          </a:fontRef>
-        </p:style>
-        <p:txBody>
-          <a:bodyPr rtlCol="0" anchor="ctr"/>
-          <a:lstStyle/>
-          <a:p>
-            <a:pPr algn="ctr"/>
-            <a:endParaRPr lang="en-US"/>
-          </a:p>
-        </p:txBody>
-      </p:sp>
-    </p:spTree>
-    <p:extLst>
-      <p:ext uri="{BB962C8B-B14F-4D97-AF65-F5344CB8AC3E}">
-        <p14:creationId xmlns:p14="http://schemas.microsoft.com/office/powerpoint/2010/main" val="2555584021"/>
       </p:ext>
     </p:extLst>
   </p:cSld>
@@ -26902,6 +26613,859 @@
       </p:grpSpPr>
       <p:sp>
         <p:nvSpPr>
+          <p:cNvPr id="2" name="Title 1">
+            <a:extLst>
+              <a:ext uri="{FF2B5EF4-FFF2-40B4-BE49-F238E27FC236}">
+                <a16:creationId xmlns:a16="http://schemas.microsoft.com/office/drawing/2014/main" id="{928FBCDC-48E3-34D7-E16A-ED185680B6C5}"/>
+              </a:ext>
+            </a:extLst>
+          </p:cNvPr>
+          <p:cNvSpPr>
+            <a:spLocks noGrp="1"/>
+          </p:cNvSpPr>
+          <p:nvPr>
+            <p:ph type="title"/>
+          </p:nvPr>
+        </p:nvSpPr>
+        <p:spPr/>
+        <p:txBody>
+          <a:bodyPr>
+            <a:noAutofit/>
+          </a:bodyPr>
+          <a:lstStyle/>
+          <a:p>
+            <a:r>
+              <a:rPr lang="en-US">
+                <a:solidFill>
+                  <a:srgbClr val="1F3864"/>
+                </a:solidFill>
+              </a:rPr>
+              <a:t>Ethics: the Facebook experiment</a:t>
+            </a:r>
+          </a:p>
+        </p:txBody>
+      </p:sp>
+      <p:sp>
+        <p:nvSpPr>
+          <p:cNvPr id="4" name="Slide Number Placeholder 3">
+            <a:extLst>
+              <a:ext uri="{FF2B5EF4-FFF2-40B4-BE49-F238E27FC236}">
+                <a16:creationId xmlns:a16="http://schemas.microsoft.com/office/drawing/2014/main" id="{867D343A-B691-3B93-BC2E-2BC7ADBAE788}"/>
+              </a:ext>
+            </a:extLst>
+          </p:cNvPr>
+          <p:cNvSpPr>
+            <a:spLocks noGrp="1"/>
+          </p:cNvSpPr>
+          <p:nvPr>
+            <p:ph type="sldNum" sz="quarter" idx="12"/>
+          </p:nvPr>
+        </p:nvSpPr>
+        <p:spPr/>
+        <p:txBody>
+          <a:bodyPr/>
+          <a:lstStyle/>
+          <a:p>
+            <a:fld id="{A80A81DD-F10A-4B1C-963A-0ABBB4865886}" type="slidenum">
+              <a:rPr lang="en-US" sz="1600" smtClean="0"/>
+              <a:t>38</a:t>
+            </a:fld>
+            <a:endParaRPr lang="en-US" sz="1600"/>
+          </a:p>
+        </p:txBody>
+      </p:sp>
+      <p:sp>
+        <p:nvSpPr>
+          <p:cNvPr id="5" name="TextBox 4">
+            <a:extLst>
+              <a:ext uri="{FF2B5EF4-FFF2-40B4-BE49-F238E27FC236}">
+                <a16:creationId xmlns:a16="http://schemas.microsoft.com/office/drawing/2014/main" id="{803EF544-7BC1-830E-74B1-64EDAAE169AE}"/>
+              </a:ext>
+            </a:extLst>
+          </p:cNvPr>
+          <p:cNvSpPr txBox="1"/>
+          <p:nvPr/>
+        </p:nvSpPr>
+        <p:spPr>
+          <a:xfrm>
+            <a:off x="762000" y="1841499"/>
+            <a:ext cx="10668000" cy="589280"/>
+          </a:xfrm>
+          <a:prstGeom prst="rect">
+            <a:avLst/>
+          </a:prstGeom>
+          <a:noFill/>
+        </p:spPr>
+        <p:txBody>
+          <a:bodyPr vert="horz" wrap="square" rtlCol="0">
+            <a:noAutofit/>
+          </a:bodyPr>
+          <a:lstStyle/>
+          <a:p>
+            <a:pPr>
+              <a:spcAft>
+                <a:spcPts val="400"/>
+              </a:spcAft>
+            </a:pPr>
+            <a:r>
+              <a:rPr lang="en-US" sz="1600">
+                <a:solidFill>
+                  <a:srgbClr val="000000"/>
+                </a:solidFill>
+              </a:rPr>
+              <a:t>For one week in January 2012, Facebook changed the News Feeds of 689,003 users: some saw fewer positive posts, some fewer negative ones. The results were published in 2014. The users never knew.</a:t>
+            </a:r>
+          </a:p>
+        </p:txBody>
+      </p:sp>
+      <p:sp>
+        <p:nvSpPr>
+          <p:cNvPr id="6" name="TextBox 5">
+            <a:extLst>
+              <a:ext uri="{FF2B5EF4-FFF2-40B4-BE49-F238E27FC236}">
+                <a16:creationId xmlns:a16="http://schemas.microsoft.com/office/drawing/2014/main" id="{173928F0-6402-96DA-08AE-79702CFCC1E5}"/>
+              </a:ext>
+            </a:extLst>
+          </p:cNvPr>
+          <p:cNvSpPr txBox="1"/>
+          <p:nvPr/>
+        </p:nvSpPr>
+        <p:spPr>
+          <a:xfrm>
+            <a:off x="762000" y="2557780"/>
+            <a:ext cx="10668000" cy="345440"/>
+          </a:xfrm>
+          <a:prstGeom prst="rect">
+            <a:avLst/>
+          </a:prstGeom>
+          <a:noFill/>
+        </p:spPr>
+        <p:txBody>
+          <a:bodyPr vert="horz" wrap="square" rtlCol="0">
+            <a:noAutofit/>
+          </a:bodyPr>
+          <a:lstStyle/>
+          <a:p>
+            <a:pPr marL="304800" indent="-304800"/>
+            <a:r>
+              <a:rPr lang="en-US" sz="1600" b="1">
+                <a:solidFill>
+                  <a:srgbClr val="C00000"/>
+                </a:solidFill>
+              </a:rPr>
+              <a:t>1.</a:t>
+            </a:r>
+            <a:r>
+              <a:rPr lang="en-US" sz="1600">
+                <a:solidFill>
+                  <a:srgbClr val="000000"/>
+                </a:solidFill>
+              </a:rPr>
+              <a:t>  Facebook said agreeing to its Data Use Policy counted as informed consent. Do you agree?</a:t>
+            </a:r>
+          </a:p>
+        </p:txBody>
+      </p:sp>
+      <p:sp>
+        <p:nvSpPr>
+          <p:cNvPr id="7" name="TextBox 6">
+            <a:extLst>
+              <a:ext uri="{FF2B5EF4-FFF2-40B4-BE49-F238E27FC236}">
+                <a16:creationId xmlns:a16="http://schemas.microsoft.com/office/drawing/2014/main" id="{096B0234-5946-443E-D3EF-6B904164792E}"/>
+              </a:ext>
+            </a:extLst>
+          </p:cNvPr>
+          <p:cNvSpPr txBox="1"/>
+          <p:nvPr/>
+        </p:nvSpPr>
+        <p:spPr>
+          <a:xfrm>
+            <a:off x="1117600" y="2852419"/>
+            <a:ext cx="10312400" cy="589280"/>
+          </a:xfrm>
+          <a:prstGeom prst="rect">
+            <a:avLst/>
+          </a:prstGeom>
+          <a:noFill/>
+        </p:spPr>
+        <p:txBody>
+          <a:bodyPr vert="horz" wrap="square" rtlCol="0">
+            <a:noAutofit/>
+          </a:bodyPr>
+          <a:lstStyle/>
+          <a:p>
+            <a:r>
+              <a:rPr lang="en-US" sz="1600" b="1">
+                <a:solidFill>
+                  <a:srgbClr val="C00000"/>
+                </a:solidFill>
+              </a:rPr>
+              <a:t>The journal did not: its Expression of Concern said the study may not have met the principles of informed consent and the chance to opt out.</a:t>
+            </a:r>
+          </a:p>
+        </p:txBody>
+      </p:sp>
+      <p:sp>
+        <p:nvSpPr>
+          <p:cNvPr id="8" name="TextBox 7">
+            <a:extLst>
+              <a:ext uri="{FF2B5EF4-FFF2-40B4-BE49-F238E27FC236}">
+                <a16:creationId xmlns:a16="http://schemas.microsoft.com/office/drawing/2014/main" id="{DDBAFEBF-2B58-DFE7-62AD-B002E3656906}"/>
+              </a:ext>
+            </a:extLst>
+          </p:cNvPr>
+          <p:cNvSpPr txBox="1"/>
+          <p:nvPr/>
+        </p:nvSpPr>
+        <p:spPr>
+          <a:xfrm>
+            <a:off x="762000" y="3594100"/>
+            <a:ext cx="10668000" cy="345440"/>
+          </a:xfrm>
+          <a:prstGeom prst="rect">
+            <a:avLst/>
+          </a:prstGeom>
+          <a:noFill/>
+        </p:spPr>
+        <p:txBody>
+          <a:bodyPr vert="horz" wrap="square" rtlCol="0">
+            <a:noAutofit/>
+          </a:bodyPr>
+          <a:lstStyle/>
+          <a:p>
+            <a:pPr marL="304800" indent="-304800"/>
+            <a:r>
+              <a:rPr lang="en-US" sz="1600" b="1">
+                <a:solidFill>
+                  <a:srgbClr val="C00000"/>
+                </a:solidFill>
+              </a:rPr>
+              <a:t>2.</a:t>
+            </a:r>
+            <a:r>
+              <a:rPr lang="en-US" sz="1600">
+                <a:solidFill>
+                  <a:srgbClr val="000000"/>
+                </a:solidFill>
+              </a:rPr>
+              <a:t>  Why did no ethics board stop it?</a:t>
+            </a:r>
+          </a:p>
+        </p:txBody>
+      </p:sp>
+      <p:sp>
+        <p:nvSpPr>
+          <p:cNvPr id="9" name="TextBox 8">
+            <a:extLst>
+              <a:ext uri="{FF2B5EF4-FFF2-40B4-BE49-F238E27FC236}">
+                <a16:creationId xmlns:a16="http://schemas.microsoft.com/office/drawing/2014/main" id="{37C5EB09-8181-01D4-0AE9-A06C5E9A6703}"/>
+              </a:ext>
+            </a:extLst>
+          </p:cNvPr>
+          <p:cNvSpPr txBox="1"/>
+          <p:nvPr/>
+        </p:nvSpPr>
+        <p:spPr>
+          <a:xfrm>
+            <a:off x="1117600" y="3888739"/>
+            <a:ext cx="10312400" cy="589280"/>
+          </a:xfrm>
+          <a:prstGeom prst="rect">
+            <a:avLst/>
+          </a:prstGeom>
+          <a:noFill/>
+        </p:spPr>
+        <p:txBody>
+          <a:bodyPr vert="horz" wrap="square" rtlCol="0">
+            <a:noAutofit/>
+          </a:bodyPr>
+          <a:lstStyle/>
+          <a:p>
+            <a:r>
+              <a:rPr lang="en-US" sz="1600" b="1">
+                <a:solidFill>
+                  <a:srgbClr val="C00000"/>
+                </a:solidFill>
+              </a:rPr>
+              <a:t>Facebook, a private company, was not bound by the federal rules. Cornell's board decided its researcher was not directly involved, so it did no review.</a:t>
+            </a:r>
+          </a:p>
+        </p:txBody>
+      </p:sp>
+      <p:sp>
+        <p:nvSpPr>
+          <p:cNvPr id="10" name="TextBox 9">
+            <a:extLst>
+              <a:ext uri="{FF2B5EF4-FFF2-40B4-BE49-F238E27FC236}">
+                <a16:creationId xmlns:a16="http://schemas.microsoft.com/office/drawing/2014/main" id="{2235831A-51A3-E82F-82A5-67061AA1A22E}"/>
+              </a:ext>
+            </a:extLst>
+          </p:cNvPr>
+          <p:cNvSpPr txBox="1"/>
+          <p:nvPr/>
+        </p:nvSpPr>
+        <p:spPr>
+          <a:xfrm>
+            <a:off x="762000" y="4630420"/>
+            <a:ext cx="10668000" cy="345440"/>
+          </a:xfrm>
+          <a:prstGeom prst="rect">
+            <a:avLst/>
+          </a:prstGeom>
+          <a:noFill/>
+        </p:spPr>
+        <p:txBody>
+          <a:bodyPr vert="horz" wrap="square" rtlCol="0">
+            <a:noAutofit/>
+          </a:bodyPr>
+          <a:lstStyle/>
+          <a:p>
+            <a:pPr marL="304800" indent="-304800"/>
+            <a:r>
+              <a:rPr lang="en-US" sz="1600" b="1">
+                <a:solidFill>
+                  <a:srgbClr val="C00000"/>
+                </a:solidFill>
+              </a:rPr>
+              <a:t>3.</a:t>
+            </a:r>
+            <a:r>
+              <a:rPr lang="en-US" sz="1600">
+                <a:solidFill>
+                  <a:srgbClr val="000000"/>
+                </a:solidFill>
+              </a:rPr>
+              <a:t>  What is the lesson?</a:t>
+            </a:r>
+          </a:p>
+        </p:txBody>
+      </p:sp>
+      <p:sp>
+        <p:nvSpPr>
+          <p:cNvPr id="11" name="TextBox 10">
+            <a:extLst>
+              <a:ext uri="{FF2B5EF4-FFF2-40B4-BE49-F238E27FC236}">
+                <a16:creationId xmlns:a16="http://schemas.microsoft.com/office/drawing/2014/main" id="{7EEE7946-5EA0-8B72-F855-AEB4B6636110}"/>
+              </a:ext>
+            </a:extLst>
+          </p:cNvPr>
+          <p:cNvSpPr txBox="1"/>
+          <p:nvPr/>
+        </p:nvSpPr>
+        <p:spPr>
+          <a:xfrm>
+            <a:off x="1117600" y="4925060"/>
+            <a:ext cx="10312400" cy="345440"/>
+          </a:xfrm>
+          <a:prstGeom prst="rect">
+            <a:avLst/>
+          </a:prstGeom>
+          <a:noFill/>
+        </p:spPr>
+        <p:txBody>
+          <a:bodyPr vert="horz" wrap="square" rtlCol="0">
+            <a:noAutofit/>
+          </a:bodyPr>
+          <a:lstStyle/>
+          <a:p>
+            <a:r>
+              <a:rPr lang="en-US" sz="1600" b="1">
+                <a:solidFill>
+                  <a:srgbClr val="C00000"/>
+                </a:solidFill>
+              </a:rPr>
+              <a:t>Clicking I agree on a terms-of-service page is not informed consent - even for a well-designed experiment.</a:t>
+            </a:r>
+          </a:p>
+        </p:txBody>
+      </p:sp>
+      <p:sp>
+        <p:nvSpPr>
+          <p:cNvPr id="12" name="TextBox 11">
+            <a:extLst>
+              <a:ext uri="{FF2B5EF4-FFF2-40B4-BE49-F238E27FC236}">
+                <a16:creationId xmlns:a16="http://schemas.microsoft.com/office/drawing/2014/main" id="{3D8E5BD3-1CF7-2352-2707-2D7DBFFA6EBD}"/>
+              </a:ext>
+            </a:extLst>
+          </p:cNvPr>
+          <p:cNvSpPr txBox="1"/>
+          <p:nvPr/>
+        </p:nvSpPr>
+        <p:spPr>
+          <a:xfrm>
+            <a:off x="762000" y="6045200"/>
+            <a:ext cx="10668000" cy="345440"/>
+          </a:xfrm>
+          <a:prstGeom prst="rect">
+            <a:avLst/>
+          </a:prstGeom>
+          <a:noFill/>
+        </p:spPr>
+        <p:txBody>
+          <a:bodyPr vert="horz" wrap="square" rtlCol="0">
+            <a:noAutofit/>
+          </a:bodyPr>
+          <a:lstStyle/>
+          <a:p>
+            <a:pPr algn="r"/>
+            <a:r>
+              <a:rPr lang="en-US" sz="1600" i="1">
+                <a:solidFill>
+                  <a:srgbClr val="595959"/>
+                </a:solidFill>
+              </a:rPr>
+              <a:t>Sources: Kramer, Guillory and Hancock (2014), PNAS; PNAS Editorial Expression of Concern (2014)</a:t>
+            </a:r>
+          </a:p>
+        </p:txBody>
+      </p:sp>
+      <p:sp>
+        <p:nvSpPr>
+          <p:cNvPr id="3" name="Title rule">
+            <a:extLst>
+              <a:ext uri="{FF2B5EF4-FFF2-40B4-BE49-F238E27FC236}">
+                <a16:creationId xmlns:a16="http://schemas.microsoft.com/office/drawing/2014/main" id="{2A19CE9B-6143-6D05-1FF1-AF917901111D}"/>
+              </a:ext>
+            </a:extLst>
+          </p:cNvPr>
+          <p:cNvSpPr/>
+          <p:nvPr/>
+        </p:nvSpPr>
+        <p:spPr>
+          <a:xfrm>
+            <a:off x="838200" y="1600200"/>
+            <a:ext cx="10515600" cy="38100"/>
+          </a:xfrm>
+          <a:prstGeom prst="rect">
+            <a:avLst/>
+          </a:prstGeom>
+          <a:solidFill>
+            <a:srgbClr val="4472C4"/>
+          </a:solidFill>
+          <a:ln w="12700" cap="flat" cmpd="sng" algn="ctr">
+            <a:noFill/>
+            <a:prstDash val="solid"/>
+            <a:miter lim="800000"/>
+          </a:ln>
+          <a:effectLst/>
+          <a:extLst>
+            <a:ext uri="{91240B29-F687-4F45-9708-019B960494DF}">
+              <a14:hiddenLine xmlns:a14="http://schemas.microsoft.com/office/drawing/2010/main" w="12700" cap="flat" cmpd="sng" algn="ctr">
+                <a:solidFill>
+                  <a:schemeClr val="accent1">
+                    <a:shade val="15000"/>
+                  </a:schemeClr>
+                </a:solidFill>
+                <a:prstDash val="solid"/>
+                <a:miter lim="800000"/>
+              </a14:hiddenLine>
+            </a:ext>
+          </a:extLst>
+        </p:spPr>
+        <p:style>
+          <a:lnRef idx="2">
+            <a:schemeClr val="accent1">
+              <a:shade val="15000"/>
+            </a:schemeClr>
+          </a:lnRef>
+          <a:fillRef idx="1">
+            <a:schemeClr val="accent1"/>
+          </a:fillRef>
+          <a:effectRef idx="0">
+            <a:schemeClr val="accent1"/>
+          </a:effectRef>
+          <a:fontRef idx="minor">
+            <a:schemeClr val="lt1"/>
+          </a:fontRef>
+        </p:style>
+        <p:txBody>
+          <a:bodyPr rtlCol="0" anchor="ctr"/>
+          <a:lstStyle/>
+          <a:p>
+            <a:pPr algn="ctr"/>
+            <a:endParaRPr lang="en-US"/>
+          </a:p>
+        </p:txBody>
+      </p:sp>
+    </p:spTree>
+    <p:extLst>
+      <p:ext uri="{BB962C8B-B14F-4D97-AF65-F5344CB8AC3E}">
+        <p14:creationId xmlns:p14="http://schemas.microsoft.com/office/powerpoint/2010/main" val="2555584021"/>
+      </p:ext>
+    </p:extLst>
+  </p:cSld>
+  <p:clrMapOvr>
+    <a:masterClrMapping/>
+  </p:clrMapOvr>
+  <p:timing>
+    <p:tnLst>
+      <p:par>
+        <p:cTn id="1" dur="indefinite" restart="never" nodeType="tmRoot">
+          <p:childTnLst>
+            <p:seq concurrent="1" nextAc="seek">
+              <p:cTn id="2" dur="indefinite" nodeType="mainSeq">
+                <p:childTnLst>
+                  <p:par>
+                    <p:cTn id="3" fill="hold">
+                      <p:stCondLst>
+                        <p:cond delay="indefinite"/>
+                      </p:stCondLst>
+                      <p:childTnLst>
+                        <p:par>
+                          <p:cTn id="4" fill="hold">
+                            <p:stCondLst>
+                              <p:cond delay="0"/>
+                            </p:stCondLst>
+                            <p:childTnLst>
+                              <p:par>
+                                <p:cTn id="5" presetID="34" presetClass="entr" presetSubtype="0" fill="hold" grpId="0" nodeType="clickEffect">
+                                  <p:stCondLst>
+                                    <p:cond delay="0"/>
+                                  </p:stCondLst>
+                                  <p:childTnLst>
+                                    <p:set>
+                                      <p:cBhvr>
+                                        <p:cTn id="6" dur="1" fill="hold">
+                                          <p:stCondLst>
+                                            <p:cond delay="0"/>
+                                          </p:stCondLst>
+                                        </p:cTn>
+                                        <p:tgtEl>
+                                          <p:spTgt spid="7"/>
+                                        </p:tgtEl>
+                                        <p:attrNameLst>
+                                          <p:attrName>style.visibility</p:attrName>
+                                        </p:attrNameLst>
+                                      </p:cBhvr>
+                                      <p:to>
+                                        <p:strVal val="visible"/>
+                                      </p:to>
+                                    </p:set>
+                                    <p:anim from="(-#ppt_w/2)" to="(#ppt_x)" calcmode="lin" valueType="num">
+                                      <p:cBhvr>
+                                        <p:cTn id="7" dur="600" fill="hold">
+                                          <p:stCondLst>
+                                            <p:cond delay="0"/>
+                                          </p:stCondLst>
+                                        </p:cTn>
+                                        <p:tgtEl>
+                                          <p:spTgt spid="7"/>
+                                        </p:tgtEl>
+                                        <p:attrNameLst>
+                                          <p:attrName>ppt_x</p:attrName>
+                                        </p:attrNameLst>
+                                      </p:cBhvr>
+                                    </p:anim>
+                                    <p:anim from="0" to="-1.0" calcmode="lin" valueType="num">
+                                      <p:cBhvr>
+                                        <p:cTn id="8" dur="200" decel="50000" autoRev="1" fill="hold">
+                                          <p:stCondLst>
+                                            <p:cond delay="600"/>
+                                          </p:stCondLst>
+                                        </p:cTn>
+                                        <p:tgtEl>
+                                          <p:spTgt spid="7"/>
+                                        </p:tgtEl>
+                                        <p:attrNameLst>
+                                          <p:attrName>xshear</p:attrName>
+                                        </p:attrNameLst>
+                                      </p:cBhvr>
+                                    </p:anim>
+                                    <p:animScale>
+                                      <p:cBhvr>
+                                        <p:cTn id="9" dur="200" decel="100000" autoRev="1" fill="hold">
+                                          <p:stCondLst>
+                                            <p:cond delay="600"/>
+                                          </p:stCondLst>
+                                        </p:cTn>
+                                        <p:tgtEl>
+                                          <p:spTgt spid="7"/>
+                                        </p:tgtEl>
+                                      </p:cBhvr>
+                                      <p:from x="100000" y="100000"/>
+                                      <p:to x="80000" y="100000"/>
+                                    </p:animScale>
+                                    <p:anim by="(#ppt_h/3+#ppt_w*0.1)" calcmode="lin" valueType="num">
+                                      <p:cBhvr additive="sum">
+                                        <p:cTn id="10" dur="200" decel="100000" autoRev="1" fill="hold">
+                                          <p:stCondLst>
+                                            <p:cond delay="600"/>
+                                          </p:stCondLst>
+                                        </p:cTn>
+                                        <p:tgtEl>
+                                          <p:spTgt spid="7"/>
+                                        </p:tgtEl>
+                                        <p:attrNameLst>
+                                          <p:attrName>ppt_x</p:attrName>
+                                        </p:attrNameLst>
+                                      </p:cBhvr>
+                                    </p:anim>
+                                  </p:childTnLst>
+                                </p:cTn>
+                              </p:par>
+                            </p:childTnLst>
+                          </p:cTn>
+                        </p:par>
+                      </p:childTnLst>
+                    </p:cTn>
+                  </p:par>
+                  <p:par>
+                    <p:cTn id="11" fill="hold">
+                      <p:stCondLst>
+                        <p:cond delay="indefinite"/>
+                      </p:stCondLst>
+                      <p:childTnLst>
+                        <p:par>
+                          <p:cTn id="12" fill="hold">
+                            <p:stCondLst>
+                              <p:cond delay="0"/>
+                            </p:stCondLst>
+                            <p:childTnLst>
+                              <p:par>
+                                <p:cTn id="13" presetID="34" presetClass="entr" presetSubtype="0" fill="hold" grpId="0" nodeType="clickEffect">
+                                  <p:stCondLst>
+                                    <p:cond delay="0"/>
+                                  </p:stCondLst>
+                                  <p:childTnLst>
+                                    <p:set>
+                                      <p:cBhvr>
+                                        <p:cTn id="14" dur="1" fill="hold">
+                                          <p:stCondLst>
+                                            <p:cond delay="0"/>
+                                          </p:stCondLst>
+                                        </p:cTn>
+                                        <p:tgtEl>
+                                          <p:spTgt spid="9"/>
+                                        </p:tgtEl>
+                                        <p:attrNameLst>
+                                          <p:attrName>style.visibility</p:attrName>
+                                        </p:attrNameLst>
+                                      </p:cBhvr>
+                                      <p:to>
+                                        <p:strVal val="visible"/>
+                                      </p:to>
+                                    </p:set>
+                                    <p:anim from="(-#ppt_w/2)" to="(#ppt_x)" calcmode="lin" valueType="num">
+                                      <p:cBhvr>
+                                        <p:cTn id="15" dur="600" fill="hold">
+                                          <p:stCondLst>
+                                            <p:cond delay="0"/>
+                                          </p:stCondLst>
+                                        </p:cTn>
+                                        <p:tgtEl>
+                                          <p:spTgt spid="9"/>
+                                        </p:tgtEl>
+                                        <p:attrNameLst>
+                                          <p:attrName>ppt_x</p:attrName>
+                                        </p:attrNameLst>
+                                      </p:cBhvr>
+                                    </p:anim>
+                                    <p:anim from="0" to="-1.0" calcmode="lin" valueType="num">
+                                      <p:cBhvr>
+                                        <p:cTn id="16" dur="200" decel="50000" autoRev="1" fill="hold">
+                                          <p:stCondLst>
+                                            <p:cond delay="600"/>
+                                          </p:stCondLst>
+                                        </p:cTn>
+                                        <p:tgtEl>
+                                          <p:spTgt spid="9"/>
+                                        </p:tgtEl>
+                                        <p:attrNameLst>
+                                          <p:attrName>xshear</p:attrName>
+                                        </p:attrNameLst>
+                                      </p:cBhvr>
+                                    </p:anim>
+                                    <p:animScale>
+                                      <p:cBhvr>
+                                        <p:cTn id="17" dur="200" decel="100000" autoRev="1" fill="hold">
+                                          <p:stCondLst>
+                                            <p:cond delay="600"/>
+                                          </p:stCondLst>
+                                        </p:cTn>
+                                        <p:tgtEl>
+                                          <p:spTgt spid="9"/>
+                                        </p:tgtEl>
+                                      </p:cBhvr>
+                                      <p:from x="100000" y="100000"/>
+                                      <p:to x="80000" y="100000"/>
+                                    </p:animScale>
+                                    <p:anim by="(#ppt_h/3+#ppt_w*0.1)" calcmode="lin" valueType="num">
+                                      <p:cBhvr additive="sum">
+                                        <p:cTn id="18" dur="200" decel="100000" autoRev="1" fill="hold">
+                                          <p:stCondLst>
+                                            <p:cond delay="600"/>
+                                          </p:stCondLst>
+                                        </p:cTn>
+                                        <p:tgtEl>
+                                          <p:spTgt spid="9"/>
+                                        </p:tgtEl>
+                                        <p:attrNameLst>
+                                          <p:attrName>ppt_x</p:attrName>
+                                        </p:attrNameLst>
+                                      </p:cBhvr>
+                                    </p:anim>
+                                  </p:childTnLst>
+                                </p:cTn>
+                              </p:par>
+                            </p:childTnLst>
+                          </p:cTn>
+                        </p:par>
+                      </p:childTnLst>
+                    </p:cTn>
+                  </p:par>
+                  <p:par>
+                    <p:cTn id="19" fill="hold">
+                      <p:stCondLst>
+                        <p:cond delay="indefinite"/>
+                      </p:stCondLst>
+                      <p:childTnLst>
+                        <p:par>
+                          <p:cTn id="20" fill="hold">
+                            <p:stCondLst>
+                              <p:cond delay="0"/>
+                            </p:stCondLst>
+                            <p:childTnLst>
+                              <p:par>
+                                <p:cTn id="21" presetID="34" presetClass="entr" presetSubtype="0" fill="hold" grpId="0" nodeType="clickEffect">
+                                  <p:stCondLst>
+                                    <p:cond delay="0"/>
+                                  </p:stCondLst>
+                                  <p:childTnLst>
+                                    <p:set>
+                                      <p:cBhvr>
+                                        <p:cTn id="22" dur="1" fill="hold">
+                                          <p:stCondLst>
+                                            <p:cond delay="0"/>
+                                          </p:stCondLst>
+                                        </p:cTn>
+                                        <p:tgtEl>
+                                          <p:spTgt spid="11"/>
+                                        </p:tgtEl>
+                                        <p:attrNameLst>
+                                          <p:attrName>style.visibility</p:attrName>
+                                        </p:attrNameLst>
+                                      </p:cBhvr>
+                                      <p:to>
+                                        <p:strVal val="visible"/>
+                                      </p:to>
+                                    </p:set>
+                                    <p:anim from="(-#ppt_w/2)" to="(#ppt_x)" calcmode="lin" valueType="num">
+                                      <p:cBhvr>
+                                        <p:cTn id="23" dur="600" fill="hold">
+                                          <p:stCondLst>
+                                            <p:cond delay="0"/>
+                                          </p:stCondLst>
+                                        </p:cTn>
+                                        <p:tgtEl>
+                                          <p:spTgt spid="11"/>
+                                        </p:tgtEl>
+                                        <p:attrNameLst>
+                                          <p:attrName>ppt_x</p:attrName>
+                                        </p:attrNameLst>
+                                      </p:cBhvr>
+                                    </p:anim>
+                                    <p:anim from="0" to="-1.0" calcmode="lin" valueType="num">
+                                      <p:cBhvr>
+                                        <p:cTn id="24" dur="200" decel="50000" autoRev="1" fill="hold">
+                                          <p:stCondLst>
+                                            <p:cond delay="600"/>
+                                          </p:stCondLst>
+                                        </p:cTn>
+                                        <p:tgtEl>
+                                          <p:spTgt spid="11"/>
+                                        </p:tgtEl>
+                                        <p:attrNameLst>
+                                          <p:attrName>xshear</p:attrName>
+                                        </p:attrNameLst>
+                                      </p:cBhvr>
+                                    </p:anim>
+                                    <p:animScale>
+                                      <p:cBhvr>
+                                        <p:cTn id="25" dur="200" decel="100000" autoRev="1" fill="hold">
+                                          <p:stCondLst>
+                                            <p:cond delay="600"/>
+                                          </p:stCondLst>
+                                        </p:cTn>
+                                        <p:tgtEl>
+                                          <p:spTgt spid="11"/>
+                                        </p:tgtEl>
+                                      </p:cBhvr>
+                                      <p:from x="100000" y="100000"/>
+                                      <p:to x="80000" y="100000"/>
+                                    </p:animScale>
+                                    <p:anim by="(#ppt_h/3+#ppt_w*0.1)" calcmode="lin" valueType="num">
+                                      <p:cBhvr additive="sum">
+                                        <p:cTn id="26" dur="200" decel="100000" autoRev="1" fill="hold">
+                                          <p:stCondLst>
+                                            <p:cond delay="600"/>
+                                          </p:stCondLst>
+                                        </p:cTn>
+                                        <p:tgtEl>
+                                          <p:spTgt spid="11"/>
+                                        </p:tgtEl>
+                                        <p:attrNameLst>
+                                          <p:attrName>ppt_x</p:attrName>
+                                        </p:attrNameLst>
+                                      </p:cBhvr>
+                                    </p:anim>
+                                  </p:childTnLst>
+                                </p:cTn>
+                              </p:par>
+                            </p:childTnLst>
+                          </p:cTn>
+                        </p:par>
+                      </p:childTnLst>
+                    </p:cTn>
+                  </p:par>
+                </p:childTnLst>
+              </p:cTn>
+              <p:prevCondLst>
+                <p:cond evt="onPrev" delay="0">
+                  <p:tgtEl>
+                    <p:sldTgt/>
+                  </p:tgtEl>
+                </p:cond>
+              </p:prevCondLst>
+              <p:nextCondLst>
+                <p:cond evt="onNext" delay="0">
+                  <p:tgtEl>
+                    <p:sldTgt/>
+                  </p:tgtEl>
+                </p:cond>
+              </p:nextCondLst>
+            </p:seq>
+          </p:childTnLst>
+        </p:cTn>
+      </p:par>
+    </p:tnLst>
+    <p:bldLst>
+      <p:bldP spid="7" grpId="0"/>
+      <p:bldP spid="9" grpId="0"/>
+      <p:bldP spid="11" grpId="0"/>
+    </p:bldLst>
+  </p:timing>
+</p:sld>
+</file>
+
+<file path=ppt/slides/slide39.xml><?xml version="1.0" encoding="utf-8"?>
+<p:sld xmlns:a="http://schemas.openxmlformats.org/drawingml/2006/main" xmlns:r="http://schemas.openxmlformats.org/officeDocument/2006/relationships" xmlns:p="http://schemas.openxmlformats.org/presentationml/2006/main">
+  <p:cSld>
+    <p:spTree>
+      <p:nvGrpSpPr>
+        <p:cNvPr id="1" name=""/>
+        <p:cNvGrpSpPr/>
+        <p:nvPr/>
+      </p:nvGrpSpPr>
+      <p:grpSpPr>
+        <a:xfrm>
+          <a:off x="0" y="0"/>
+          <a:ext cx="0" cy="0"/>
+          <a:chOff x="0" y="0"/>
+          <a:chExt cx="0" cy="0"/>
+        </a:xfrm>
+      </p:grpSpPr>
+      <p:sp>
+        <p:nvSpPr>
           <p:cNvPr id="14" name="Definition card">
             <a:extLst>
               <a:ext uri="{FF2B5EF4-FFF2-40B4-BE49-F238E27FC236}">
@@ -27125,7 +27689,7 @@
           <a:p>
             <a:fld id="{A80A81DD-F10A-4B1C-963A-0ABBB4865886}" type="slidenum">
               <a:rPr lang="en-US" sz="1600" smtClean="0"/>
-              <a:t>38</a:t>
+              <a:t>39</a:t>
             </a:fld>
             <a:endParaRPr lang="en-US" sz="1600"/>
           </a:p>
@@ -27832,7 +28396,301 @@
 </p:sld>
 </file>
 
-<file path=ppt/slides/slide39.xml><?xml version="1.0" encoding="utf-8"?>
+<file path=ppt/slides/slide4.xml><?xml version="1.0" encoding="utf-8"?>
+<p:sld xmlns:a="http://schemas.openxmlformats.org/drawingml/2006/main" xmlns:r="http://schemas.openxmlformats.org/officeDocument/2006/relationships" xmlns:p="http://schemas.openxmlformats.org/presentationml/2006/main">
+  <p:cSld>
+    <p:spTree>
+      <p:nvGrpSpPr>
+        <p:cNvPr id="1" name=""/>
+        <p:cNvGrpSpPr/>
+        <p:nvPr/>
+      </p:nvGrpSpPr>
+      <p:grpSpPr>
+        <a:xfrm>
+          <a:off x="0" y="0"/>
+          <a:ext cx="0" cy="0"/>
+          <a:chOff x="0" y="0"/>
+          <a:chExt cx="0" cy="0"/>
+        </a:xfrm>
+      </p:grpSpPr>
+      <p:sp>
+        <p:nvSpPr>
+          <p:cNvPr id="2" name="Title 1">
+            <a:extLst>
+              <a:ext uri="{FF2B5EF4-FFF2-40B4-BE49-F238E27FC236}">
+                <a16:creationId xmlns:a16="http://schemas.microsoft.com/office/drawing/2014/main" id="{A69E6F3B-5AA8-FA32-FA36-F76E403F6716}"/>
+              </a:ext>
+            </a:extLst>
+          </p:cNvPr>
+          <p:cNvSpPr>
+            <a:spLocks noGrp="1"/>
+          </p:cNvSpPr>
+          <p:nvPr>
+            <p:ph type="title"/>
+          </p:nvPr>
+        </p:nvSpPr>
+        <p:spPr/>
+        <p:txBody>
+          <a:bodyPr>
+            <a:noAutofit/>
+          </a:bodyPr>
+          <a:lstStyle/>
+          <a:p>
+            <a:r>
+              <a:rPr lang="en-US">
+                <a:solidFill>
+                  <a:srgbClr val="1F3864"/>
+                </a:solidFill>
+              </a:rPr>
+              <a:t>A bigger sample does not fix bias</a:t>
+            </a:r>
+          </a:p>
+        </p:txBody>
+      </p:sp>
+      <p:sp>
+        <p:nvSpPr>
+          <p:cNvPr id="3" name="Content Placeholder 2">
+            <a:extLst>
+              <a:ext uri="{FF2B5EF4-FFF2-40B4-BE49-F238E27FC236}">
+                <a16:creationId xmlns:a16="http://schemas.microsoft.com/office/drawing/2014/main" id="{1E33985D-720F-E661-4B98-2B2B699C4716}"/>
+              </a:ext>
+            </a:extLst>
+          </p:cNvPr>
+          <p:cNvSpPr>
+            <a:spLocks noGrp="1"/>
+          </p:cNvSpPr>
+          <p:nvPr>
+            <p:ph idx="1"/>
+          </p:nvPr>
+        </p:nvSpPr>
+        <p:spPr>
+          <a:xfrm>
+            <a:off x="508000" y="1905000"/>
+            <a:ext cx="4445000" cy="4191000"/>
+          </a:xfrm>
+        </p:spPr>
+        <p:txBody>
+          <a:bodyPr>
+            <a:noAutofit/>
+          </a:bodyPr>
+          <a:lstStyle/>
+          <a:p>
+            <a:r>
+              <a:rPr lang="en-US" sz="1600"/>
+              <a:t>Suppose 40% of UI students exercise at least three times a week</a:t>
+            </a:r>
+          </a:p>
+          <a:p>
+            <a:r>
+              <a:rPr lang="en-US" sz="1600"/>
+              <a:t>Blue: 5000 simple random samples of 200 students</a:t>
+            </a:r>
+          </a:p>
+          <a:p>
+            <a:r>
+              <a:rPr lang="en-US" sz="1600"/>
+              <a:t>Grey: 5000 Rec Center surveys of 2000 students</a:t>
+            </a:r>
+          </a:p>
+          <a:p>
+            <a:r>
+              <a:rPr lang="en-US" sz="1600"/>
+              <a:t>The Rec Center survey is more </a:t>
+            </a:r>
+            <a:r>
+              <a:rPr lang="en-US" sz="1600" b="1">
+                <a:solidFill>
+                  <a:srgbClr val="C00000"/>
+                </a:solidFill>
+              </a:rPr>
+              <a:t>precise</a:t>
+            </a:r>
+            <a:r>
+              <a:rPr lang="en-US" sz="1600"/>
+              <a:t> - a smaller standard error</a:t>
+            </a:r>
+          </a:p>
+          <a:p>
+            <a:r>
+              <a:rPr lang="en-US" sz="1600"/>
+              <a:t>and every one of its estimates misses the truth: </a:t>
+            </a:r>
+            <a:r>
+              <a:rPr lang="en-US" sz="1600" b="1">
+                <a:solidFill>
+                  <a:srgbClr val="C00000"/>
+                </a:solidFill>
+              </a:rPr>
+              <a:t>bias</a:t>
+            </a:r>
+          </a:p>
+          <a:p>
+            <a:r>
+              <a:rPr lang="en-US" sz="1600"/>
+              <a:t>More data buys precision. Only a </a:t>
+            </a:r>
+            <a:r>
+              <a:rPr lang="en-US" sz="1600" b="1">
+                <a:solidFill>
+                  <a:srgbClr val="C00000"/>
+                </a:solidFill>
+              </a:rPr>
+              <a:t>better design</a:t>
+            </a:r>
+            <a:r>
+              <a:rPr lang="en-US" sz="1600"/>
+              <a:t> buys accuracy</a:t>
+            </a:r>
+          </a:p>
+        </p:txBody>
+      </p:sp>
+      <p:sp>
+        <p:nvSpPr>
+          <p:cNvPr id="4" name="Slide Number Placeholder 3">
+            <a:extLst>
+              <a:ext uri="{FF2B5EF4-FFF2-40B4-BE49-F238E27FC236}">
+                <a16:creationId xmlns:a16="http://schemas.microsoft.com/office/drawing/2014/main" id="{5D124190-EDC9-111D-36F7-A4650D75E583}"/>
+              </a:ext>
+            </a:extLst>
+          </p:cNvPr>
+          <p:cNvSpPr>
+            <a:spLocks noGrp="1"/>
+          </p:cNvSpPr>
+          <p:nvPr>
+            <p:ph type="sldNum" sz="quarter" idx="12"/>
+          </p:nvPr>
+        </p:nvSpPr>
+        <p:spPr/>
+        <p:txBody>
+          <a:bodyPr/>
+          <a:lstStyle/>
+          <a:p>
+            <a:fld id="{A80A81DD-F10A-4B1C-963A-0ABBB4865886}" type="slidenum">
+              <a:rPr lang="en-US" sz="1600" smtClean="0"/>
+              <a:t>4</a:t>
+            </a:fld>
+            <a:endParaRPr lang="en-US" sz="1600"/>
+          </a:p>
+        </p:txBody>
+      </p:sp>
+      <p:pic>
+        <p:nvPicPr>
+          <p:cNvPr id="6" name="l8_bias_vs_n.png">
+            <a:extLst>
+              <a:ext uri="{FF2B5EF4-FFF2-40B4-BE49-F238E27FC236}">
+                <a16:creationId xmlns:a16="http://schemas.microsoft.com/office/drawing/2014/main" id="{234C5C45-6EA8-A3FB-1854-ABE44697922E}"/>
+              </a:ext>
+            </a:extLst>
+          </p:cNvPr>
+          <p:cNvPicPr>
+            <a:picLocks/>
+          </p:cNvPicPr>
+          <p:nvPr/>
+        </p:nvPicPr>
+        <p:blipFill>
+          <a:blip r:embed="rId2">
+            <a:extLst>
+              <a:ext uri="{28A0092B-C50C-407E-A947-70E740481C1C}">
+                <a14:useLocalDpi xmlns:a14="http://schemas.microsoft.com/office/drawing/2010/main" val="0"/>
+              </a:ext>
+            </a:extLst>
+          </a:blip>
+          <a:stretch>
+            <a:fillRect/>
+          </a:stretch>
+        </p:blipFill>
+        <p:spPr>
+          <a:xfrm>
+            <a:off x="5143500" y="1905000"/>
+            <a:ext cx="6858000" cy="4191000"/>
+          </a:xfrm>
+          <a:prstGeom prst="rect">
+            <a:avLst/>
+          </a:prstGeom>
+        </p:spPr>
+      </p:pic>
+      <p:sp>
+        <p:nvSpPr>
+          <p:cNvPr id="5" name="Title rule">
+            <a:extLst>
+              <a:ext uri="{FF2B5EF4-FFF2-40B4-BE49-F238E27FC236}">
+                <a16:creationId xmlns:a16="http://schemas.microsoft.com/office/drawing/2014/main" id="{5E062A62-2B36-42B5-267B-199202BCA925}"/>
+              </a:ext>
+            </a:extLst>
+          </p:cNvPr>
+          <p:cNvSpPr/>
+          <p:nvPr/>
+        </p:nvSpPr>
+        <p:spPr>
+          <a:xfrm>
+            <a:off x="838200" y="1600200"/>
+            <a:ext cx="10515600" cy="38100"/>
+          </a:xfrm>
+          <a:prstGeom prst="rect">
+            <a:avLst/>
+          </a:prstGeom>
+          <a:solidFill>
+            <a:srgbClr val="4472C4"/>
+          </a:solidFill>
+          <a:ln w="12700" cap="flat" cmpd="sng" algn="ctr">
+            <a:noFill/>
+            <a:prstDash val="solid"/>
+            <a:miter lim="800000"/>
+          </a:ln>
+          <a:effectLst/>
+          <a:extLst>
+            <a:ext uri="{91240B29-F687-4F45-9708-019B960494DF}">
+              <a14:hiddenLine xmlns:a14="http://schemas.microsoft.com/office/drawing/2010/main" w="12700" cap="flat" cmpd="sng" algn="ctr">
+                <a:solidFill>
+                  <a:schemeClr val="accent1">
+                    <a:shade val="15000"/>
+                  </a:schemeClr>
+                </a:solidFill>
+                <a:prstDash val="solid"/>
+                <a:miter lim="800000"/>
+              </a14:hiddenLine>
+            </a:ext>
+          </a:extLst>
+        </p:spPr>
+        <p:style>
+          <a:lnRef idx="2">
+            <a:schemeClr val="accent1">
+              <a:shade val="15000"/>
+            </a:schemeClr>
+          </a:lnRef>
+          <a:fillRef idx="1">
+            <a:schemeClr val="accent1"/>
+          </a:fillRef>
+          <a:effectRef idx="0">
+            <a:schemeClr val="accent1"/>
+          </a:effectRef>
+          <a:fontRef idx="minor">
+            <a:schemeClr val="lt1"/>
+          </a:fontRef>
+        </p:style>
+        <p:txBody>
+          <a:bodyPr rtlCol="0" anchor="ctr"/>
+          <a:lstStyle/>
+          <a:p>
+            <a:pPr algn="ctr"/>
+            <a:endParaRPr lang="en-US"/>
+          </a:p>
+        </p:txBody>
+      </p:sp>
+    </p:spTree>
+    <p:extLst>
+      <p:ext uri="{BB962C8B-B14F-4D97-AF65-F5344CB8AC3E}">
+        <p14:creationId xmlns:p14="http://schemas.microsoft.com/office/powerpoint/2010/main" val="1567023366"/>
+      </p:ext>
+    </p:extLst>
+  </p:cSld>
+  <p:clrMapOvr>
+    <a:masterClrMapping/>
+  </p:clrMapOvr>
+</p:sld>
+</file>
+
+<file path=ppt/slides/slide40.xml><?xml version="1.0" encoding="utf-8"?>
 <p:sld xmlns:a="http://schemas.openxmlformats.org/drawingml/2006/main" xmlns:r="http://schemas.openxmlformats.org/officeDocument/2006/relationships" xmlns:p="http://schemas.openxmlformats.org/presentationml/2006/main">
   <p:cSld>
     <p:spTree>
@@ -28074,7 +28932,7 @@
           <a:p>
             <a:fld id="{A80A81DD-F10A-4B1C-963A-0ABBB4865886}" type="slidenum">
               <a:rPr lang="en-US" sz="1600" smtClean="0"/>
-              <a:t>39</a:t>
+              <a:t>40</a:t>
             </a:fld>
             <a:endParaRPr lang="en-US" sz="1600"/>
           </a:p>
@@ -28752,7 +29610,7 @@
 </p:sld>
 </file>
 
-<file path=ppt/slides/slide4.xml><?xml version="1.0" encoding="utf-8"?>
+<file path=ppt/slides/slide41.xml><?xml version="1.0" encoding="utf-8"?>
 <p:sld xmlns:a="http://schemas.openxmlformats.org/drawingml/2006/main" xmlns:r="http://schemas.openxmlformats.org/officeDocument/2006/relationships" xmlns:p="http://schemas.openxmlformats.org/presentationml/2006/main">
   <p:cSld>
     <p:spTree>
@@ -28774,7 +29632,7 @@
           <p:cNvPr id="2" name="Title 1">
             <a:extLst>
               <a:ext uri="{FF2B5EF4-FFF2-40B4-BE49-F238E27FC236}">
-                <a16:creationId xmlns:a16="http://schemas.microsoft.com/office/drawing/2014/main" id="{A69E6F3B-5AA8-FA32-FA36-F76E403F6716}"/>
+                <a16:creationId xmlns:a16="http://schemas.microsoft.com/office/drawing/2014/main" id="{9DEE9C50-2180-9A09-7608-C08B3B78FF29}"/>
               </a:ext>
             </a:extLst>
           </p:cNvPr>
@@ -28798,104 +29656,7 @@
                   <a:srgbClr val="1F3864"/>
                 </a:solidFill>
               </a:rPr>
-              <a:t>A bigger sample does not fix bias</a:t>
-            </a:r>
-          </a:p>
-        </p:txBody>
-      </p:sp>
-      <p:sp>
-        <p:nvSpPr>
-          <p:cNvPr id="3" name="Content Placeholder 2">
-            <a:extLst>
-              <a:ext uri="{FF2B5EF4-FFF2-40B4-BE49-F238E27FC236}">
-                <a16:creationId xmlns:a16="http://schemas.microsoft.com/office/drawing/2014/main" id="{1E33985D-720F-E661-4B98-2B2B699C4716}"/>
-              </a:ext>
-            </a:extLst>
-          </p:cNvPr>
-          <p:cNvSpPr>
-            <a:spLocks noGrp="1"/>
-          </p:cNvSpPr>
-          <p:nvPr>
-            <p:ph idx="1"/>
-          </p:nvPr>
-        </p:nvSpPr>
-        <p:spPr>
-          <a:xfrm>
-            <a:off x="508000" y="1905000"/>
-            <a:ext cx="4445000" cy="4191000"/>
-          </a:xfrm>
-        </p:spPr>
-        <p:txBody>
-          <a:bodyPr>
-            <a:noAutofit/>
-          </a:bodyPr>
-          <a:lstStyle/>
-          <a:p>
-            <a:r>
-              <a:rPr lang="en-US" sz="1600"/>
-              <a:t>Suppose 40% of UI students exercise at least three times a week</a:t>
-            </a:r>
-          </a:p>
-          <a:p>
-            <a:r>
-              <a:rPr lang="en-US" sz="1600"/>
-              <a:t>Blue: 5000 simple random samples of 200 students</a:t>
-            </a:r>
-          </a:p>
-          <a:p>
-            <a:r>
-              <a:rPr lang="en-US" sz="1600"/>
-              <a:t>Grey: 5000 Rec Center surveys of 2000 students</a:t>
-            </a:r>
-          </a:p>
-          <a:p>
-            <a:r>
-              <a:rPr lang="en-US" sz="1600"/>
-              <a:t>The Rec Center survey is more </a:t>
-            </a:r>
-            <a:r>
-              <a:rPr lang="en-US" sz="1600" b="1">
-                <a:solidFill>
-                  <a:srgbClr val="C00000"/>
-                </a:solidFill>
-              </a:rPr>
-              <a:t>precise</a:t>
-            </a:r>
-            <a:r>
-              <a:rPr lang="en-US" sz="1600"/>
-              <a:t> - a smaller standard error</a:t>
-            </a:r>
-          </a:p>
-          <a:p>
-            <a:r>
-              <a:rPr lang="en-US" sz="1600"/>
-              <a:t>and every one of its estimates misses the truth: </a:t>
-            </a:r>
-            <a:r>
-              <a:rPr lang="en-US" sz="1600" b="1">
-                <a:solidFill>
-                  <a:srgbClr val="C00000"/>
-                </a:solidFill>
-              </a:rPr>
-              <a:t>bias</a:t>
-            </a:r>
-          </a:p>
-          <a:p>
-            <a:r>
-              <a:rPr lang="en-US" sz="1600"/>
-              <a:t>More data buys precision. Only a </a:t>
-            </a:r>
-            <a:r>
-              <a:rPr lang="en-US" sz="1600" b="1">
-                <a:solidFill>
-                  <a:srgbClr val="C00000"/>
-                </a:solidFill>
-              </a:rPr>
-              <a:t>better design</a:t>
-            </a:r>
-            <a:r>
-              <a:rPr lang="en-US" sz="1600"/>
-              <a:t> buys accuracy</a:t>
+              <a:t>Ethics: honest data</a:t>
             </a:r>
           </a:p>
         </p:txBody>
@@ -28905,7 +29666,7 @@
           <p:cNvPr id="4" name="Slide Number Placeholder 3">
             <a:extLst>
               <a:ext uri="{FF2B5EF4-FFF2-40B4-BE49-F238E27FC236}">
-                <a16:creationId xmlns:a16="http://schemas.microsoft.com/office/drawing/2014/main" id="{5D124190-EDC9-111D-36F7-A4650D75E583}"/>
+                <a16:creationId xmlns:a16="http://schemas.microsoft.com/office/drawing/2014/main" id="{6203678C-7C08-89CA-E3B2-CB2008D7B3C1}"/>
               </a:ext>
             </a:extLst>
           </p:cNvPr>
@@ -28923,204 +29684,7 @@
           <a:p>
             <a:fld id="{A80A81DD-F10A-4B1C-963A-0ABBB4865886}" type="slidenum">
               <a:rPr lang="en-US" sz="1600" smtClean="0"/>
-              <a:t>4</a:t>
-            </a:fld>
-            <a:endParaRPr lang="en-US" sz="1600"/>
-          </a:p>
-        </p:txBody>
-      </p:sp>
-      <p:pic>
-        <p:nvPicPr>
-          <p:cNvPr id="6" name="l8_bias_vs_n.png">
-            <a:extLst>
-              <a:ext uri="{FF2B5EF4-FFF2-40B4-BE49-F238E27FC236}">
-                <a16:creationId xmlns:a16="http://schemas.microsoft.com/office/drawing/2014/main" id="{234C5C45-6EA8-A3FB-1854-ABE44697922E}"/>
-              </a:ext>
-            </a:extLst>
-          </p:cNvPr>
-          <p:cNvPicPr>
-            <a:picLocks/>
-          </p:cNvPicPr>
-          <p:nvPr/>
-        </p:nvPicPr>
-        <p:blipFill>
-          <a:blip r:embed="rId2">
-            <a:extLst>
-              <a:ext uri="{28A0092B-C50C-407E-A947-70E740481C1C}">
-                <a14:useLocalDpi xmlns:a14="http://schemas.microsoft.com/office/drawing/2010/main" val="0"/>
-              </a:ext>
-            </a:extLst>
-          </a:blip>
-          <a:stretch>
-            <a:fillRect/>
-          </a:stretch>
-        </p:blipFill>
-        <p:spPr>
-          <a:xfrm>
-            <a:off x="5143500" y="1905000"/>
-            <a:ext cx="6858000" cy="4191000"/>
-          </a:xfrm>
-          <a:prstGeom prst="rect">
-            <a:avLst/>
-          </a:prstGeom>
-        </p:spPr>
-      </p:pic>
-      <p:sp>
-        <p:nvSpPr>
-          <p:cNvPr id="5" name="Title rule">
-            <a:extLst>
-              <a:ext uri="{FF2B5EF4-FFF2-40B4-BE49-F238E27FC236}">
-                <a16:creationId xmlns:a16="http://schemas.microsoft.com/office/drawing/2014/main" id="{5E062A62-2B36-42B5-267B-199202BCA925}"/>
-              </a:ext>
-            </a:extLst>
-          </p:cNvPr>
-          <p:cNvSpPr/>
-          <p:nvPr/>
-        </p:nvSpPr>
-        <p:spPr>
-          <a:xfrm>
-            <a:off x="838200" y="1600200"/>
-            <a:ext cx="10515600" cy="38100"/>
-          </a:xfrm>
-          <a:prstGeom prst="rect">
-            <a:avLst/>
-          </a:prstGeom>
-          <a:solidFill>
-            <a:srgbClr val="4472C4"/>
-          </a:solidFill>
-          <a:ln w="12700" cap="flat" cmpd="sng" algn="ctr">
-            <a:noFill/>
-            <a:prstDash val="solid"/>
-            <a:miter lim="800000"/>
-          </a:ln>
-          <a:effectLst/>
-          <a:extLst>
-            <a:ext uri="{91240B29-F687-4F45-9708-019B960494DF}">
-              <a14:hiddenLine xmlns:a14="http://schemas.microsoft.com/office/drawing/2010/main" w="12700" cap="flat" cmpd="sng" algn="ctr">
-                <a:solidFill>
-                  <a:schemeClr val="accent1">
-                    <a:shade val="15000"/>
-                  </a:schemeClr>
-                </a:solidFill>
-                <a:prstDash val="solid"/>
-                <a:miter lim="800000"/>
-              </a14:hiddenLine>
-            </a:ext>
-          </a:extLst>
-        </p:spPr>
-        <p:style>
-          <a:lnRef idx="2">
-            <a:schemeClr val="accent1">
-              <a:shade val="15000"/>
-            </a:schemeClr>
-          </a:lnRef>
-          <a:fillRef idx="1">
-            <a:schemeClr val="accent1"/>
-          </a:fillRef>
-          <a:effectRef idx="0">
-            <a:schemeClr val="accent1"/>
-          </a:effectRef>
-          <a:fontRef idx="minor">
-            <a:schemeClr val="lt1"/>
-          </a:fontRef>
-        </p:style>
-        <p:txBody>
-          <a:bodyPr rtlCol="0" anchor="ctr"/>
-          <a:lstStyle/>
-          <a:p>
-            <a:pPr algn="ctr"/>
-            <a:endParaRPr lang="en-US"/>
-          </a:p>
-        </p:txBody>
-      </p:sp>
-    </p:spTree>
-    <p:extLst>
-      <p:ext uri="{BB962C8B-B14F-4D97-AF65-F5344CB8AC3E}">
-        <p14:creationId xmlns:p14="http://schemas.microsoft.com/office/powerpoint/2010/main" val="1567023366"/>
-      </p:ext>
-    </p:extLst>
-  </p:cSld>
-  <p:clrMapOvr>
-    <a:masterClrMapping/>
-  </p:clrMapOvr>
-</p:sld>
-</file>
-
-<file path=ppt/slides/slide40.xml><?xml version="1.0" encoding="utf-8"?>
-<p:sld xmlns:a="http://schemas.openxmlformats.org/drawingml/2006/main" xmlns:r="http://schemas.openxmlformats.org/officeDocument/2006/relationships" xmlns:p="http://schemas.openxmlformats.org/presentationml/2006/main">
-  <p:cSld>
-    <p:spTree>
-      <p:nvGrpSpPr>
-        <p:cNvPr id="1" name=""/>
-        <p:cNvGrpSpPr/>
-        <p:nvPr/>
-      </p:nvGrpSpPr>
-      <p:grpSpPr>
-        <a:xfrm>
-          <a:off x="0" y="0"/>
-          <a:ext cx="0" cy="0"/>
-          <a:chOff x="0" y="0"/>
-          <a:chExt cx="0" cy="0"/>
-        </a:xfrm>
-      </p:grpSpPr>
-      <p:sp>
-        <p:nvSpPr>
-          <p:cNvPr id="2" name="Title 1">
-            <a:extLst>
-              <a:ext uri="{FF2B5EF4-FFF2-40B4-BE49-F238E27FC236}">
-                <a16:creationId xmlns:a16="http://schemas.microsoft.com/office/drawing/2014/main" id="{9DEE9C50-2180-9A09-7608-C08B3B78FF29}"/>
-              </a:ext>
-            </a:extLst>
-          </p:cNvPr>
-          <p:cNvSpPr>
-            <a:spLocks noGrp="1"/>
-          </p:cNvSpPr>
-          <p:nvPr>
-            <p:ph type="title"/>
-          </p:nvPr>
-        </p:nvSpPr>
-        <p:spPr/>
-        <p:txBody>
-          <a:bodyPr>
-            <a:noAutofit/>
-          </a:bodyPr>
-          <a:lstStyle/>
-          <a:p>
-            <a:r>
-              <a:rPr lang="en-US">
-                <a:solidFill>
-                  <a:srgbClr val="1F3864"/>
-                </a:solidFill>
-              </a:rPr>
-              <a:t>Ethics: honest data</a:t>
-            </a:r>
-          </a:p>
-        </p:txBody>
-      </p:sp>
-      <p:sp>
-        <p:nvSpPr>
-          <p:cNvPr id="4" name="Slide Number Placeholder 3">
-            <a:extLst>
-              <a:ext uri="{FF2B5EF4-FFF2-40B4-BE49-F238E27FC236}">
-                <a16:creationId xmlns:a16="http://schemas.microsoft.com/office/drawing/2014/main" id="{6203678C-7C08-89CA-E3B2-CB2008D7B3C1}"/>
-              </a:ext>
-            </a:extLst>
-          </p:cNvPr>
-          <p:cNvSpPr>
-            <a:spLocks noGrp="1"/>
-          </p:cNvSpPr>
-          <p:nvPr>
-            <p:ph type="sldNum" sz="quarter" idx="12"/>
-          </p:nvPr>
-        </p:nvSpPr>
-        <p:spPr/>
-        <p:txBody>
-          <a:bodyPr/>
-          <a:lstStyle/>
-          <a:p>
-            <a:fld id="{A80A81DD-F10A-4B1C-963A-0ABBB4865886}" type="slidenum">
-              <a:rPr lang="en-US" sz="1600" smtClean="0"/>
-              <a:t>40</a:t>
+              <a:t>41</a:t>
             </a:fld>
             <a:endParaRPr lang="en-US" sz="1600"/>
           </a:p>
@@ -29899,7 +30463,7 @@
 </p:sld>
 </file>
 
-<file path=ppt/slides/slide41.xml><?xml version="1.0" encoding="utf-8"?>
+<file path=ppt/slides/slide42.xml><?xml version="1.0" encoding="utf-8"?>
 <p:sld xmlns:a="http://schemas.openxmlformats.org/drawingml/2006/main" xmlns:r="http://schemas.openxmlformats.org/officeDocument/2006/relationships" xmlns:p="http://schemas.openxmlformats.org/presentationml/2006/main">
   <p:cSld>
     <p:spTree>
@@ -29973,7 +30537,7 @@
           <a:p>
             <a:fld id="{A80A81DD-F10A-4B1C-963A-0ABBB4865886}" type="slidenum">
               <a:rPr lang="en-US" sz="1600" smtClean="0"/>
-              <a:t>41</a:t>
+              <a:t>42</a:t>
             </a:fld>
             <a:endParaRPr lang="en-US" sz="1600"/>
           </a:p>
@@ -30882,7 +31446,7 @@
           <p:cNvPr id="2" name="Title 1">
             <a:extLst>
               <a:ext uri="{FF2B5EF4-FFF2-40B4-BE49-F238E27FC236}">
-                <a16:creationId xmlns:a16="http://schemas.microsoft.com/office/drawing/2014/main" id="{CA7970D3-B093-F70D-AA2D-66EFE9D61861}"/>
+                <a16:creationId xmlns:a16="http://schemas.microsoft.com/office/drawing/2014/main" id="{56E51DA7-11D0-1778-A5EF-3AC5C016E164}"/>
               </a:ext>
             </a:extLst>
           </p:cNvPr>
@@ -30916,7 +31480,7 @@
           <p:cNvPr id="3" name="Content Placeholder 2">
             <a:extLst>
               <a:ext uri="{FF2B5EF4-FFF2-40B4-BE49-F238E27FC236}">
-                <a16:creationId xmlns:a16="http://schemas.microsoft.com/office/drawing/2014/main" id="{84943284-F8EF-BF3E-3B0C-348A655D7E94}"/>
+                <a16:creationId xmlns:a16="http://schemas.microsoft.com/office/drawing/2014/main" id="{03684351-310C-F91C-7640-411793D5091C}"/>
               </a:ext>
             </a:extLst>
           </p:cNvPr>
@@ -31121,7 +31685,7 @@
           <p:cNvPr id="4" name="Slide Number Placeholder 3">
             <a:extLst>
               <a:ext uri="{FF2B5EF4-FFF2-40B4-BE49-F238E27FC236}">
-                <a16:creationId xmlns:a16="http://schemas.microsoft.com/office/drawing/2014/main" id="{AB174C1D-1F63-D1A7-A8B5-4D9ED63F98C2}"/>
+                <a16:creationId xmlns:a16="http://schemas.microsoft.com/office/drawing/2014/main" id="{CBDDA66C-38DE-C98F-BA8F-C026BB989695}"/>
               </a:ext>
             </a:extLst>
           </p:cNvPr>
@@ -31150,7 +31714,7 @@
           <p:cNvPr id="5" name="TextBox 4">
             <a:extLst>
               <a:ext uri="{FF2B5EF4-FFF2-40B4-BE49-F238E27FC236}">
-                <a16:creationId xmlns:a16="http://schemas.microsoft.com/office/drawing/2014/main" id="{E9C3BB19-99C5-A15E-0994-925F510AD143}"/>
+                <a16:creationId xmlns:a16="http://schemas.microsoft.com/office/drawing/2014/main" id="{7382BF1B-26E1-6854-42B6-A05093CF27C0}"/>
               </a:ext>
             </a:extLst>
           </p:cNvPr>
@@ -31190,7 +31754,7 @@
           <p:cNvPr id="6" name="Title rule">
             <a:extLst>
               <a:ext uri="{FF2B5EF4-FFF2-40B4-BE49-F238E27FC236}">
-                <a16:creationId xmlns:a16="http://schemas.microsoft.com/office/drawing/2014/main" id="{B625B840-F08E-A114-087B-9C7BEB5AE845}"/>
+                <a16:creationId xmlns:a16="http://schemas.microsoft.com/office/drawing/2014/main" id="{27420F5B-78A2-AD18-5122-958AF8DBB974}"/>
               </a:ext>
             </a:extLst>
           </p:cNvPr>
@@ -31256,7 +31820,7 @@
     </p:spTree>
     <p:extLst>
       <p:ext uri="{BB962C8B-B14F-4D97-AF65-F5344CB8AC3E}">
-        <p14:creationId xmlns:p14="http://schemas.microsoft.com/office/powerpoint/2010/main" val="93971566"/>
+        <p14:creationId xmlns:p14="http://schemas.microsoft.com/office/powerpoint/2010/main" val="1364066871"/>
       </p:ext>
     </p:extLst>
   </p:cSld>
@@ -31288,7 +31852,7 @@
           <p:cNvPr id="2" name="Title 1">
             <a:extLst>
               <a:ext uri="{FF2B5EF4-FFF2-40B4-BE49-F238E27FC236}">
-                <a16:creationId xmlns:a16="http://schemas.microsoft.com/office/drawing/2014/main" id="{51ED161F-5CC3-0228-A1EC-14031141E648}"/>
+                <a16:creationId xmlns:a16="http://schemas.microsoft.com/office/drawing/2014/main" id="{6ADBA469-EC53-AB44-2C66-C5F3546BB11C}"/>
               </a:ext>
             </a:extLst>
           </p:cNvPr>
@@ -31322,7 +31886,7 @@
           <p:cNvPr id="3" name="Content Placeholder 2">
             <a:extLst>
               <a:ext uri="{FF2B5EF4-FFF2-40B4-BE49-F238E27FC236}">
-                <a16:creationId xmlns:a16="http://schemas.microsoft.com/office/drawing/2014/main" id="{C688FA8C-17DF-52E0-BAB1-41BC3515C060}"/>
+                <a16:creationId xmlns:a16="http://schemas.microsoft.com/office/drawing/2014/main" id="{54204AF2-0CE7-2BEA-87A0-07E8AE92EDAE}"/>
               </a:ext>
             </a:extLst>
           </p:cNvPr>
@@ -31497,7 +32061,7 @@
           <p:cNvPr id="4" name="Slide Number Placeholder 3">
             <a:extLst>
               <a:ext uri="{FF2B5EF4-FFF2-40B4-BE49-F238E27FC236}">
-                <a16:creationId xmlns:a16="http://schemas.microsoft.com/office/drawing/2014/main" id="{3127D330-D6B6-7F56-F0A8-EFBE475B37EB}"/>
+                <a16:creationId xmlns:a16="http://schemas.microsoft.com/office/drawing/2014/main" id="{DB8F0E2C-B972-E595-EC77-EE262FD2F0EC}"/>
               </a:ext>
             </a:extLst>
           </p:cNvPr>
@@ -31526,7 +32090,7 @@
           <p:cNvPr id="5" name="TextBox 4">
             <a:extLst>
               <a:ext uri="{FF2B5EF4-FFF2-40B4-BE49-F238E27FC236}">
-                <a16:creationId xmlns:a16="http://schemas.microsoft.com/office/drawing/2014/main" id="{23538CAB-5750-BA19-EF36-86A6D6DD9774}"/>
+                <a16:creationId xmlns:a16="http://schemas.microsoft.com/office/drawing/2014/main" id="{83B12DA7-2636-21B9-74C3-C00D77CD6F25}"/>
               </a:ext>
             </a:extLst>
           </p:cNvPr>
@@ -31566,7 +32130,7 @@
           <p:cNvPr id="6" name="Title rule">
             <a:extLst>
               <a:ext uri="{FF2B5EF4-FFF2-40B4-BE49-F238E27FC236}">
-                <a16:creationId xmlns:a16="http://schemas.microsoft.com/office/drawing/2014/main" id="{6BC8A18B-078A-79EE-46E7-00BF009A3B96}"/>
+                <a16:creationId xmlns:a16="http://schemas.microsoft.com/office/drawing/2014/main" id="{D967E96B-4CFC-D3F4-67BB-14DAD0690C10}"/>
               </a:ext>
             </a:extLst>
           </p:cNvPr>
@@ -31632,7 +32196,7 @@
     </p:spTree>
     <p:extLst>
       <p:ext uri="{BB962C8B-B14F-4D97-AF65-F5344CB8AC3E}">
-        <p14:creationId xmlns:p14="http://schemas.microsoft.com/office/powerpoint/2010/main" val="2107612575"/>
+        <p14:creationId xmlns:p14="http://schemas.microsoft.com/office/powerpoint/2010/main" val="1643112316"/>
       </p:ext>
     </p:extLst>
   </p:cSld>
@@ -31985,7 +32549,7 @@
     </p:spTree>
     <p:extLst>
       <p:ext uri="{BB962C8B-B14F-4D97-AF65-F5344CB8AC3E}">
-        <p14:creationId xmlns:p14="http://schemas.microsoft.com/office/powerpoint/2010/main" val="1063286672"/>
+        <p14:creationId xmlns:p14="http://schemas.microsoft.com/office/powerpoint/2010/main" val="2255481592"/>
       </p:ext>
     </p:extLst>
   </p:cSld>
@@ -32802,7 +33366,7 @@
     </p:spTree>
     <p:extLst>
       <p:ext uri="{BB962C8B-B14F-4D97-AF65-F5344CB8AC3E}">
-        <p14:creationId xmlns:p14="http://schemas.microsoft.com/office/powerpoint/2010/main" val="1895560028"/>
+        <p14:creationId xmlns:p14="http://schemas.microsoft.com/office/powerpoint/2010/main" val="1504587893"/>
       </p:ext>
     </p:extLst>
   </p:cSld>
